--- a/docs/KopaAlert-Project-Documentation.pptx
+++ b/docs/KopaAlert-Project-Documentation.pptx
@@ -1,34 +1,33 @@
 
 <file path=ppt/presentation.xml><?xml version="1.0" encoding="utf-8"?>
-<p:presentation xmlns:a="http://schemas.openxmlformats.org/drawingml/2006/main" xmlns:r="http://schemas.openxmlformats.org/officeDocument/2006/relationships" xmlns:p="http://schemas.openxmlformats.org/presentationml/2006/main" saveSubsetFonts="1" autoCompressPictures="0">
+<p:presentation xmlns:a="http://schemas.openxmlformats.org/drawingml/2006/main" xmlns:r="http://schemas.openxmlformats.org/officeDocument/2006/relationships" xmlns:p="http://schemas.openxmlformats.org/presentationml/2006/main" autoCompressPictures="0">
   <p:sldMasterIdLst>
     <p:sldMasterId id="2147483648" r:id="rId1"/>
   </p:sldMasterIdLst>
   <p:sldIdLst>
-    <p:sldId id="256" r:id="rId7"/>
-    <p:sldId id="257" r:id="rId8"/>
-    <p:sldId id="258" r:id="rId9"/>
-    <p:sldId id="259" r:id="rId10"/>
-    <p:sldId id="260" r:id="rId11"/>
-    <p:sldId id="261" r:id="rId12"/>
-    <p:sldId id="262" r:id="rId13"/>
-    <p:sldId id="263" r:id="rId14"/>
-    <p:sldId id="264" r:id="rId15"/>
-    <p:sldId id="265" r:id="rId16"/>
-    <p:sldId id="266" r:id="rId17"/>
-    <p:sldId id="267" r:id="rId18"/>
-    <p:sldId id="268" r:id="rId19"/>
-    <p:sldId id="269" r:id="rId20"/>
-    <p:sldId id="270" r:id="rId21"/>
-    <p:sldId id="271" r:id="rId22"/>
-    <p:sldId id="272" r:id="rId23"/>
-    <p:sldId id="273" r:id="rId24"/>
-    <p:sldId id="274" r:id="rId25"/>
-    <p:sldId id="275" r:id="rId26"/>
-    <p:sldId id="276" r:id="rId27"/>
-    <p:sldId id="277" r:id="rId28"/>
+    <p:sldId id="256" r:id="rId3"/>
+    <p:sldId id="257" r:id="rId4"/>
+    <p:sldId id="258" r:id="rId5"/>
+    <p:sldId id="259" r:id="rId6"/>
+    <p:sldId id="260" r:id="rId7"/>
+    <p:sldId id="261" r:id="rId8"/>
+    <p:sldId id="262" r:id="rId9"/>
+    <p:sldId id="263" r:id="rId10"/>
+    <p:sldId id="264" r:id="rId11"/>
+    <p:sldId id="265" r:id="rId12"/>
+    <p:sldId id="266" r:id="rId13"/>
+    <p:sldId id="267" r:id="rId14"/>
+    <p:sldId id="268" r:id="rId15"/>
+    <p:sldId id="269" r:id="rId16"/>
+    <p:sldId id="270" r:id="rId17"/>
+    <p:sldId id="271" r:id="rId18"/>
+    <p:sldId id="272" r:id="rId19"/>
+    <p:sldId id="273" r:id="rId20"/>
+    <p:sldId id="274" r:id="rId21"/>
+    <p:sldId id="275" r:id="rId22"/>
+    <p:sldId id="277" r:id="rId23"/>
   </p:sldIdLst>
-  <p:sldSz cx="12191695" cy="6858000" type="screen4x3"/>
+  <p:sldSz cx="12191365" cy="6858000" type="screen4x3"/>
   <p:notesSz cx="6858000" cy="9144000"/>
   <p:defaultTextStyle>
     <a:defPPr>
@@ -125,6 +124,22 @@
       </a:defRPr>
     </a:lvl9pPr>
   </p:defaultTextStyle>
+  <p:extLst>
+    <p:ext uri="{EFAFB233-063F-42B5-8137-9DF3F51BA10A}">
+      <p15:sldGuideLst xmlns:p15="http://schemas.microsoft.com/office/powerpoint/2012/main">
+        <p15:guide id="1" orient="horz" pos="2160" userDrawn="1">
+          <p15:clr>
+            <a:srgbClr val="A4A3A4"/>
+          </p15:clr>
+        </p15:guide>
+        <p15:guide id="2" pos="2880" userDrawn="1">
+          <p15:clr>
+            <a:srgbClr val="A4A3A4"/>
+          </p15:clr>
+        </p15:guide>
+      </p15:sldGuideLst>
+    </p:ext>
+  </p:extLst>
 </p:presentation>
 </file>
 
@@ -309,7 +324,6 @@
           <a:p>
             <a:fld id="{5BCAD085-E8A6-8845-BD4E-CB4CCA059FC4}" type="datetimeFigureOut">
               <a:rPr lang="en-US" smtClean="0"/>
-              <a:t>1/27/13</a:t>
             </a:fld>
             <a:endParaRPr lang="en-US"/>
           </a:p>
@@ -351,18 +365,12 @@
           <a:p>
             <a:fld id="{C1FF6DA9-008F-8B48-92A6-B652298478BF}" type="slidenum">
               <a:rPr lang="en-US" smtClean="0"/>
-              <a:t>‹#›</a:t>
             </a:fld>
             <a:endParaRPr lang="en-US"/>
           </a:p>
         </p:txBody>
       </p:sp>
     </p:spTree>
-    <p:extLst>
-      <p:ext uri="{BB962C8B-B14F-4D97-AF65-F5344CB8AC3E}">
-        <p14:creationId xmlns:p14="http://schemas.microsoft.com/office/powerpoint/2010/main" val="3168075583"/>
-      </p:ext>
-    </p:extLst>
   </p:cSld>
   <p:clrMapOvr>
     <a:masterClrMapping/>
@@ -430,6 +438,7 @@
               <a:rPr lang="en-US" smtClean="0"/>
               <a:t>Click to edit Master text styles</a:t>
             </a:r>
+            <a:endParaRPr lang="en-US" smtClean="0"/>
           </a:p>
           <a:p>
             <a:pPr lvl="1"/>
@@ -437,6 +446,7 @@
               <a:rPr lang="en-US" smtClean="0"/>
               <a:t>Second level</a:t>
             </a:r>
+            <a:endParaRPr lang="en-US" smtClean="0"/>
           </a:p>
           <a:p>
             <a:pPr lvl="2"/>
@@ -444,6 +454,7 @@
               <a:rPr lang="en-US" smtClean="0"/>
               <a:t>Third level</a:t>
             </a:r>
+            <a:endParaRPr lang="en-US" smtClean="0"/>
           </a:p>
           <a:p>
             <a:pPr lvl="3"/>
@@ -451,6 +462,7 @@
               <a:rPr lang="en-US" smtClean="0"/>
               <a:t>Fourth level</a:t>
             </a:r>
+            <a:endParaRPr lang="en-US" smtClean="0"/>
           </a:p>
           <a:p>
             <a:pPr lvl="4"/>
@@ -479,7 +491,6 @@
           <a:p>
             <a:fld id="{5BCAD085-E8A6-8845-BD4E-CB4CCA059FC4}" type="datetimeFigureOut">
               <a:rPr lang="en-US" smtClean="0"/>
-              <a:t>1/27/13</a:t>
             </a:fld>
             <a:endParaRPr lang="en-US"/>
           </a:p>
@@ -521,18 +532,12 @@
           <a:p>
             <a:fld id="{C1FF6DA9-008F-8B48-92A6-B652298478BF}" type="slidenum">
               <a:rPr lang="en-US" smtClean="0"/>
-              <a:t>‹#›</a:t>
             </a:fld>
             <a:endParaRPr lang="en-US"/>
           </a:p>
         </p:txBody>
       </p:sp>
     </p:spTree>
-    <p:extLst>
-      <p:ext uri="{BB962C8B-B14F-4D97-AF65-F5344CB8AC3E}">
-        <p14:creationId xmlns:p14="http://schemas.microsoft.com/office/powerpoint/2010/main" val="2910927964"/>
-      </p:ext>
-    </p:extLst>
   </p:cSld>
   <p:clrMapOvr>
     <a:masterClrMapping/>
@@ -610,6 +615,7 @@
               <a:rPr lang="en-US" smtClean="0"/>
               <a:t>Click to edit Master text styles</a:t>
             </a:r>
+            <a:endParaRPr lang="en-US" smtClean="0"/>
           </a:p>
           <a:p>
             <a:pPr lvl="1"/>
@@ -617,6 +623,7 @@
               <a:rPr lang="en-US" smtClean="0"/>
               <a:t>Second level</a:t>
             </a:r>
+            <a:endParaRPr lang="en-US" smtClean="0"/>
           </a:p>
           <a:p>
             <a:pPr lvl="2"/>
@@ -624,6 +631,7 @@
               <a:rPr lang="en-US" smtClean="0"/>
               <a:t>Third level</a:t>
             </a:r>
+            <a:endParaRPr lang="en-US" smtClean="0"/>
           </a:p>
           <a:p>
             <a:pPr lvl="3"/>
@@ -631,6 +639,7 @@
               <a:rPr lang="en-US" smtClean="0"/>
               <a:t>Fourth level</a:t>
             </a:r>
+            <a:endParaRPr lang="en-US" smtClean="0"/>
           </a:p>
           <a:p>
             <a:pPr lvl="4"/>
@@ -659,7 +668,6 @@
           <a:p>
             <a:fld id="{5BCAD085-E8A6-8845-BD4E-CB4CCA059FC4}" type="datetimeFigureOut">
               <a:rPr lang="en-US" smtClean="0"/>
-              <a:t>1/27/13</a:t>
             </a:fld>
             <a:endParaRPr lang="en-US"/>
           </a:p>
@@ -701,18 +709,12 @@
           <a:p>
             <a:fld id="{C1FF6DA9-008F-8B48-92A6-B652298478BF}" type="slidenum">
               <a:rPr lang="en-US" smtClean="0"/>
-              <a:t>‹#›</a:t>
             </a:fld>
             <a:endParaRPr lang="en-US"/>
           </a:p>
         </p:txBody>
       </p:sp>
     </p:spTree>
-    <p:extLst>
-      <p:ext uri="{BB962C8B-B14F-4D97-AF65-F5344CB8AC3E}">
-        <p14:creationId xmlns:p14="http://schemas.microsoft.com/office/powerpoint/2010/main" val="3612223792"/>
-      </p:ext>
-    </p:extLst>
   </p:cSld>
   <p:clrMapOvr>
     <a:masterClrMapping/>
@@ -780,6 +782,7 @@
               <a:rPr lang="en-US" smtClean="0"/>
               <a:t>Click to edit Master text styles</a:t>
             </a:r>
+            <a:endParaRPr lang="en-US" smtClean="0"/>
           </a:p>
           <a:p>
             <a:pPr lvl="1"/>
@@ -787,6 +790,7 @@
               <a:rPr lang="en-US" smtClean="0"/>
               <a:t>Second level</a:t>
             </a:r>
+            <a:endParaRPr lang="en-US" smtClean="0"/>
           </a:p>
           <a:p>
             <a:pPr lvl="2"/>
@@ -794,6 +798,7 @@
               <a:rPr lang="en-US" smtClean="0"/>
               <a:t>Third level</a:t>
             </a:r>
+            <a:endParaRPr lang="en-US" smtClean="0"/>
           </a:p>
           <a:p>
             <a:pPr lvl="3"/>
@@ -801,6 +806,7 @@
               <a:rPr lang="en-US" smtClean="0"/>
               <a:t>Fourth level</a:t>
             </a:r>
+            <a:endParaRPr lang="en-US" smtClean="0"/>
           </a:p>
           <a:p>
             <a:pPr lvl="4"/>
@@ -829,7 +835,6 @@
           <a:p>
             <a:fld id="{5BCAD085-E8A6-8845-BD4E-CB4CCA059FC4}" type="datetimeFigureOut">
               <a:rPr lang="en-US" smtClean="0"/>
-              <a:t>1/27/13</a:t>
             </a:fld>
             <a:endParaRPr lang="en-US"/>
           </a:p>
@@ -871,18 +876,12 @@
           <a:p>
             <a:fld id="{C1FF6DA9-008F-8B48-92A6-B652298478BF}" type="slidenum">
               <a:rPr lang="en-US" smtClean="0"/>
-              <a:t>‹#›</a:t>
             </a:fld>
             <a:endParaRPr lang="en-US"/>
           </a:p>
         </p:txBody>
       </p:sp>
     </p:spTree>
-    <p:extLst>
-      <p:ext uri="{BB962C8B-B14F-4D97-AF65-F5344CB8AC3E}">
-        <p14:creationId xmlns:p14="http://schemas.microsoft.com/office/powerpoint/2010/main" val="2614314258"/>
-      </p:ext>
-    </p:extLst>
   </p:cSld>
   <p:clrMapOvr>
     <a:masterClrMapping/>
@@ -1055,6 +1054,7 @@
               <a:rPr lang="en-US" smtClean="0"/>
               <a:t>Click to edit Master text styles</a:t>
             </a:r>
+            <a:endParaRPr lang="en-US" smtClean="0"/>
           </a:p>
         </p:txBody>
       </p:sp>
@@ -1075,7 +1075,6 @@
           <a:p>
             <a:fld id="{5BCAD085-E8A6-8845-BD4E-CB4CCA059FC4}" type="datetimeFigureOut">
               <a:rPr lang="en-US" smtClean="0"/>
-              <a:t>1/27/13</a:t>
             </a:fld>
             <a:endParaRPr lang="en-US"/>
           </a:p>
@@ -1117,18 +1116,12 @@
           <a:p>
             <a:fld id="{C1FF6DA9-008F-8B48-92A6-B652298478BF}" type="slidenum">
               <a:rPr lang="en-US" smtClean="0"/>
-              <a:t>‹#›</a:t>
             </a:fld>
             <a:endParaRPr lang="en-US"/>
           </a:p>
         </p:txBody>
       </p:sp>
     </p:spTree>
-    <p:extLst>
-      <p:ext uri="{BB962C8B-B14F-4D97-AF65-F5344CB8AC3E}">
-        <p14:creationId xmlns:p14="http://schemas.microsoft.com/office/powerpoint/2010/main" val="960648375"/>
-      </p:ext>
-    </p:extLst>
   </p:cSld>
   <p:clrMapOvr>
     <a:masterClrMapping/>
@@ -1229,6 +1222,7 @@
               <a:rPr lang="en-US" smtClean="0"/>
               <a:t>Click to edit Master text styles</a:t>
             </a:r>
+            <a:endParaRPr lang="en-US" smtClean="0"/>
           </a:p>
           <a:p>
             <a:pPr lvl="1"/>
@@ -1236,6 +1230,7 @@
               <a:rPr lang="en-US" smtClean="0"/>
               <a:t>Second level</a:t>
             </a:r>
+            <a:endParaRPr lang="en-US" smtClean="0"/>
           </a:p>
           <a:p>
             <a:pPr lvl="2"/>
@@ -1243,6 +1238,7 @@
               <a:rPr lang="en-US" smtClean="0"/>
               <a:t>Third level</a:t>
             </a:r>
+            <a:endParaRPr lang="en-US" smtClean="0"/>
           </a:p>
           <a:p>
             <a:pPr lvl="3"/>
@@ -1250,6 +1246,7 @@
               <a:rPr lang="en-US" smtClean="0"/>
               <a:t>Fourth level</a:t>
             </a:r>
+            <a:endParaRPr lang="en-US" smtClean="0"/>
           </a:p>
           <a:p>
             <a:pPr lvl="4"/>
@@ -1314,6 +1311,7 @@
               <a:rPr lang="en-US" smtClean="0"/>
               <a:t>Click to edit Master text styles</a:t>
             </a:r>
+            <a:endParaRPr lang="en-US" smtClean="0"/>
           </a:p>
           <a:p>
             <a:pPr lvl="1"/>
@@ -1321,6 +1319,7 @@
               <a:rPr lang="en-US" smtClean="0"/>
               <a:t>Second level</a:t>
             </a:r>
+            <a:endParaRPr lang="en-US" smtClean="0"/>
           </a:p>
           <a:p>
             <a:pPr lvl="2"/>
@@ -1328,6 +1327,7 @@
               <a:rPr lang="en-US" smtClean="0"/>
               <a:t>Third level</a:t>
             </a:r>
+            <a:endParaRPr lang="en-US" smtClean="0"/>
           </a:p>
           <a:p>
             <a:pPr lvl="3"/>
@@ -1335,6 +1335,7 @@
               <a:rPr lang="en-US" smtClean="0"/>
               <a:t>Fourth level</a:t>
             </a:r>
+            <a:endParaRPr lang="en-US" smtClean="0"/>
           </a:p>
           <a:p>
             <a:pPr lvl="4"/>
@@ -1363,7 +1364,6 @@
           <a:p>
             <a:fld id="{5BCAD085-E8A6-8845-BD4E-CB4CCA059FC4}" type="datetimeFigureOut">
               <a:rPr lang="en-US" smtClean="0"/>
-              <a:t>1/27/13</a:t>
             </a:fld>
             <a:endParaRPr lang="en-US"/>
           </a:p>
@@ -1405,18 +1405,12 @@
           <a:p>
             <a:fld id="{C1FF6DA9-008F-8B48-92A6-B652298478BF}" type="slidenum">
               <a:rPr lang="en-US" smtClean="0"/>
-              <a:t>‹#›</a:t>
             </a:fld>
             <a:endParaRPr lang="en-US"/>
           </a:p>
         </p:txBody>
       </p:sp>
     </p:spTree>
-    <p:extLst>
-      <p:ext uri="{BB962C8B-B14F-4D97-AF65-F5344CB8AC3E}">
-        <p14:creationId xmlns:p14="http://schemas.microsoft.com/office/powerpoint/2010/main" val="2782244947"/>
-      </p:ext>
-    </p:extLst>
   </p:cSld>
   <p:clrMapOvr>
     <a:masterClrMapping/>
@@ -1530,6 +1524,7 @@
               <a:rPr lang="en-US" smtClean="0"/>
               <a:t>Click to edit Master text styles</a:t>
             </a:r>
+            <a:endParaRPr lang="en-US" smtClean="0"/>
           </a:p>
         </p:txBody>
       </p:sp>
@@ -1586,6 +1581,7 @@
               <a:rPr lang="en-US" smtClean="0"/>
               <a:t>Click to edit Master text styles</a:t>
             </a:r>
+            <a:endParaRPr lang="en-US" smtClean="0"/>
           </a:p>
           <a:p>
             <a:pPr lvl="1"/>
@@ -1593,6 +1589,7 @@
               <a:rPr lang="en-US" smtClean="0"/>
               <a:t>Second level</a:t>
             </a:r>
+            <a:endParaRPr lang="en-US" smtClean="0"/>
           </a:p>
           <a:p>
             <a:pPr lvl="2"/>
@@ -1600,6 +1597,7 @@
               <a:rPr lang="en-US" smtClean="0"/>
               <a:t>Third level</a:t>
             </a:r>
+            <a:endParaRPr lang="en-US" smtClean="0"/>
           </a:p>
           <a:p>
             <a:pPr lvl="3"/>
@@ -1607,6 +1605,7 @@
               <a:rPr lang="en-US" smtClean="0"/>
               <a:t>Fourth level</a:t>
             </a:r>
+            <a:endParaRPr lang="en-US" smtClean="0"/>
           </a:p>
           <a:p>
             <a:pPr lvl="4"/>
@@ -1680,6 +1679,7 @@
               <a:rPr lang="en-US" smtClean="0"/>
               <a:t>Click to edit Master text styles</a:t>
             </a:r>
+            <a:endParaRPr lang="en-US" smtClean="0"/>
           </a:p>
         </p:txBody>
       </p:sp>
@@ -1736,6 +1736,7 @@
               <a:rPr lang="en-US" smtClean="0"/>
               <a:t>Click to edit Master text styles</a:t>
             </a:r>
+            <a:endParaRPr lang="en-US" smtClean="0"/>
           </a:p>
           <a:p>
             <a:pPr lvl="1"/>
@@ -1743,6 +1744,7 @@
               <a:rPr lang="en-US" smtClean="0"/>
               <a:t>Second level</a:t>
             </a:r>
+            <a:endParaRPr lang="en-US" smtClean="0"/>
           </a:p>
           <a:p>
             <a:pPr lvl="2"/>
@@ -1750,6 +1752,7 @@
               <a:rPr lang="en-US" smtClean="0"/>
               <a:t>Third level</a:t>
             </a:r>
+            <a:endParaRPr lang="en-US" smtClean="0"/>
           </a:p>
           <a:p>
             <a:pPr lvl="3"/>
@@ -1757,6 +1760,7 @@
               <a:rPr lang="en-US" smtClean="0"/>
               <a:t>Fourth level</a:t>
             </a:r>
+            <a:endParaRPr lang="en-US" smtClean="0"/>
           </a:p>
           <a:p>
             <a:pPr lvl="4"/>
@@ -1785,7 +1789,6 @@
           <a:p>
             <a:fld id="{5BCAD085-E8A6-8845-BD4E-CB4CCA059FC4}" type="datetimeFigureOut">
               <a:rPr lang="en-US" smtClean="0"/>
-              <a:t>1/27/13</a:t>
             </a:fld>
             <a:endParaRPr lang="en-US"/>
           </a:p>
@@ -1827,18 +1830,12 @@
           <a:p>
             <a:fld id="{C1FF6DA9-008F-8B48-92A6-B652298478BF}" type="slidenum">
               <a:rPr lang="en-US" smtClean="0"/>
-              <a:t>‹#›</a:t>
             </a:fld>
             <a:endParaRPr lang="en-US"/>
           </a:p>
         </p:txBody>
       </p:sp>
     </p:spTree>
-    <p:extLst>
-      <p:ext uri="{BB962C8B-B14F-4D97-AF65-F5344CB8AC3E}">
-        <p14:creationId xmlns:p14="http://schemas.microsoft.com/office/powerpoint/2010/main" val="990158736"/>
-      </p:ext>
-    </p:extLst>
   </p:cSld>
   <p:clrMapOvr>
     <a:masterClrMapping/>
@@ -1903,7 +1900,6 @@
           <a:p>
             <a:fld id="{5BCAD085-E8A6-8845-BD4E-CB4CCA059FC4}" type="datetimeFigureOut">
               <a:rPr lang="en-US" smtClean="0"/>
-              <a:t>1/27/13</a:t>
             </a:fld>
             <a:endParaRPr lang="en-US"/>
           </a:p>
@@ -1945,18 +1941,12 @@
           <a:p>
             <a:fld id="{C1FF6DA9-008F-8B48-92A6-B652298478BF}" type="slidenum">
               <a:rPr lang="en-US" smtClean="0"/>
-              <a:t>‹#›</a:t>
             </a:fld>
             <a:endParaRPr lang="en-US"/>
           </a:p>
         </p:txBody>
       </p:sp>
     </p:spTree>
-    <p:extLst>
-      <p:ext uri="{BB962C8B-B14F-4D97-AF65-F5344CB8AC3E}">
-        <p14:creationId xmlns:p14="http://schemas.microsoft.com/office/powerpoint/2010/main" val="727027711"/>
-      </p:ext>
-    </p:extLst>
   </p:cSld>
   <p:clrMapOvr>
     <a:masterClrMapping/>
@@ -1998,7 +1988,6 @@
           <a:p>
             <a:fld id="{5BCAD085-E8A6-8845-BD4E-CB4CCA059FC4}" type="datetimeFigureOut">
               <a:rPr lang="en-US" smtClean="0"/>
-              <a:t>1/27/13</a:t>
             </a:fld>
             <a:endParaRPr lang="en-US"/>
           </a:p>
@@ -2040,18 +2029,12 @@
           <a:p>
             <a:fld id="{C1FF6DA9-008F-8B48-92A6-B652298478BF}" type="slidenum">
               <a:rPr lang="en-US" smtClean="0"/>
-              <a:t>‹#›</a:t>
             </a:fld>
             <a:endParaRPr lang="en-US"/>
           </a:p>
         </p:txBody>
       </p:sp>
     </p:spTree>
-    <p:extLst>
-      <p:ext uri="{BB962C8B-B14F-4D97-AF65-F5344CB8AC3E}">
-        <p14:creationId xmlns:p14="http://schemas.microsoft.com/office/powerpoint/2010/main" val="1212999818"/>
-      </p:ext>
-    </p:extLst>
   </p:cSld>
   <p:clrMapOvr>
     <a:masterClrMapping/>
@@ -2161,6 +2144,7 @@
               <a:rPr lang="en-US" smtClean="0"/>
               <a:t>Click to edit Master text styles</a:t>
             </a:r>
+            <a:endParaRPr lang="en-US" smtClean="0"/>
           </a:p>
           <a:p>
             <a:pPr lvl="1"/>
@@ -2168,6 +2152,7 @@
               <a:rPr lang="en-US" smtClean="0"/>
               <a:t>Second level</a:t>
             </a:r>
+            <a:endParaRPr lang="en-US" smtClean="0"/>
           </a:p>
           <a:p>
             <a:pPr lvl="2"/>
@@ -2175,6 +2160,7 @@
               <a:rPr lang="en-US" smtClean="0"/>
               <a:t>Third level</a:t>
             </a:r>
+            <a:endParaRPr lang="en-US" smtClean="0"/>
           </a:p>
           <a:p>
             <a:pPr lvl="3"/>
@@ -2182,6 +2168,7 @@
               <a:rPr lang="en-US" smtClean="0"/>
               <a:t>Fourth level</a:t>
             </a:r>
+            <a:endParaRPr lang="en-US" smtClean="0"/>
           </a:p>
           <a:p>
             <a:pPr lvl="4"/>
@@ -2255,6 +2242,7 @@
               <a:rPr lang="en-US" smtClean="0"/>
               <a:t>Click to edit Master text styles</a:t>
             </a:r>
+            <a:endParaRPr lang="en-US" smtClean="0"/>
           </a:p>
         </p:txBody>
       </p:sp>
@@ -2275,7 +2263,6 @@
           <a:p>
             <a:fld id="{5BCAD085-E8A6-8845-BD4E-CB4CCA059FC4}" type="datetimeFigureOut">
               <a:rPr lang="en-US" smtClean="0"/>
-              <a:t>1/27/13</a:t>
             </a:fld>
             <a:endParaRPr lang="en-US"/>
           </a:p>
@@ -2317,18 +2304,12 @@
           <a:p>
             <a:fld id="{C1FF6DA9-008F-8B48-92A6-B652298478BF}" type="slidenum">
               <a:rPr lang="en-US" smtClean="0"/>
-              <a:t>‹#›</a:t>
             </a:fld>
             <a:endParaRPr lang="en-US"/>
           </a:p>
         </p:txBody>
       </p:sp>
     </p:spTree>
-    <p:extLst>
-      <p:ext uri="{BB962C8B-B14F-4D97-AF65-F5344CB8AC3E}">
-        <p14:creationId xmlns:p14="http://schemas.microsoft.com/office/powerpoint/2010/main" val="1840726560"/>
-      </p:ext>
-    </p:extLst>
   </p:cSld>
   <p:clrMapOvr>
     <a:masterClrMapping/>
@@ -2508,6 +2489,7 @@
               <a:rPr lang="en-US" smtClean="0"/>
               <a:t>Click to edit Master text styles</a:t>
             </a:r>
+            <a:endParaRPr lang="en-US" smtClean="0"/>
           </a:p>
         </p:txBody>
       </p:sp>
@@ -2528,7 +2510,6 @@
           <a:p>
             <a:fld id="{5BCAD085-E8A6-8845-BD4E-CB4CCA059FC4}" type="datetimeFigureOut">
               <a:rPr lang="en-US" smtClean="0"/>
-              <a:t>1/27/13</a:t>
             </a:fld>
             <a:endParaRPr lang="en-US"/>
           </a:p>
@@ -2570,18 +2551,12 @@
           <a:p>
             <a:fld id="{C1FF6DA9-008F-8B48-92A6-B652298478BF}" type="slidenum">
               <a:rPr lang="en-US" smtClean="0"/>
-              <a:t>‹#›</a:t>
             </a:fld>
             <a:endParaRPr lang="en-US"/>
           </a:p>
         </p:txBody>
       </p:sp>
     </p:spTree>
-    <p:extLst>
-      <p:ext uri="{BB962C8B-B14F-4D97-AF65-F5344CB8AC3E}">
-        <p14:creationId xmlns:p14="http://schemas.microsoft.com/office/powerpoint/2010/main" val="3889236939"/>
-      </p:ext>
-    </p:extLst>
   </p:cSld>
   <p:clrMapOvr>
     <a:masterClrMapping/>
@@ -2674,6 +2649,7 @@
               <a:rPr lang="en-US" smtClean="0"/>
               <a:t>Click to edit Master text styles</a:t>
             </a:r>
+            <a:endParaRPr lang="en-US" smtClean="0"/>
           </a:p>
           <a:p>
             <a:pPr lvl="1"/>
@@ -2681,6 +2657,7 @@
               <a:rPr lang="en-US" smtClean="0"/>
               <a:t>Second level</a:t>
             </a:r>
+            <a:endParaRPr lang="en-US" smtClean="0"/>
           </a:p>
           <a:p>
             <a:pPr lvl="2"/>
@@ -2688,6 +2665,7 @@
               <a:rPr lang="en-US" smtClean="0"/>
               <a:t>Third level</a:t>
             </a:r>
+            <a:endParaRPr lang="en-US" smtClean="0"/>
           </a:p>
           <a:p>
             <a:pPr lvl="3"/>
@@ -2695,6 +2673,7 @@
               <a:rPr lang="en-US" smtClean="0"/>
               <a:t>Fourth level</a:t>
             </a:r>
+            <a:endParaRPr lang="en-US" smtClean="0"/>
           </a:p>
           <a:p>
             <a:pPr lvl="4"/>
@@ -2741,7 +2720,6 @@
           <a:p>
             <a:fld id="{5BCAD085-E8A6-8845-BD4E-CB4CCA059FC4}" type="datetimeFigureOut">
               <a:rPr lang="en-US" smtClean="0"/>
-              <a:t>1/27/13</a:t>
             </a:fld>
             <a:endParaRPr lang="en-US"/>
           </a:p>
@@ -2819,18 +2797,12 @@
           <a:p>
             <a:fld id="{C1FF6DA9-008F-8B48-92A6-B652298478BF}" type="slidenum">
               <a:rPr lang="en-US" smtClean="0"/>
-              <a:t>‹#›</a:t>
             </a:fld>
             <a:endParaRPr lang="en-US"/>
           </a:p>
         </p:txBody>
       </p:sp>
     </p:spTree>
-    <p:extLst>
-      <p:ext uri="{BB962C8B-B14F-4D97-AF65-F5344CB8AC3E}">
-        <p14:creationId xmlns:p14="http://schemas.microsoft.com/office/powerpoint/2010/main" val="2209977519"/>
-      </p:ext>
-    </p:extLst>
   </p:cSld>
   <p:clrMap bg1="lt1" tx1="dk1" bg2="lt2" tx2="dk2" accent1="accent1" accent2="accent2" accent3="accent3" accent4="accent4" accent5="accent5" accent6="accent6" hlink="hlink" folHlink="folHlink"/>
   <p:sldLayoutIdLst>
@@ -2868,7 +2840,7 @@
         <a:spcBef>
           <a:spcPct val="20000"/>
         </a:spcBef>
-        <a:buFont typeface="Arial"/>
+        <a:buFont typeface="Arial" panose="020B0604020202020204"/>
         <a:buChar char="•"/>
         <a:defRPr sz="3200" kern="1200">
           <a:solidFill>
@@ -2883,7 +2855,7 @@
         <a:spcBef>
           <a:spcPct val="20000"/>
         </a:spcBef>
-        <a:buFont typeface="Arial"/>
+        <a:buFont typeface="Arial" panose="020B0604020202020204"/>
         <a:buChar char="–"/>
         <a:defRPr sz="2800" kern="1200">
           <a:solidFill>
@@ -2898,7 +2870,7 @@
         <a:spcBef>
           <a:spcPct val="20000"/>
         </a:spcBef>
-        <a:buFont typeface="Arial"/>
+        <a:buFont typeface="Arial" panose="020B0604020202020204"/>
         <a:buChar char="•"/>
         <a:defRPr sz="2400" kern="1200">
           <a:solidFill>
@@ -2913,7 +2885,7 @@
         <a:spcBef>
           <a:spcPct val="20000"/>
         </a:spcBef>
-        <a:buFont typeface="Arial"/>
+        <a:buFont typeface="Arial" panose="020B0604020202020204"/>
         <a:buChar char="–"/>
         <a:defRPr sz="2000" kern="1200">
           <a:solidFill>
@@ -2928,7 +2900,7 @@
         <a:spcBef>
           <a:spcPct val="20000"/>
         </a:spcBef>
-        <a:buFont typeface="Arial"/>
+        <a:buFont typeface="Arial" panose="020B0604020202020204"/>
         <a:buChar char="»"/>
         <a:defRPr sz="2000" kern="1200">
           <a:solidFill>
@@ -2943,7 +2915,7 @@
         <a:spcBef>
           <a:spcPct val="20000"/>
         </a:spcBef>
-        <a:buFont typeface="Arial"/>
+        <a:buFont typeface="Arial" panose="020B0604020202020204"/>
         <a:buChar char="•"/>
         <a:defRPr sz="2000" kern="1200">
           <a:solidFill>
@@ -2958,7 +2930,7 @@
         <a:spcBef>
           <a:spcPct val="20000"/>
         </a:spcBef>
-        <a:buFont typeface="Arial"/>
+        <a:buFont typeface="Arial" panose="020B0604020202020204"/>
         <a:buChar char="•"/>
         <a:defRPr sz="2000" kern="1200">
           <a:solidFill>
@@ -2973,7 +2945,7 @@
         <a:spcBef>
           <a:spcPct val="20000"/>
         </a:spcBef>
-        <a:buFont typeface="Arial"/>
+        <a:buFont typeface="Arial" panose="020B0604020202020204"/>
         <a:buChar char="•"/>
         <a:defRPr sz="2000" kern="1200">
           <a:solidFill>
@@ -2988,7 +2960,7 @@
         <a:spcBef>
           <a:spcPct val="20000"/>
         </a:spcBef>
-        <a:buFont typeface="Arial"/>
+        <a:buFont typeface="Arial" panose="020B0604020202020204"/>
         <a:buChar char="•"/>
         <a:defRPr sz="2000" kern="1200">
           <a:solidFill>
@@ -3100,7 +3072,7 @@
 </file>
 
 <file path=ppt/slides/slide1.xml><?xml version="1.0" encoding="utf-8"?>
-<p:sld xmlns:a="http://schemas.openxmlformats.org/drawingml/2006/main" xmlns:p="http://schemas.openxmlformats.org/presentationml/2006/main" xmlns:r="http://schemas.openxmlformats.org/officeDocument/2006/relationships">
+<p:sld xmlns:a="http://schemas.openxmlformats.org/drawingml/2006/main" xmlns:r="http://schemas.openxmlformats.org/officeDocument/2006/relationships" xmlns:p="http://schemas.openxmlformats.org/presentationml/2006/main">
   <p:cSld>
     <p:bg>
       <p:bgPr>
@@ -3233,10 +3205,16 @@
                 <a:solidFill>
                   <a:srgbClr val="E69A1F"/>
                 </a:solidFill>
-                <a:latin typeface="Calibri"/>
+                <a:latin typeface="Calibri" panose="020F0502020204030204"/>
               </a:rPr>
               <a:t>FINAL YEAR PROJECT DOCUMENTATION</a:t>
             </a:r>
+            <a:endParaRPr sz="1500" b="1" i="0">
+              <a:solidFill>
+                <a:srgbClr val="E69A1F"/>
+              </a:solidFill>
+              <a:latin typeface="Calibri" panose="020F0502020204030204"/>
+            </a:endParaRPr>
           </a:p>
         </p:txBody>
       </p:sp>
@@ -3268,10 +3246,16 @@
                 <a:solidFill>
                   <a:srgbClr val="FFFFFF"/>
                 </a:solidFill>
-                <a:latin typeface="Calibri"/>
+                <a:latin typeface="Calibri" panose="020F0502020204030204"/>
               </a:rPr>
               <a:t>KopaAlert</a:t>
             </a:r>
+            <a:endParaRPr sz="6400" b="1" i="0">
+              <a:solidFill>
+                <a:srgbClr val="FFFFFF"/>
+              </a:solidFill>
+              <a:latin typeface="Calibri" panose="020F0502020204030204"/>
+            </a:endParaRPr>
           </a:p>
         </p:txBody>
       </p:sp>
@@ -3303,11 +3287,17 @@
                 <a:solidFill>
                   <a:srgbClr val="CFE3E0"/>
                 </a:solidFill>
-                <a:latin typeface="Calibri"/>
+                <a:latin typeface="Calibri" panose="020F0502020204030204"/>
               </a:rPr>
               <a:t>An Automated Debt-Tracking and SMS/Email Payment-Reminder
 System for Small Businesses</a:t>
             </a:r>
+            <a:endParaRPr sz="2200" b="0" i="0">
+              <a:solidFill>
+                <a:srgbClr val="CFE3E0"/>
+              </a:solidFill>
+              <a:latin typeface="Calibri" panose="020F0502020204030204"/>
+            </a:endParaRPr>
           </a:p>
         </p:txBody>
       </p:sp>
@@ -3383,10 +3373,16 @@
                 <a:solidFill>
                   <a:srgbClr val="E69A1F"/>
                 </a:solidFill>
-                <a:latin typeface="Calibri"/>
+                <a:latin typeface="Calibri" panose="020F0502020204030204"/>
               </a:rPr>
               <a:t>Prepared by</a:t>
             </a:r>
+            <a:endParaRPr sz="1300" b="1" i="0">
+              <a:solidFill>
+                <a:srgbClr val="E69A1F"/>
+              </a:solidFill>
+              <a:latin typeface="Calibri" panose="020F0502020204030204"/>
+            </a:endParaRPr>
           </a:p>
         </p:txBody>
       </p:sp>
@@ -3418,10 +3414,16 @@
                 <a:solidFill>
                   <a:srgbClr val="FFFFFF"/>
                 </a:solidFill>
-                <a:latin typeface="Calibri"/>
+                <a:latin typeface="Calibri" panose="020F0502020204030204"/>
               </a:rPr>
               <a:t>Stanley Murangiri</a:t>
             </a:r>
+            <a:endParaRPr sz="1300" b="0" i="0">
+              <a:solidFill>
+                <a:srgbClr val="FFFFFF"/>
+              </a:solidFill>
+              <a:latin typeface="Calibri" panose="020F0502020204030204"/>
+            </a:endParaRPr>
           </a:p>
         </p:txBody>
       </p:sp>
@@ -3453,10 +3455,16 @@
                 <a:solidFill>
                   <a:srgbClr val="E69A1F"/>
                 </a:solidFill>
-                <a:latin typeface="Calibri"/>
+                <a:latin typeface="Calibri" panose="020F0502020204030204"/>
               </a:rPr>
               <a:t>Institution</a:t>
             </a:r>
+            <a:endParaRPr sz="1300" b="1" i="0">
+              <a:solidFill>
+                <a:srgbClr val="E69A1F"/>
+              </a:solidFill>
+              <a:latin typeface="Calibri" panose="020F0502020204030204"/>
+            </a:endParaRPr>
           </a:p>
         </p:txBody>
       </p:sp>
@@ -3488,10 +3496,16 @@
                 <a:solidFill>
                   <a:srgbClr val="FFFFFF"/>
                 </a:solidFill>
-                <a:latin typeface="Calibri"/>
+                <a:latin typeface="Calibri" panose="020F0502020204030204"/>
               </a:rPr>
               <a:t>Mama Ngina University College</a:t>
             </a:r>
+            <a:endParaRPr sz="1300" b="0" i="0">
+              <a:solidFill>
+                <a:srgbClr val="FFFFFF"/>
+              </a:solidFill>
+              <a:latin typeface="Calibri" panose="020F0502020204030204"/>
+            </a:endParaRPr>
           </a:p>
         </p:txBody>
       </p:sp>
@@ -3523,10 +3537,16 @@
                 <a:solidFill>
                   <a:srgbClr val="E69A1F"/>
                 </a:solidFill>
-                <a:latin typeface="Calibri"/>
+                <a:latin typeface="Calibri" panose="020F0502020204030204"/>
               </a:rPr>
               <a:t>Programme</a:t>
             </a:r>
+            <a:endParaRPr sz="1300" b="1" i="0">
+              <a:solidFill>
+                <a:srgbClr val="E69A1F"/>
+              </a:solidFill>
+              <a:latin typeface="Calibri" panose="020F0502020204030204"/>
+            </a:endParaRPr>
           </a:p>
         </p:txBody>
       </p:sp>
@@ -3539,7 +3559,7 @@
         <p:spPr>
           <a:xfrm>
             <a:off x="3291840" y="4946904"/>
-            <a:ext cx="7863840" cy="365760"/>
+            <a:ext cx="7863840" cy="291465"/>
           </a:xfrm>
           <a:prstGeom prst="rect">
             <a:avLst/>
@@ -3554,14 +3574,20 @@
           <a:p>
             <a:pPr algn="l"/>
             <a:r>
-              <a:rPr sz="1300" b="0" i="0">
+              <a:rPr lang="en-US" sz="1300" b="0" i="0">
                 <a:solidFill>
                   <a:srgbClr val="FFFFFF"/>
                 </a:solidFill>
-                <a:latin typeface="Calibri"/>
-              </a:rPr>
-              <a:t>[Add your degree programme / course code]</a:t>
-            </a:r>
+                <a:latin typeface="Calibri" panose="020F0502020204030204"/>
+              </a:rPr>
+              <a:t>Compuet scince</a:t>
+            </a:r>
+            <a:endParaRPr lang="en-US" sz="1300" b="0" i="0">
+              <a:solidFill>
+                <a:srgbClr val="FFFFFF"/>
+              </a:solidFill>
+              <a:latin typeface="Calibri" panose="020F0502020204030204"/>
+            </a:endParaRPr>
           </a:p>
         </p:txBody>
       </p:sp>
@@ -3593,10 +3619,16 @@
                 <a:solidFill>
                   <a:srgbClr val="E69A1F"/>
                 </a:solidFill>
-                <a:latin typeface="Calibri"/>
+                <a:latin typeface="Calibri" panose="020F0502020204030204"/>
               </a:rPr>
               <a:t>Registration No.</a:t>
             </a:r>
+            <a:endParaRPr sz="1300" b="1" i="0">
+              <a:solidFill>
+                <a:srgbClr val="E69A1F"/>
+              </a:solidFill>
+              <a:latin typeface="Calibri" panose="020F0502020204030204"/>
+            </a:endParaRPr>
           </a:p>
         </p:txBody>
       </p:sp>
@@ -3609,7 +3641,7 @@
         <p:spPr>
           <a:xfrm>
             <a:off x="3291840" y="5294376"/>
-            <a:ext cx="7863840" cy="365760"/>
+            <a:ext cx="7863840" cy="291465"/>
           </a:xfrm>
           <a:prstGeom prst="rect">
             <a:avLst/>
@@ -3624,154 +3656,20 @@
           <a:p>
             <a:pPr algn="l"/>
             <a:r>
-              <a:rPr sz="1300" b="0" i="0">
+              <a:rPr lang="en-US" sz="1300" b="0" i="0">
                 <a:solidFill>
                   <a:srgbClr val="FFFFFF"/>
                 </a:solidFill>
-                <a:latin typeface="Calibri"/>
-              </a:rPr>
-              <a:t>[Add your registration / admission number]</a:t>
-            </a:r>
-          </a:p>
-        </p:txBody>
-      </p:sp>
-      <p:sp>
-        <p:nvSpPr>
-          <p:cNvPr id="16" name="TextBox 15"/>
-          <p:cNvSpPr txBox="1"/>
-          <p:nvPr/>
-        </p:nvSpPr>
-        <p:spPr>
-          <a:xfrm>
-            <a:off x="822960" y="5641848"/>
-            <a:ext cx="2377440" cy="320040"/>
-          </a:xfrm>
-          <a:prstGeom prst="rect">
-            <a:avLst/>
-          </a:prstGeom>
-          <a:noFill/>
-        </p:spPr>
-        <p:txBody>
-          <a:bodyPr wrap="square">
-            <a:spAutoFit/>
-          </a:bodyPr>
-          <a:lstStyle/>
-          <a:p>
-            <a:pPr algn="l"/>
-            <a:r>
-              <a:rPr sz="1300" b="1" i="0">
-                <a:solidFill>
-                  <a:srgbClr val="E69A1F"/>
-                </a:solidFill>
-                <a:latin typeface="Calibri"/>
-              </a:rPr>
-              <a:t>Supervisor</a:t>
-            </a:r>
-          </a:p>
-        </p:txBody>
-      </p:sp>
-      <p:sp>
-        <p:nvSpPr>
-          <p:cNvPr id="17" name="TextBox 16"/>
-          <p:cNvSpPr txBox="1"/>
-          <p:nvPr/>
-        </p:nvSpPr>
-        <p:spPr>
-          <a:xfrm>
-            <a:off x="3291840" y="5641848"/>
-            <a:ext cx="7863840" cy="365760"/>
-          </a:xfrm>
-          <a:prstGeom prst="rect">
-            <a:avLst/>
-          </a:prstGeom>
-          <a:noFill/>
-        </p:spPr>
-        <p:txBody>
-          <a:bodyPr wrap="square">
-            <a:spAutoFit/>
-          </a:bodyPr>
-          <a:lstStyle/>
-          <a:p>
-            <a:pPr algn="l"/>
-            <a:r>
-              <a:rPr sz="1300" b="0" i="0">
-                <a:solidFill>
-                  <a:srgbClr val="FFFFFF"/>
-                </a:solidFill>
-                <a:latin typeface="Calibri"/>
-              </a:rPr>
-              <a:t>[Add supervisor's name]</a:t>
-            </a:r>
-          </a:p>
-        </p:txBody>
-      </p:sp>
-      <p:sp>
-        <p:nvSpPr>
-          <p:cNvPr id="18" name="TextBox 17"/>
-          <p:cNvSpPr txBox="1"/>
-          <p:nvPr/>
-        </p:nvSpPr>
-        <p:spPr>
-          <a:xfrm>
-            <a:off x="822960" y="5989320"/>
-            <a:ext cx="2377440" cy="320040"/>
-          </a:xfrm>
-          <a:prstGeom prst="rect">
-            <a:avLst/>
-          </a:prstGeom>
-          <a:noFill/>
-        </p:spPr>
-        <p:txBody>
-          <a:bodyPr wrap="square">
-            <a:spAutoFit/>
-          </a:bodyPr>
-          <a:lstStyle/>
-          <a:p>
-            <a:pPr algn="l"/>
-            <a:r>
-              <a:rPr sz="1300" b="1" i="0">
-                <a:solidFill>
-                  <a:srgbClr val="E69A1F"/>
-                </a:solidFill>
-                <a:latin typeface="Calibri"/>
-              </a:rPr>
-              <a:t>Submitted</a:t>
-            </a:r>
-          </a:p>
-        </p:txBody>
-      </p:sp>
-      <p:sp>
-        <p:nvSpPr>
-          <p:cNvPr id="19" name="TextBox 18"/>
-          <p:cNvSpPr txBox="1"/>
-          <p:nvPr/>
-        </p:nvSpPr>
-        <p:spPr>
-          <a:xfrm>
-            <a:off x="3291840" y="5989320"/>
-            <a:ext cx="7863840" cy="365760"/>
-          </a:xfrm>
-          <a:prstGeom prst="rect">
-            <a:avLst/>
-          </a:prstGeom>
-          <a:noFill/>
-        </p:spPr>
-        <p:txBody>
-          <a:bodyPr wrap="square">
-            <a:spAutoFit/>
-          </a:bodyPr>
-          <a:lstStyle/>
-          <a:p>
-            <a:pPr algn="l"/>
-            <a:r>
-              <a:rPr sz="1300" b="0" i="0">
-                <a:solidFill>
-                  <a:srgbClr val="FFFFFF"/>
-                </a:solidFill>
-                <a:latin typeface="Calibri"/>
-              </a:rPr>
-              <a:t>In partial fulfilment of the requirements for the award of [Add degree title], 2026</a:t>
-            </a:r>
+                <a:latin typeface="Calibri" panose="020F0502020204030204"/>
+              </a:rPr>
+              <a:t>P01/0328/2023</a:t>
+            </a:r>
+            <a:endParaRPr lang="en-US" sz="1300" b="0" i="0">
+              <a:solidFill>
+                <a:srgbClr val="FFFFFF"/>
+              </a:solidFill>
+              <a:latin typeface="Calibri" panose="020F0502020204030204"/>
+            </a:endParaRPr>
           </a:p>
         </p:txBody>
       </p:sp>
@@ -3784,7 +3682,7 @@
 </file>
 
 <file path=ppt/slides/slide10.xml><?xml version="1.0" encoding="utf-8"?>
-<p:sld xmlns:a="http://schemas.openxmlformats.org/drawingml/2006/main" xmlns:p="http://schemas.openxmlformats.org/presentationml/2006/main" xmlns:r="http://schemas.openxmlformats.org/officeDocument/2006/relationships">
+<p:sld xmlns:a="http://schemas.openxmlformats.org/drawingml/2006/main" xmlns:r="http://schemas.openxmlformats.org/officeDocument/2006/relationships" xmlns:p="http://schemas.openxmlformats.org/presentationml/2006/main">
   <p:cSld>
     <p:bg>
       <p:bgPr>
@@ -3873,10 +3771,16 @@
                 <a:solidFill>
                   <a:srgbClr val="E69A1F"/>
                 </a:solidFill>
-                <a:latin typeface="Calibri"/>
+                <a:latin typeface="Calibri" panose="020F0502020204030204"/>
               </a:rPr>
               <a:t>CHAPTER TWO</a:t>
             </a:r>
+            <a:endParaRPr sz="1300" b="1" i="0">
+              <a:solidFill>
+                <a:srgbClr val="E69A1F"/>
+              </a:solidFill>
+              <a:latin typeface="Calibri" panose="020F0502020204030204"/>
+            </a:endParaRPr>
           </a:p>
         </p:txBody>
       </p:sp>
@@ -3908,10 +3812,16 @@
                 <a:solidFill>
                   <a:srgbClr val="121D21"/>
                 </a:solidFill>
-                <a:latin typeface="Calibri"/>
+                <a:latin typeface="Calibri" panose="020F0502020204030204"/>
               </a:rPr>
               <a:t>Technology Stack</a:t>
             </a:r>
+            <a:endParaRPr sz="3000" b="1" i="0">
+              <a:solidFill>
+                <a:srgbClr val="121D21"/>
+              </a:solidFill>
+              <a:latin typeface="Calibri" panose="020F0502020204030204"/>
+            </a:endParaRPr>
           </a:p>
         </p:txBody>
       </p:sp>
@@ -3987,10 +3897,16 @@
                 <a:solidFill>
                   <a:srgbClr val="4B5A5E"/>
                 </a:solidFill>
-                <a:latin typeface="Calibri"/>
+                <a:latin typeface="Calibri" panose="020F0502020204030204"/>
               </a:rPr>
               <a:t>KopaAlert — Stanley Murangiri</a:t>
             </a:r>
+            <a:endParaRPr sz="1000" b="0" i="0">
+              <a:solidFill>
+                <a:srgbClr val="4B5A5E"/>
+              </a:solidFill>
+              <a:latin typeface="Calibri" panose="020F0502020204030204"/>
+            </a:endParaRPr>
           </a:p>
         </p:txBody>
       </p:sp>
@@ -4022,10 +3938,16 @@
                 <a:solidFill>
                   <a:srgbClr val="4B5A5E"/>
                 </a:solidFill>
-                <a:latin typeface="Calibri"/>
+                <a:latin typeface="Calibri" panose="020F0502020204030204"/>
               </a:rPr>
               <a:t>10</a:t>
             </a:r>
+            <a:endParaRPr sz="1000" b="0" i="0">
+              <a:solidFill>
+                <a:srgbClr val="4B5A5E"/>
+              </a:solidFill>
+              <a:latin typeface="Calibri" panose="020F0502020204030204"/>
+            </a:endParaRPr>
           </a:p>
         </p:txBody>
       </p:sp>
@@ -4101,10 +4023,16 @@
                 <a:solidFill>
                   <a:srgbClr val="FFFFFF"/>
                 </a:solidFill>
-                <a:latin typeface="Calibri"/>
+                <a:latin typeface="Calibri" panose="020F0502020204030204"/>
               </a:rPr>
               <a:t>Frontend &amp; Backend</a:t>
             </a:r>
+            <a:endParaRPr sz="1350" b="1" i="0">
+              <a:solidFill>
+                <a:srgbClr val="FFFFFF"/>
+              </a:solidFill>
+              <a:latin typeface="Calibri" panose="020F0502020204030204"/>
+            </a:endParaRPr>
           </a:p>
         </p:txBody>
       </p:sp>
@@ -4180,10 +4108,16 @@
                 <a:solidFill>
                   <a:srgbClr val="121D21"/>
                 </a:solidFill>
-                <a:latin typeface="Calibri"/>
+                <a:latin typeface="Calibri" panose="020F0502020204030204"/>
               </a:rPr>
               <a:t>Next.js 15 (App Router) with React 19 and TypeScript, styled with Tailwind CSS</a:t>
             </a:r>
+            <a:endParaRPr sz="1250" b="0" i="0">
+              <a:solidFill>
+                <a:srgbClr val="121D21"/>
+              </a:solidFill>
+              <a:latin typeface="Calibri" panose="020F0502020204030204"/>
+            </a:endParaRPr>
           </a:p>
         </p:txBody>
       </p:sp>
@@ -4259,10 +4193,16 @@
                 <a:solidFill>
                   <a:srgbClr val="FFFFFF"/>
                 </a:solidFill>
-                <a:latin typeface="Calibri"/>
+                <a:latin typeface="Calibri" panose="020F0502020204030204"/>
               </a:rPr>
               <a:t>Database &amp; Auth</a:t>
             </a:r>
+            <a:endParaRPr sz="1350" b="1" i="0">
+              <a:solidFill>
+                <a:srgbClr val="FFFFFF"/>
+              </a:solidFill>
+              <a:latin typeface="Calibri" panose="020F0502020204030204"/>
+            </a:endParaRPr>
           </a:p>
         </p:txBody>
       </p:sp>
@@ -4338,10 +4278,16 @@
                 <a:solidFill>
                   <a:srgbClr val="121D21"/>
                 </a:solidFill>
-                <a:latin typeface="Calibri"/>
+                <a:latin typeface="Calibri" panose="020F0502020204030204"/>
               </a:rPr>
               <a:t>Supabase — managed PostgreSQL with Row Level Security (RLS) and built-in authentication</a:t>
             </a:r>
+            <a:endParaRPr sz="1250" b="0" i="0">
+              <a:solidFill>
+                <a:srgbClr val="121D21"/>
+              </a:solidFill>
+              <a:latin typeface="Calibri" panose="020F0502020204030204"/>
+            </a:endParaRPr>
           </a:p>
         </p:txBody>
       </p:sp>
@@ -4417,10 +4363,16 @@
                 <a:solidFill>
                   <a:srgbClr val="FFFFFF"/>
                 </a:solidFill>
-                <a:latin typeface="Calibri"/>
+                <a:latin typeface="Calibri" panose="020F0502020204030204"/>
               </a:rPr>
               <a:t>SMS Delivery</a:t>
             </a:r>
+            <a:endParaRPr sz="1350" b="1" i="0">
+              <a:solidFill>
+                <a:srgbClr val="FFFFFF"/>
+              </a:solidFill>
+              <a:latin typeface="Calibri" panose="020F0502020204030204"/>
+            </a:endParaRPr>
           </a:p>
         </p:txBody>
       </p:sp>
@@ -4496,10 +4448,16 @@
                 <a:solidFill>
                   <a:srgbClr val="121D21"/>
                 </a:solidFill>
-                <a:latin typeface="Calibri"/>
+                <a:latin typeface="Calibri" panose="020F0502020204030204"/>
               </a:rPr>
               <a:t>Africa's Talking API — sends debt reminder SMS to customers in Kenya</a:t>
             </a:r>
+            <a:endParaRPr sz="1250" b="0" i="0">
+              <a:solidFill>
+                <a:srgbClr val="121D21"/>
+              </a:solidFill>
+              <a:latin typeface="Calibri" panose="020F0502020204030204"/>
+            </a:endParaRPr>
           </a:p>
         </p:txBody>
       </p:sp>
@@ -4575,10 +4533,16 @@
                 <a:solidFill>
                   <a:srgbClr val="FFFFFF"/>
                 </a:solidFill>
-                <a:latin typeface="Calibri"/>
+                <a:latin typeface="Calibri" panose="020F0502020204030204"/>
               </a:rPr>
               <a:t>Email Delivery</a:t>
             </a:r>
+            <a:endParaRPr sz="1350" b="1" i="0">
+              <a:solidFill>
+                <a:srgbClr val="FFFFFF"/>
+              </a:solidFill>
+              <a:latin typeface="Calibri" panose="020F0502020204030204"/>
+            </a:endParaRPr>
           </a:p>
         </p:txBody>
       </p:sp>
@@ -4654,10 +4618,16 @@
                 <a:solidFill>
                   <a:srgbClr val="121D21"/>
                 </a:solidFill>
-                <a:latin typeface="Calibri"/>
+                <a:latin typeface="Calibri" panose="020F0502020204030204"/>
               </a:rPr>
               <a:t>Resend — sends email reminders and account/approval notifications</a:t>
             </a:r>
+            <a:endParaRPr sz="1250" b="0" i="0">
+              <a:solidFill>
+                <a:srgbClr val="121D21"/>
+              </a:solidFill>
+              <a:latin typeface="Calibri" panose="020F0502020204030204"/>
+            </a:endParaRPr>
           </a:p>
         </p:txBody>
       </p:sp>
@@ -4733,10 +4703,16 @@
                 <a:solidFill>
                   <a:srgbClr val="FFFFFF"/>
                 </a:solidFill>
-                <a:latin typeface="Calibri"/>
+                <a:latin typeface="Calibri" panose="020F0502020204030204"/>
               </a:rPr>
               <a:t>Scheduled Jobs</a:t>
             </a:r>
+            <a:endParaRPr sz="1350" b="1" i="0">
+              <a:solidFill>
+                <a:srgbClr val="FFFFFF"/>
+              </a:solidFill>
+              <a:latin typeface="Calibri" panose="020F0502020204030204"/>
+            </a:endParaRPr>
           </a:p>
         </p:txBody>
       </p:sp>
@@ -4812,10 +4788,16 @@
                 <a:solidFill>
                   <a:srgbClr val="121D21"/>
                 </a:solidFill>
-                <a:latin typeface="Calibri"/>
+                <a:latin typeface="Calibri" panose="020F0502020204030204"/>
               </a:rPr>
               <a:t>Cron-triggered API routes handle reminders, ratings, auto-blacklisting, and subscription billing on a schedule</a:t>
             </a:r>
+            <a:endParaRPr sz="1250" b="0" i="0">
+              <a:solidFill>
+                <a:srgbClr val="121D21"/>
+              </a:solidFill>
+              <a:latin typeface="Calibri" panose="020F0502020204030204"/>
+            </a:endParaRPr>
           </a:p>
         </p:txBody>
       </p:sp>
@@ -4891,10 +4873,16 @@
                 <a:solidFill>
                   <a:srgbClr val="FFFFFF"/>
                 </a:solidFill>
-                <a:latin typeface="Calibri"/>
+                <a:latin typeface="Calibri" panose="020F0502020204030204"/>
               </a:rPr>
               <a:t>Testing</a:t>
             </a:r>
+            <a:endParaRPr sz="1350" b="1" i="0">
+              <a:solidFill>
+                <a:srgbClr val="FFFFFF"/>
+              </a:solidFill>
+              <a:latin typeface="Calibri" panose="020F0502020204030204"/>
+            </a:endParaRPr>
           </a:p>
         </p:txBody>
       </p:sp>
@@ -4970,10 +4958,16 @@
                 <a:solidFill>
                   <a:srgbClr val="121D21"/>
                 </a:solidFill>
-                <a:latin typeface="Calibri"/>
+                <a:latin typeface="Calibri" panose="020F0502020204030204"/>
               </a:rPr>
               <a:t>Jest for unit tests, Playwright for end-to-end browser tests</a:t>
             </a:r>
+            <a:endParaRPr sz="1250" b="0" i="0">
+              <a:solidFill>
+                <a:srgbClr val="121D21"/>
+              </a:solidFill>
+              <a:latin typeface="Calibri" panose="020F0502020204030204"/>
+            </a:endParaRPr>
           </a:p>
         </p:txBody>
       </p:sp>
@@ -5049,10 +5043,16 @@
                 <a:solidFill>
                   <a:srgbClr val="FFFFFF"/>
                 </a:solidFill>
-                <a:latin typeface="Calibri"/>
+                <a:latin typeface="Calibri" panose="020F0502020204030204"/>
               </a:rPr>
               <a:t>Hosting</a:t>
             </a:r>
+            <a:endParaRPr sz="1350" b="1" i="0">
+              <a:solidFill>
+                <a:srgbClr val="FFFFFF"/>
+              </a:solidFill>
+              <a:latin typeface="Calibri" panose="020F0502020204030204"/>
+            </a:endParaRPr>
           </a:p>
         </p:txBody>
       </p:sp>
@@ -5128,10 +5128,16 @@
                 <a:solidFill>
                   <a:srgbClr val="121D21"/>
                 </a:solidFill>
-                <a:latin typeface="Calibri"/>
+                <a:latin typeface="Calibri" panose="020F0502020204030204"/>
               </a:rPr>
               <a:t>Deployed as a serverless Next.js application (Vercel-style hosting)</a:t>
             </a:r>
+            <a:endParaRPr sz="1250" b="0" i="0">
+              <a:solidFill>
+                <a:srgbClr val="121D21"/>
+              </a:solidFill>
+              <a:latin typeface="Calibri" panose="020F0502020204030204"/>
+            </a:endParaRPr>
           </a:p>
         </p:txBody>
       </p:sp>
@@ -5144,7 +5150,7 @@
 </file>
 
 <file path=ppt/slides/slide11.xml><?xml version="1.0" encoding="utf-8"?>
-<p:sld xmlns:a="http://schemas.openxmlformats.org/drawingml/2006/main" xmlns:p="http://schemas.openxmlformats.org/presentationml/2006/main" xmlns:r="http://schemas.openxmlformats.org/officeDocument/2006/relationships">
+<p:sld xmlns:a="http://schemas.openxmlformats.org/drawingml/2006/main" xmlns:r="http://schemas.openxmlformats.org/officeDocument/2006/relationships" xmlns:p="http://schemas.openxmlformats.org/presentationml/2006/main">
   <p:cSld>
     <p:bg>
       <p:bgPr>
@@ -5233,10 +5239,16 @@
                 <a:solidFill>
                   <a:srgbClr val="E69A1F"/>
                 </a:solidFill>
-                <a:latin typeface="Calibri"/>
+                <a:latin typeface="Calibri" panose="020F0502020204030204"/>
               </a:rPr>
               <a:t>CHAPTER TWO</a:t>
             </a:r>
+            <a:endParaRPr sz="1300" b="1" i="0">
+              <a:solidFill>
+                <a:srgbClr val="E69A1F"/>
+              </a:solidFill>
+              <a:latin typeface="Calibri" panose="020F0502020204030204"/>
+            </a:endParaRPr>
           </a:p>
         </p:txBody>
       </p:sp>
@@ -5268,10 +5280,16 @@
                 <a:solidFill>
                   <a:srgbClr val="121D21"/>
                 </a:solidFill>
-                <a:latin typeface="Calibri"/>
+                <a:latin typeface="Calibri" panose="020F0502020204030204"/>
               </a:rPr>
               <a:t>System Architecture — Developer View</a:t>
             </a:r>
+            <a:endParaRPr sz="3000" b="1" i="0">
+              <a:solidFill>
+                <a:srgbClr val="121D21"/>
+              </a:solidFill>
+              <a:latin typeface="Calibri" panose="020F0502020204030204"/>
+            </a:endParaRPr>
           </a:p>
         </p:txBody>
       </p:sp>
@@ -5347,10 +5365,16 @@
                 <a:solidFill>
                   <a:srgbClr val="4B5A5E"/>
                 </a:solidFill>
-                <a:latin typeface="Calibri"/>
+                <a:latin typeface="Calibri" panose="020F0502020204030204"/>
               </a:rPr>
               <a:t>KopaAlert — Stanley Murangiri</a:t>
             </a:r>
+            <a:endParaRPr sz="1000" b="0" i="0">
+              <a:solidFill>
+                <a:srgbClr val="4B5A5E"/>
+              </a:solidFill>
+              <a:latin typeface="Calibri" panose="020F0502020204030204"/>
+            </a:endParaRPr>
           </a:p>
         </p:txBody>
       </p:sp>
@@ -5382,10 +5406,16 @@
                 <a:solidFill>
                   <a:srgbClr val="4B5A5E"/>
                 </a:solidFill>
-                <a:latin typeface="Calibri"/>
+                <a:latin typeface="Calibri" panose="020F0502020204030204"/>
               </a:rPr>
               <a:t>11</a:t>
             </a:r>
+            <a:endParaRPr sz="1000" b="0" i="0">
+              <a:solidFill>
+                <a:srgbClr val="4B5A5E"/>
+              </a:solidFill>
+              <a:latin typeface="Calibri" panose="020F0502020204030204"/>
+            </a:endParaRPr>
           </a:p>
         </p:txBody>
       </p:sp>
@@ -5461,10 +5491,16 @@
                 <a:solidFill>
                   <a:srgbClr val="FFFFFF"/>
                 </a:solidFill>
-                <a:latin typeface="Calibri"/>
+                <a:latin typeface="Calibri" panose="020F0502020204030204"/>
               </a:rPr>
               <a:t>Client</a:t>
             </a:r>
+            <a:endParaRPr sz="1500" b="1" i="0">
+              <a:solidFill>
+                <a:srgbClr val="FFFFFF"/>
+              </a:solidFill>
+              <a:latin typeface="Calibri" panose="020F0502020204030204"/>
+            </a:endParaRPr>
           </a:p>
         </p:txBody>
       </p:sp>
@@ -5496,10 +5532,16 @@
                 <a:solidFill>
                   <a:srgbClr val="E7F2F1"/>
                 </a:solidFill>
-                <a:latin typeface="Calibri"/>
+                <a:latin typeface="Calibri" panose="020F0502020204030204"/>
               </a:rPr>
               <a:t>Browser / Mobile Browser</a:t>
             </a:r>
+            <a:endParaRPr sz="1250" b="0" i="0">
+              <a:solidFill>
+                <a:srgbClr val="E7F2F1"/>
+              </a:solidFill>
+              <a:latin typeface="Calibri" panose="020F0502020204030204"/>
+            </a:endParaRPr>
           </a:p>
         </p:txBody>
       </p:sp>
@@ -5618,10 +5660,16 @@
                 <a:solidFill>
                   <a:srgbClr val="FFFFFF"/>
                 </a:solidFill>
-                <a:latin typeface="Calibri"/>
+                <a:latin typeface="Calibri" panose="020F0502020204030204"/>
               </a:rPr>
               <a:t>Application Layer</a:t>
             </a:r>
+            <a:endParaRPr sz="1500" b="1" i="0">
+              <a:solidFill>
+                <a:srgbClr val="FFFFFF"/>
+              </a:solidFill>
+              <a:latin typeface="Calibri" panose="020F0502020204030204"/>
+            </a:endParaRPr>
           </a:p>
         </p:txBody>
       </p:sp>
@@ -5653,10 +5701,16 @@
                 <a:solidFill>
                   <a:srgbClr val="E7F2F1"/>
                 </a:solidFill>
-                <a:latin typeface="Calibri"/>
+                <a:latin typeface="Calibri" panose="020F0502020204030204"/>
               </a:rPr>
               <a:t>Next.js App Router — pages, API routes, middleware (auth &amp; route guarding)</a:t>
             </a:r>
+            <a:endParaRPr sz="1250" b="0" i="0">
+              <a:solidFill>
+                <a:srgbClr val="E7F2F1"/>
+              </a:solidFill>
+              <a:latin typeface="Calibri" panose="020F0502020204030204"/>
+            </a:endParaRPr>
           </a:p>
         </p:txBody>
       </p:sp>
@@ -5775,10 +5829,16 @@
                 <a:solidFill>
                   <a:srgbClr val="FFFFFF"/>
                 </a:solidFill>
-                <a:latin typeface="Calibri"/>
+                <a:latin typeface="Calibri" panose="020F0502020204030204"/>
               </a:rPr>
               <a:t>Data &amp; Auth Layer</a:t>
             </a:r>
+            <a:endParaRPr sz="1500" b="1" i="0">
+              <a:solidFill>
+                <a:srgbClr val="FFFFFF"/>
+              </a:solidFill>
+              <a:latin typeface="Calibri" panose="020F0502020204030204"/>
+            </a:endParaRPr>
           </a:p>
         </p:txBody>
       </p:sp>
@@ -5810,10 +5870,16 @@
                 <a:solidFill>
                   <a:srgbClr val="E7F2F1"/>
                 </a:solidFill>
-                <a:latin typeface="Calibri"/>
+                <a:latin typeface="Calibri" panose="020F0502020204030204"/>
               </a:rPr>
               <a:t>Supabase — PostgreSQL, Row Level Security policies, Auth, RPC functions</a:t>
             </a:r>
+            <a:endParaRPr sz="1250" b="0" i="0">
+              <a:solidFill>
+                <a:srgbClr val="E7F2F1"/>
+              </a:solidFill>
+              <a:latin typeface="Calibri" panose="020F0502020204030204"/>
+            </a:endParaRPr>
           </a:p>
         </p:txBody>
       </p:sp>
@@ -5932,10 +5998,16 @@
                 <a:solidFill>
                   <a:srgbClr val="FFFFFF"/>
                 </a:solidFill>
-                <a:latin typeface="Calibri"/>
+                <a:latin typeface="Calibri" panose="020F0502020204030204"/>
               </a:rPr>
               <a:t>External Services</a:t>
             </a:r>
+            <a:endParaRPr sz="1500" b="1" i="0">
+              <a:solidFill>
+                <a:srgbClr val="FFFFFF"/>
+              </a:solidFill>
+              <a:latin typeface="Calibri" panose="020F0502020204030204"/>
+            </a:endParaRPr>
           </a:p>
         </p:txBody>
       </p:sp>
@@ -5967,10 +6039,16 @@
                 <a:solidFill>
                   <a:srgbClr val="E7F2F1"/>
                 </a:solidFill>
-                <a:latin typeface="Calibri"/>
+                <a:latin typeface="Calibri" panose="020F0502020204030204"/>
               </a:rPr>
               <a:t>Africa's Talking (SMS)   •   Resend (Email)   •   Cron-triggered jobs</a:t>
             </a:r>
+            <a:endParaRPr sz="1250" b="0" i="0">
+              <a:solidFill>
+                <a:srgbClr val="E7F2F1"/>
+              </a:solidFill>
+              <a:latin typeface="Calibri" panose="020F0502020204030204"/>
+            </a:endParaRPr>
           </a:p>
         </p:txBody>
       </p:sp>
@@ -6002,10 +6080,16 @@
                 <a:solidFill>
                   <a:srgbClr val="4B5A5E"/>
                 </a:solidFill>
-                <a:latin typeface="Calibri"/>
+                <a:latin typeface="Calibri" panose="020F0502020204030204"/>
               </a:rPr>
               <a:t>Every request from the business dashboard flows through Next.js middleware, which checks the authenticated user's session and business_id before Supabase's own Row Level Security enforces it again at the database layer — two independent checks, not one.</a:t>
             </a:r>
+            <a:endParaRPr sz="1250" b="0" i="1">
+              <a:solidFill>
+                <a:srgbClr val="4B5A5E"/>
+              </a:solidFill>
+              <a:latin typeface="Calibri" panose="020F0502020204030204"/>
+            </a:endParaRPr>
           </a:p>
         </p:txBody>
       </p:sp>
@@ -6018,7 +6102,7 @@
 </file>
 
 <file path=ppt/slides/slide12.xml><?xml version="1.0" encoding="utf-8"?>
-<p:sld xmlns:a="http://schemas.openxmlformats.org/drawingml/2006/main" xmlns:p="http://schemas.openxmlformats.org/presentationml/2006/main" xmlns:r="http://schemas.openxmlformats.org/officeDocument/2006/relationships">
+<p:sld xmlns:a="http://schemas.openxmlformats.org/drawingml/2006/main" xmlns:r="http://schemas.openxmlformats.org/officeDocument/2006/relationships" xmlns:p="http://schemas.openxmlformats.org/presentationml/2006/main">
   <p:cSld>
     <p:bg>
       <p:bgPr>
@@ -6107,10 +6191,16 @@
                 <a:solidFill>
                   <a:srgbClr val="E69A1F"/>
                 </a:solidFill>
-                <a:latin typeface="Calibri"/>
+                <a:latin typeface="Calibri" panose="020F0502020204030204"/>
               </a:rPr>
               <a:t>CHAPTER TWO</a:t>
             </a:r>
+            <a:endParaRPr sz="1300" b="1" i="0">
+              <a:solidFill>
+                <a:srgbClr val="E69A1F"/>
+              </a:solidFill>
+              <a:latin typeface="Calibri" panose="020F0502020204030204"/>
+            </a:endParaRPr>
           </a:p>
         </p:txBody>
       </p:sp>
@@ -6142,10 +6232,16 @@
                 <a:solidFill>
                   <a:srgbClr val="121D21"/>
                 </a:solidFill>
-                <a:latin typeface="Calibri"/>
+                <a:latin typeface="Calibri" panose="020F0502020204030204"/>
               </a:rPr>
               <a:t>System Architecture — User View</a:t>
             </a:r>
+            <a:endParaRPr sz="3000" b="1" i="0">
+              <a:solidFill>
+                <a:srgbClr val="121D21"/>
+              </a:solidFill>
+              <a:latin typeface="Calibri" panose="020F0502020204030204"/>
+            </a:endParaRPr>
           </a:p>
         </p:txBody>
       </p:sp>
@@ -6221,10 +6317,16 @@
                 <a:solidFill>
                   <a:srgbClr val="4B5A5E"/>
                 </a:solidFill>
-                <a:latin typeface="Calibri"/>
+                <a:latin typeface="Calibri" panose="020F0502020204030204"/>
               </a:rPr>
               <a:t>KopaAlert — Stanley Murangiri</a:t>
             </a:r>
+            <a:endParaRPr sz="1000" b="0" i="0">
+              <a:solidFill>
+                <a:srgbClr val="4B5A5E"/>
+              </a:solidFill>
+              <a:latin typeface="Calibri" panose="020F0502020204030204"/>
+            </a:endParaRPr>
           </a:p>
         </p:txBody>
       </p:sp>
@@ -6256,10 +6358,16 @@
                 <a:solidFill>
                   <a:srgbClr val="4B5A5E"/>
                 </a:solidFill>
-                <a:latin typeface="Calibri"/>
+                <a:latin typeface="Calibri" panose="020F0502020204030204"/>
               </a:rPr>
               <a:t>12</a:t>
             </a:r>
+            <a:endParaRPr sz="1000" b="0" i="0">
+              <a:solidFill>
+                <a:srgbClr val="4B5A5E"/>
+              </a:solidFill>
+              <a:latin typeface="Calibri" panose="020F0502020204030204"/>
+            </a:endParaRPr>
           </a:p>
         </p:txBody>
       </p:sp>
@@ -6300,7 +6408,7 @@
           </a:fontRef>
         </p:style>
         <p:txBody>
-          <a:bodyPr rtlCol="0" anchor="ctr" wrap="square"/>
+          <a:bodyPr wrap="square" rtlCol="0" anchor="ctr"/>
           <a:lstStyle/>
           <a:p>
             <a:pPr algn="ctr"/>
@@ -6309,11 +6417,17 @@
                 <a:solidFill>
                   <a:srgbClr val="FFFFFF"/>
                 </a:solidFill>
-                <a:latin typeface="Calibri"/>
+                <a:latin typeface="Calibri" panose="020F0502020204030204"/>
               </a:rPr>
               <a:t>Business
 Registers</a:t>
             </a:r>
+            <a:endParaRPr sz="1250" b="1">
+              <a:solidFill>
+                <a:srgbClr val="FFFFFF"/>
+              </a:solidFill>
+              <a:latin typeface="Calibri" panose="020F0502020204030204"/>
+            </a:endParaRPr>
           </a:p>
         </p:txBody>
       </p:sp>
@@ -6397,7 +6511,7 @@
           </a:fontRef>
         </p:style>
         <p:txBody>
-          <a:bodyPr rtlCol="0" anchor="ctr" wrap="square"/>
+          <a:bodyPr wrap="square" rtlCol="0" anchor="ctr"/>
           <a:lstStyle/>
           <a:p>
             <a:pPr algn="ctr"/>
@@ -6406,11 +6520,17 @@
                 <a:solidFill>
                   <a:srgbClr val="FFFFFF"/>
                 </a:solidFill>
-                <a:latin typeface="Calibri"/>
+                <a:latin typeface="Calibri" panose="020F0502020204030204"/>
               </a:rPr>
               <a:t>Admin
 Approves</a:t>
             </a:r>
+            <a:endParaRPr sz="1250" b="1">
+              <a:solidFill>
+                <a:srgbClr val="FFFFFF"/>
+              </a:solidFill>
+              <a:latin typeface="Calibri" panose="020F0502020204030204"/>
+            </a:endParaRPr>
           </a:p>
         </p:txBody>
       </p:sp>
@@ -6494,7 +6614,7 @@
           </a:fontRef>
         </p:style>
         <p:txBody>
-          <a:bodyPr rtlCol="0" anchor="ctr" wrap="square"/>
+          <a:bodyPr wrap="square" rtlCol="0" anchor="ctr"/>
           <a:lstStyle/>
           <a:p>
             <a:pPr algn="ctr"/>
@@ -6503,11 +6623,17 @@
                 <a:solidFill>
                   <a:srgbClr val="FFFFFF"/>
                 </a:solidFill>
-                <a:latin typeface="Calibri"/>
+                <a:latin typeface="Calibri" panose="020F0502020204030204"/>
               </a:rPr>
               <a:t>Owner Adds
 Customers</a:t>
             </a:r>
+            <a:endParaRPr sz="1250" b="1">
+              <a:solidFill>
+                <a:srgbClr val="FFFFFF"/>
+              </a:solidFill>
+              <a:latin typeface="Calibri" panose="020F0502020204030204"/>
+            </a:endParaRPr>
           </a:p>
         </p:txBody>
       </p:sp>
@@ -6591,7 +6717,7 @@
           </a:fontRef>
         </p:style>
         <p:txBody>
-          <a:bodyPr rtlCol="0" anchor="ctr" wrap="square"/>
+          <a:bodyPr wrap="square" rtlCol="0" anchor="ctr"/>
           <a:lstStyle/>
           <a:p>
             <a:pPr algn="ctr"/>
@@ -6600,11 +6726,17 @@
                 <a:solidFill>
                   <a:srgbClr val="FFFFFF"/>
                 </a:solidFill>
-                <a:latin typeface="Calibri"/>
+                <a:latin typeface="Calibri" panose="020F0502020204030204"/>
               </a:rPr>
               <a:t>Owner Records
 Debt + Due Date</a:t>
             </a:r>
+            <a:endParaRPr sz="1250" b="1">
+              <a:solidFill>
+                <a:srgbClr val="FFFFFF"/>
+              </a:solidFill>
+              <a:latin typeface="Calibri" panose="020F0502020204030204"/>
+            </a:endParaRPr>
           </a:p>
         </p:txBody>
       </p:sp>
@@ -6645,7 +6777,7 @@
           </a:fontRef>
         </p:style>
         <p:txBody>
-          <a:bodyPr rtlCol="0" anchor="ctr" wrap="square"/>
+          <a:bodyPr wrap="square" rtlCol="0" anchor="ctr"/>
           <a:lstStyle/>
           <a:p>
             <a:pPr algn="ctr"/>
@@ -6654,12 +6786,18 @@
                 <a:solidFill>
                   <a:srgbClr val="FFFFFF"/>
                 </a:solidFill>
-                <a:latin typeface="Calibri"/>
+                <a:latin typeface="Calibri" panose="020F0502020204030204"/>
               </a:rPr>
               <a:t>System Sends
 SMS / Email
 Reminders</a:t>
             </a:r>
+            <a:endParaRPr sz="1250" b="1">
+              <a:solidFill>
+                <a:srgbClr val="FFFFFF"/>
+              </a:solidFill>
+              <a:latin typeface="Calibri" panose="020F0502020204030204"/>
+            </a:endParaRPr>
           </a:p>
         </p:txBody>
       </p:sp>
@@ -6700,7 +6838,7 @@
           </a:fontRef>
         </p:style>
         <p:txBody>
-          <a:bodyPr rtlCol="0" anchor="ctr" wrap="square"/>
+          <a:bodyPr wrap="square" rtlCol="0" anchor="ctr"/>
           <a:lstStyle/>
           <a:p>
             <a:pPr algn="ctr"/>
@@ -6709,11 +6847,17 @@
                 <a:solidFill>
                   <a:srgbClr val="FFFFFF"/>
                 </a:solidFill>
-                <a:latin typeface="Calibri"/>
+                <a:latin typeface="Calibri" panose="020F0502020204030204"/>
               </a:rPr>
               <a:t>Customer Pays;
 Owner Logs It</a:t>
             </a:r>
+            <a:endParaRPr sz="1250" b="1">
+              <a:solidFill>
+                <a:srgbClr val="FFFFFF"/>
+              </a:solidFill>
+              <a:latin typeface="Calibri" panose="020F0502020204030204"/>
+            </a:endParaRPr>
           </a:p>
         </p:txBody>
       </p:sp>
@@ -6754,7 +6898,7 @@
           </a:fontRef>
         </p:style>
         <p:txBody>
-          <a:bodyPr rtlCol="0" anchor="ctr" wrap="square"/>
+          <a:bodyPr wrap="square" rtlCol="0" anchor="ctr"/>
           <a:lstStyle/>
           <a:p>
             <a:pPr algn="ctr"/>
@@ -6763,11 +6907,17 @@
                 <a:solidFill>
                   <a:srgbClr val="FFFFFF"/>
                 </a:solidFill>
-                <a:latin typeface="Calibri"/>
+                <a:latin typeface="Calibri" panose="020F0502020204030204"/>
               </a:rPr>
               <a:t>Dashboard
 Updates Live</a:t>
             </a:r>
+            <a:endParaRPr sz="1250" b="1">
+              <a:solidFill>
+                <a:srgbClr val="FFFFFF"/>
+              </a:solidFill>
+              <a:latin typeface="Calibri" panose="020F0502020204030204"/>
+            </a:endParaRPr>
           </a:p>
         </p:txBody>
       </p:sp>
@@ -6799,10 +6949,16 @@
                 <a:solidFill>
                   <a:srgbClr val="4B5A5E"/>
                 </a:solidFill>
-                <a:latin typeface="Calibri"/>
+                <a:latin typeface="Calibri" panose="020F0502020204030204"/>
               </a:rPr>
               <a:t>From a business owner's point of view, KopaAlert is deliberately simple: register, add customers, record what is owed, and let the system handle remembering to follow up. No step requires technical knowledge beyond filling in a form.</a:t>
             </a:r>
+            <a:endParaRPr sz="1450" b="0" i="1">
+              <a:solidFill>
+                <a:srgbClr val="4B5A5E"/>
+              </a:solidFill>
+              <a:latin typeface="Calibri" panose="020F0502020204030204"/>
+            </a:endParaRPr>
           </a:p>
         </p:txBody>
       </p:sp>
@@ -6815,7 +6971,7 @@
 </file>
 
 <file path=ppt/slides/slide13.xml><?xml version="1.0" encoding="utf-8"?>
-<p:sld xmlns:a="http://schemas.openxmlformats.org/drawingml/2006/main" xmlns:p="http://schemas.openxmlformats.org/presentationml/2006/main" xmlns:r="http://schemas.openxmlformats.org/officeDocument/2006/relationships">
+<p:sld xmlns:a="http://schemas.openxmlformats.org/drawingml/2006/main" xmlns:r="http://schemas.openxmlformats.org/officeDocument/2006/relationships" xmlns:p="http://schemas.openxmlformats.org/presentationml/2006/main">
   <p:cSld>
     <p:bg>
       <p:bgPr>
@@ -6904,10 +7060,16 @@
                 <a:solidFill>
                   <a:srgbClr val="E69A1F"/>
                 </a:solidFill>
-                <a:latin typeface="Calibri"/>
+                <a:latin typeface="Calibri" panose="020F0502020204030204"/>
               </a:rPr>
               <a:t>CHAPTER TWO</a:t>
             </a:r>
+            <a:endParaRPr sz="1300" b="1" i="0">
+              <a:solidFill>
+                <a:srgbClr val="E69A1F"/>
+              </a:solidFill>
+              <a:latin typeface="Calibri" panose="020F0502020204030204"/>
+            </a:endParaRPr>
           </a:p>
         </p:txBody>
       </p:sp>
@@ -6939,10 +7101,16 @@
                 <a:solidFill>
                   <a:srgbClr val="121D21"/>
                 </a:solidFill>
-                <a:latin typeface="Calibri"/>
+                <a:latin typeface="Calibri" panose="020F0502020204030204"/>
               </a:rPr>
               <a:t>Core Modules and Features</a:t>
             </a:r>
+            <a:endParaRPr sz="3000" b="1" i="0">
+              <a:solidFill>
+                <a:srgbClr val="121D21"/>
+              </a:solidFill>
+              <a:latin typeface="Calibri" panose="020F0502020204030204"/>
+            </a:endParaRPr>
           </a:p>
         </p:txBody>
       </p:sp>
@@ -7018,10 +7186,16 @@
                 <a:solidFill>
                   <a:srgbClr val="4B5A5E"/>
                 </a:solidFill>
-                <a:latin typeface="Calibri"/>
+                <a:latin typeface="Calibri" panose="020F0502020204030204"/>
               </a:rPr>
               <a:t>KopaAlert — Stanley Murangiri</a:t>
             </a:r>
+            <a:endParaRPr sz="1000" b="0" i="0">
+              <a:solidFill>
+                <a:srgbClr val="4B5A5E"/>
+              </a:solidFill>
+              <a:latin typeface="Calibri" panose="020F0502020204030204"/>
+            </a:endParaRPr>
           </a:p>
         </p:txBody>
       </p:sp>
@@ -7053,10 +7227,16 @@
                 <a:solidFill>
                   <a:srgbClr val="4B5A5E"/>
                 </a:solidFill>
-                <a:latin typeface="Calibri"/>
+                <a:latin typeface="Calibri" panose="020F0502020204030204"/>
               </a:rPr>
               <a:t>13</a:t>
             </a:r>
+            <a:endParaRPr sz="1000" b="0" i="0">
+              <a:solidFill>
+                <a:srgbClr val="4B5A5E"/>
+              </a:solidFill>
+              <a:latin typeface="Calibri" panose="020F0502020204030204"/>
+            </a:endParaRPr>
           </a:p>
         </p:txBody>
       </p:sp>
@@ -7176,10 +7356,16 @@
                 <a:solidFill>
                   <a:srgbClr val="0F766E"/>
                 </a:solidFill>
-                <a:latin typeface="Calibri"/>
+                <a:latin typeface="Calibri" panose="020F0502020204030204"/>
               </a:rPr>
               <a:t>Customer Management</a:t>
             </a:r>
+            <a:endParaRPr sz="1700" b="1" i="0">
+              <a:solidFill>
+                <a:srgbClr val="0F766E"/>
+              </a:solidFill>
+              <a:latin typeface="Calibri" panose="020F0502020204030204"/>
+            </a:endParaRPr>
           </a:p>
         </p:txBody>
       </p:sp>
@@ -7218,10 +7404,16 @@
                 <a:solidFill>
                   <a:srgbClr val="121D21"/>
                 </a:solidFill>
-                <a:latin typeface="Calibri"/>
+                <a:latin typeface="Calibri" panose="020F0502020204030204"/>
               </a:rPr>
               <a:t>•  Register, view, edit, and blacklist customers</a:t>
             </a:r>
+            <a:endParaRPr sz="1150">
+              <a:solidFill>
+                <a:srgbClr val="121D21"/>
+              </a:solidFill>
+              <a:latin typeface="Calibri" panose="020F0502020204030204"/>
+            </a:endParaRPr>
           </a:p>
           <a:p>
             <a:pPr>
@@ -7237,10 +7429,16 @@
                 <a:solidFill>
                   <a:srgbClr val="121D21"/>
                 </a:solidFill>
-                <a:latin typeface="Calibri"/>
+                <a:latin typeface="Calibri" panose="020F0502020204030204"/>
               </a:rPr>
               <a:t>•  Search and filter the customer list</a:t>
             </a:r>
+            <a:endParaRPr sz="1150">
+              <a:solidFill>
+                <a:srgbClr val="121D21"/>
+              </a:solidFill>
+              <a:latin typeface="Calibri" panose="020F0502020204030204"/>
+            </a:endParaRPr>
           </a:p>
         </p:txBody>
       </p:sp>
@@ -7360,10 +7558,16 @@
                 <a:solidFill>
                   <a:srgbClr val="0F766E"/>
                 </a:solidFill>
-                <a:latin typeface="Calibri"/>
+                <a:latin typeface="Calibri" panose="020F0502020204030204"/>
               </a:rPr>
               <a:t>Debt Management</a:t>
             </a:r>
+            <a:endParaRPr sz="1700" b="1" i="0">
+              <a:solidFill>
+                <a:srgbClr val="0F766E"/>
+              </a:solidFill>
+              <a:latin typeface="Calibri" panose="020F0502020204030204"/>
+            </a:endParaRPr>
           </a:p>
         </p:txBody>
       </p:sp>
@@ -7402,10 +7606,16 @@
                 <a:solidFill>
                   <a:srgbClr val="121D21"/>
                 </a:solidFill>
-                <a:latin typeface="Calibri"/>
+                <a:latin typeface="Calibri" panose="020F0502020204030204"/>
               </a:rPr>
               <a:t>•  Record debts with amount, description, and due date</a:t>
             </a:r>
+            <a:endParaRPr sz="1150">
+              <a:solidFill>
+                <a:srgbClr val="121D21"/>
+              </a:solidFill>
+              <a:latin typeface="Calibri" panose="020F0502020204030204"/>
+            </a:endParaRPr>
           </a:p>
           <a:p>
             <a:pPr>
@@ -7421,10 +7631,16 @@
                 <a:solidFill>
                   <a:srgbClr val="121D21"/>
                 </a:solidFill>
-                <a:latin typeface="Calibri"/>
+                <a:latin typeface="Calibri" panose="020F0502020204030204"/>
               </a:rPr>
               <a:t>•  Apply available customer credit automatically</a:t>
             </a:r>
+            <a:endParaRPr sz="1150">
+              <a:solidFill>
+                <a:srgbClr val="121D21"/>
+              </a:solidFill>
+              <a:latin typeface="Calibri" panose="020F0502020204030204"/>
+            </a:endParaRPr>
           </a:p>
         </p:txBody>
       </p:sp>
@@ -7544,10 +7760,16 @@
                 <a:solidFill>
                   <a:srgbClr val="0F766E"/>
                 </a:solidFill>
-                <a:latin typeface="Calibri"/>
+                <a:latin typeface="Calibri" panose="020F0502020204030204"/>
               </a:rPr>
               <a:t>Payment Recording</a:t>
             </a:r>
+            <a:endParaRPr sz="1700" b="1" i="0">
+              <a:solidFill>
+                <a:srgbClr val="0F766E"/>
+              </a:solidFill>
+              <a:latin typeface="Calibri" panose="020F0502020204030204"/>
+            </a:endParaRPr>
           </a:p>
         </p:txBody>
       </p:sp>
@@ -7586,10 +7808,16 @@
                 <a:solidFill>
                   <a:srgbClr val="121D21"/>
                 </a:solidFill>
-                <a:latin typeface="Calibri"/>
+                <a:latin typeface="Calibri" panose="020F0502020204030204"/>
               </a:rPr>
               <a:t>•  Log full or partial payments against a debt</a:t>
             </a:r>
+            <a:endParaRPr sz="1150">
+              <a:solidFill>
+                <a:srgbClr val="121D21"/>
+              </a:solidFill>
+              <a:latin typeface="Calibri" panose="020F0502020204030204"/>
+            </a:endParaRPr>
           </a:p>
           <a:p>
             <a:pPr>
@@ -7605,10 +7833,16 @@
                 <a:solidFill>
                   <a:srgbClr val="121D21"/>
                 </a:solidFill>
-                <a:latin typeface="Calibri"/>
+                <a:latin typeface="Calibri" panose="020F0502020204030204"/>
               </a:rPr>
               <a:t>•  Automatic debt status updates (open, partial, paid)</a:t>
             </a:r>
+            <a:endParaRPr sz="1150">
+              <a:solidFill>
+                <a:srgbClr val="121D21"/>
+              </a:solidFill>
+              <a:latin typeface="Calibri" panose="020F0502020204030204"/>
+            </a:endParaRPr>
           </a:p>
         </p:txBody>
       </p:sp>
@@ -7728,10 +7962,16 @@
                 <a:solidFill>
                   <a:srgbClr val="0F766E"/>
                 </a:solidFill>
-                <a:latin typeface="Calibri"/>
+                <a:latin typeface="Calibri" panose="020F0502020204030204"/>
               </a:rPr>
               <a:t>Automated Reminders</a:t>
             </a:r>
+            <a:endParaRPr sz="1700" b="1" i="0">
+              <a:solidFill>
+                <a:srgbClr val="0F766E"/>
+              </a:solidFill>
+              <a:latin typeface="Calibri" panose="020F0502020204030204"/>
+            </a:endParaRPr>
           </a:p>
         </p:txBody>
       </p:sp>
@@ -7770,10 +8010,16 @@
                 <a:solidFill>
                   <a:srgbClr val="121D21"/>
                 </a:solidFill>
-                <a:latin typeface="Calibri"/>
+                <a:latin typeface="Calibri" panose="020F0502020204030204"/>
               </a:rPr>
               <a:t>•  Scheduled SMS via Africa's Talking</a:t>
             </a:r>
+            <a:endParaRPr sz="1150">
+              <a:solidFill>
+                <a:srgbClr val="121D21"/>
+              </a:solidFill>
+              <a:latin typeface="Calibri" panose="020F0502020204030204"/>
+            </a:endParaRPr>
           </a:p>
           <a:p>
             <a:pPr>
@@ -7789,10 +8035,16 @@
                 <a:solidFill>
                   <a:srgbClr val="121D21"/>
                 </a:solidFill>
-                <a:latin typeface="Calibri"/>
+                <a:latin typeface="Calibri" panose="020F0502020204030204"/>
               </a:rPr>
               <a:t>•  Scheduled email via Resend</a:t>
             </a:r>
+            <a:endParaRPr sz="1150">
+              <a:solidFill>
+                <a:srgbClr val="121D21"/>
+              </a:solidFill>
+              <a:latin typeface="Calibri" panose="020F0502020204030204"/>
+            </a:endParaRPr>
           </a:p>
           <a:p>
             <a:pPr>
@@ -7808,10 +8060,16 @@
                 <a:solidFill>
                   <a:srgbClr val="121D21"/>
                 </a:solidFill>
-                <a:latin typeface="Calibri"/>
+                <a:latin typeface="Calibri" panose="020F0502020204030204"/>
               </a:rPr>
               <a:t>•  Configurable reminder templates</a:t>
             </a:r>
+            <a:endParaRPr sz="1150">
+              <a:solidFill>
+                <a:srgbClr val="121D21"/>
+              </a:solidFill>
+              <a:latin typeface="Calibri" panose="020F0502020204030204"/>
+            </a:endParaRPr>
           </a:p>
         </p:txBody>
       </p:sp>
@@ -7931,10 +8189,16 @@
                 <a:solidFill>
                   <a:srgbClr val="0F766E"/>
                 </a:solidFill>
-                <a:latin typeface="Calibri"/>
+                <a:latin typeface="Calibri" panose="020F0502020204030204"/>
               </a:rPr>
               <a:t>Ratings &amp; Blacklisting</a:t>
             </a:r>
+            <a:endParaRPr sz="1700" b="1" i="0">
+              <a:solidFill>
+                <a:srgbClr val="0F766E"/>
+              </a:solidFill>
+              <a:latin typeface="Calibri" panose="020F0502020204030204"/>
+            </a:endParaRPr>
           </a:p>
         </p:txBody>
       </p:sp>
@@ -7973,10 +8237,16 @@
                 <a:solidFill>
                   <a:srgbClr val="121D21"/>
                 </a:solidFill>
-                <a:latin typeface="Calibri"/>
+                <a:latin typeface="Calibri" panose="020F0502020204030204"/>
               </a:rPr>
               <a:t>•  Customers scored on payment behaviour</a:t>
             </a:r>
+            <a:endParaRPr sz="1150">
+              <a:solidFill>
+                <a:srgbClr val="121D21"/>
+              </a:solidFill>
+              <a:latin typeface="Calibri" panose="020F0502020204030204"/>
+            </a:endParaRPr>
           </a:p>
           <a:p>
             <a:pPr>
@@ -7992,10 +8262,16 @@
                 <a:solidFill>
                   <a:srgbClr val="121D21"/>
                 </a:solidFill>
-                <a:latin typeface="Calibri"/>
+                <a:latin typeface="Calibri" panose="020F0502020204030204"/>
               </a:rPr>
               <a:t>•  Chronic defaulters auto-blacklisted</a:t>
             </a:r>
+            <a:endParaRPr sz="1150">
+              <a:solidFill>
+                <a:srgbClr val="121D21"/>
+              </a:solidFill>
+              <a:latin typeface="Calibri" panose="020F0502020204030204"/>
+            </a:endParaRPr>
           </a:p>
         </p:txBody>
       </p:sp>
@@ -8115,10 +8391,16 @@
                 <a:solidFill>
                   <a:srgbClr val="0F766E"/>
                 </a:solidFill>
-                <a:latin typeface="Calibri"/>
+                <a:latin typeface="Calibri" panose="020F0502020204030204"/>
               </a:rPr>
               <a:t>Team Management</a:t>
             </a:r>
+            <a:endParaRPr sz="1700" b="1" i="0">
+              <a:solidFill>
+                <a:srgbClr val="0F766E"/>
+              </a:solidFill>
+              <a:latin typeface="Calibri" panose="020F0502020204030204"/>
+            </a:endParaRPr>
           </a:p>
         </p:txBody>
       </p:sp>
@@ -8157,10 +8439,16 @@
                 <a:solidFill>
                   <a:srgbClr val="121D21"/>
                 </a:solidFill>
-                <a:latin typeface="Calibri"/>
+                <a:latin typeface="Calibri" panose="020F0502020204030204"/>
               </a:rPr>
               <a:t>•  Invite staff with defined roles</a:t>
             </a:r>
+            <a:endParaRPr sz="1150">
+              <a:solidFill>
+                <a:srgbClr val="121D21"/>
+              </a:solidFill>
+              <a:latin typeface="Calibri" panose="020F0502020204030204"/>
+            </a:endParaRPr>
           </a:p>
           <a:p>
             <a:pPr>
@@ -8176,10 +8464,16 @@
                 <a:solidFill>
                   <a:srgbClr val="121D21"/>
                 </a:solidFill>
-                <a:latin typeface="Calibri"/>
+                <a:latin typeface="Calibri" panose="020F0502020204030204"/>
               </a:rPr>
               <a:t>•  Role-based access within a business</a:t>
             </a:r>
+            <a:endParaRPr sz="1150">
+              <a:solidFill>
+                <a:srgbClr val="121D21"/>
+              </a:solidFill>
+              <a:latin typeface="Calibri" panose="020F0502020204030204"/>
+            </a:endParaRPr>
           </a:p>
         </p:txBody>
       </p:sp>
@@ -8299,10 +8593,16 @@
                 <a:solidFill>
                   <a:srgbClr val="0F766E"/>
                 </a:solidFill>
-                <a:latin typeface="Calibri"/>
+                <a:latin typeface="Calibri" panose="020F0502020204030204"/>
               </a:rPr>
               <a:t>Subscription &amp; Billing</a:t>
             </a:r>
+            <a:endParaRPr sz="1700" b="1" i="0">
+              <a:solidFill>
+                <a:srgbClr val="0F766E"/>
+              </a:solidFill>
+              <a:latin typeface="Calibri" panose="020F0502020204030204"/>
+            </a:endParaRPr>
           </a:p>
         </p:txBody>
       </p:sp>
@@ -8341,10 +8641,16 @@
                 <a:solidFill>
                   <a:srgbClr val="121D21"/>
                 </a:solidFill>
-                <a:latin typeface="Calibri"/>
+                <a:latin typeface="Calibri" panose="020F0502020204030204"/>
               </a:rPr>
               <a:t>•  Monthly and one-time lifetime plans</a:t>
             </a:r>
+            <a:endParaRPr sz="1150">
+              <a:solidFill>
+                <a:srgbClr val="121D21"/>
+              </a:solidFill>
+              <a:latin typeface="Calibri" panose="020F0502020204030204"/>
+            </a:endParaRPr>
           </a:p>
           <a:p>
             <a:pPr>
@@ -8360,10 +8666,16 @@
                 <a:solidFill>
                   <a:srgbClr val="121D21"/>
                 </a:solidFill>
-                <a:latin typeface="Calibri"/>
+                <a:latin typeface="Calibri" panose="020F0502020204030204"/>
               </a:rPr>
               <a:t>•  Automated billing cron job</a:t>
             </a:r>
+            <a:endParaRPr sz="1150">
+              <a:solidFill>
+                <a:srgbClr val="121D21"/>
+              </a:solidFill>
+              <a:latin typeface="Calibri" panose="020F0502020204030204"/>
+            </a:endParaRPr>
           </a:p>
         </p:txBody>
       </p:sp>
@@ -8483,10 +8795,16 @@
                 <a:solidFill>
                   <a:srgbClr val="0F766E"/>
                 </a:solidFill>
-                <a:latin typeface="Calibri"/>
+                <a:latin typeface="Calibri" panose="020F0502020204030204"/>
               </a:rPr>
               <a:t>Admin Console</a:t>
             </a:r>
+            <a:endParaRPr sz="1700" b="1" i="0">
+              <a:solidFill>
+                <a:srgbClr val="0F766E"/>
+              </a:solidFill>
+              <a:latin typeface="Calibri" panose="020F0502020204030204"/>
+            </a:endParaRPr>
           </a:p>
         </p:txBody>
       </p:sp>
@@ -8525,10 +8843,16 @@
                 <a:solidFill>
                   <a:srgbClr val="121D21"/>
                 </a:solidFill>
-                <a:latin typeface="Calibri"/>
+                <a:latin typeface="Calibri" panose="020F0502020204030204"/>
               </a:rPr>
               <a:t>•  Approve/reject new business signups</a:t>
             </a:r>
+            <a:endParaRPr sz="1150">
+              <a:solidFill>
+                <a:srgbClr val="121D21"/>
+              </a:solidFill>
+              <a:latin typeface="Calibri" panose="020F0502020204030204"/>
+            </a:endParaRPr>
           </a:p>
           <a:p>
             <a:pPr>
@@ -8544,10 +8868,16 @@
                 <a:solidFill>
                   <a:srgbClr val="121D21"/>
                 </a:solidFill>
-                <a:latin typeface="Calibri"/>
+                <a:latin typeface="Calibri" panose="020F0502020204030204"/>
               </a:rPr>
               <a:t>•  Platform-wide audit trail and settings</a:t>
             </a:r>
+            <a:endParaRPr sz="1150">
+              <a:solidFill>
+                <a:srgbClr val="121D21"/>
+              </a:solidFill>
+              <a:latin typeface="Calibri" panose="020F0502020204030204"/>
+            </a:endParaRPr>
           </a:p>
         </p:txBody>
       </p:sp>
@@ -8667,10 +8997,16 @@
                 <a:solidFill>
                   <a:srgbClr val="0F766E"/>
                 </a:solidFill>
-                <a:latin typeface="Calibri"/>
+                <a:latin typeface="Calibri" panose="020F0502020204030204"/>
               </a:rPr>
               <a:t>Reports &amp; Analytics</a:t>
             </a:r>
+            <a:endParaRPr sz="1700" b="1" i="0">
+              <a:solidFill>
+                <a:srgbClr val="0F766E"/>
+              </a:solidFill>
+              <a:latin typeface="Calibri" panose="020F0502020204030204"/>
+            </a:endParaRPr>
           </a:p>
         </p:txBody>
       </p:sp>
@@ -8709,10 +9045,16 @@
                 <a:solidFill>
                   <a:srgbClr val="121D21"/>
                 </a:solidFill>
-                <a:latin typeface="Calibri"/>
+                <a:latin typeface="Calibri" panose="020F0502020204030204"/>
               </a:rPr>
               <a:t>•  Debts, payments, customers, and SMS delivery reports</a:t>
             </a:r>
+            <a:endParaRPr sz="1150">
+              <a:solidFill>
+                <a:srgbClr val="121D21"/>
+              </a:solidFill>
+              <a:latin typeface="Calibri" panose="020F0502020204030204"/>
+            </a:endParaRPr>
           </a:p>
           <a:p>
             <a:pPr>
@@ -8728,10 +9070,16 @@
                 <a:solidFill>
                   <a:srgbClr val="121D21"/>
                 </a:solidFill>
-                <a:latin typeface="Calibri"/>
+                <a:latin typeface="Calibri" panose="020F0502020204030204"/>
               </a:rPr>
               <a:t>•  Business dashboard overview</a:t>
             </a:r>
+            <a:endParaRPr sz="1150">
+              <a:solidFill>
+                <a:srgbClr val="121D21"/>
+              </a:solidFill>
+              <a:latin typeface="Calibri" panose="020F0502020204030204"/>
+            </a:endParaRPr>
           </a:p>
         </p:txBody>
       </p:sp>
@@ -8744,7 +9092,7 @@
 </file>
 
 <file path=ppt/slides/slide14.xml><?xml version="1.0" encoding="utf-8"?>
-<p:sld xmlns:a="http://schemas.openxmlformats.org/drawingml/2006/main" xmlns:p="http://schemas.openxmlformats.org/presentationml/2006/main" xmlns:r="http://schemas.openxmlformats.org/officeDocument/2006/relationships">
+<p:sld xmlns:a="http://schemas.openxmlformats.org/drawingml/2006/main" xmlns:r="http://schemas.openxmlformats.org/officeDocument/2006/relationships" xmlns:p="http://schemas.openxmlformats.org/presentationml/2006/main">
   <p:cSld>
     <p:bg>
       <p:bgPr>
@@ -8833,10 +9181,16 @@
                 <a:solidFill>
                   <a:srgbClr val="E69A1F"/>
                 </a:solidFill>
-                <a:latin typeface="Calibri"/>
+                <a:latin typeface="Calibri" panose="020F0502020204030204"/>
               </a:rPr>
               <a:t>CHAPTER TWO</a:t>
             </a:r>
+            <a:endParaRPr sz="1300" b="1" i="0">
+              <a:solidFill>
+                <a:srgbClr val="E69A1F"/>
+              </a:solidFill>
+              <a:latin typeface="Calibri" panose="020F0502020204030204"/>
+            </a:endParaRPr>
           </a:p>
         </p:txBody>
       </p:sp>
@@ -8868,10 +9222,16 @@
                 <a:solidFill>
                   <a:srgbClr val="121D21"/>
                 </a:solidFill>
-                <a:latin typeface="Calibri"/>
+                <a:latin typeface="Calibri" panose="020F0502020204030204"/>
               </a:rPr>
               <a:t>Database Design Overview</a:t>
             </a:r>
+            <a:endParaRPr sz="3000" b="1" i="0">
+              <a:solidFill>
+                <a:srgbClr val="121D21"/>
+              </a:solidFill>
+              <a:latin typeface="Calibri" panose="020F0502020204030204"/>
+            </a:endParaRPr>
           </a:p>
         </p:txBody>
       </p:sp>
@@ -8947,10 +9307,16 @@
                 <a:solidFill>
                   <a:srgbClr val="4B5A5E"/>
                 </a:solidFill>
-                <a:latin typeface="Calibri"/>
+                <a:latin typeface="Calibri" panose="020F0502020204030204"/>
               </a:rPr>
               <a:t>KopaAlert — Stanley Murangiri</a:t>
             </a:r>
+            <a:endParaRPr sz="1000" b="0" i="0">
+              <a:solidFill>
+                <a:srgbClr val="4B5A5E"/>
+              </a:solidFill>
+              <a:latin typeface="Calibri" panose="020F0502020204030204"/>
+            </a:endParaRPr>
           </a:p>
         </p:txBody>
       </p:sp>
@@ -8982,10 +9348,16 @@
                 <a:solidFill>
                   <a:srgbClr val="4B5A5E"/>
                 </a:solidFill>
-                <a:latin typeface="Calibri"/>
+                <a:latin typeface="Calibri" panose="020F0502020204030204"/>
               </a:rPr>
               <a:t>14</a:t>
             </a:r>
+            <a:endParaRPr sz="1000" b="0" i="0">
+              <a:solidFill>
+                <a:srgbClr val="4B5A5E"/>
+              </a:solidFill>
+              <a:latin typeface="Calibri" panose="020F0502020204030204"/>
+            </a:endParaRPr>
           </a:p>
         </p:txBody>
       </p:sp>
@@ -9024,10 +9396,16 @@
                 <a:solidFill>
                   <a:srgbClr val="121D21"/>
                 </a:solidFill>
-                <a:latin typeface="Calibri"/>
+                <a:latin typeface="Calibri" panose="020F0502020204030204"/>
               </a:rPr>
               <a:t>•  businesses — one row per registered business (name, subscription status)</a:t>
             </a:r>
+            <a:endParaRPr sz="1500">
+              <a:solidFill>
+                <a:srgbClr val="121D21"/>
+              </a:solidFill>
+              <a:latin typeface="Calibri" panose="020F0502020204030204"/>
+            </a:endParaRPr>
           </a:p>
           <a:p>
             <a:pPr>
@@ -9043,10 +9421,16 @@
                 <a:solidFill>
                   <a:srgbClr val="121D21"/>
                 </a:solidFill>
-                <a:latin typeface="Calibri"/>
+                <a:latin typeface="Calibri" panose="020F0502020204030204"/>
               </a:rPr>
               <a:t>•  users — staff accounts, linked to a business, with a role</a:t>
             </a:r>
+            <a:endParaRPr sz="1500">
+              <a:solidFill>
+                <a:srgbClr val="121D21"/>
+              </a:solidFill>
+              <a:latin typeface="Calibri" panose="020F0502020204030204"/>
+            </a:endParaRPr>
           </a:p>
           <a:p>
             <a:pPr>
@@ -9062,10 +9446,16 @@
                 <a:solidFill>
                   <a:srgbClr val="121D21"/>
                 </a:solidFill>
-                <a:latin typeface="Calibri"/>
+                <a:latin typeface="Calibri" panose="020F0502020204030204"/>
               </a:rPr>
               <a:t>•  business_requests — pending sign-ups awaiting admin approval</a:t>
             </a:r>
+            <a:endParaRPr sz="1500">
+              <a:solidFill>
+                <a:srgbClr val="121D21"/>
+              </a:solidFill>
+              <a:latin typeface="Calibri" panose="020F0502020204030204"/>
+            </a:endParaRPr>
           </a:p>
           <a:p>
             <a:pPr>
@@ -9081,10 +9471,16 @@
                 <a:solidFill>
                   <a:srgbClr val="121D21"/>
                 </a:solidFill>
-                <a:latin typeface="Calibri"/>
+                <a:latin typeface="Calibri" panose="020F0502020204030204"/>
               </a:rPr>
               <a:t>•  customers — debtors belonging to a business (name, phone, email, rating, blacklist flag)</a:t>
             </a:r>
+            <a:endParaRPr sz="1500">
+              <a:solidFill>
+                <a:srgbClr val="121D21"/>
+              </a:solidFill>
+              <a:latin typeface="Calibri" panose="020F0502020204030204"/>
+            </a:endParaRPr>
           </a:p>
           <a:p>
             <a:pPr>
@@ -9100,10 +9496,16 @@
                 <a:solidFill>
                   <a:srgbClr val="121D21"/>
                 </a:solidFill>
-                <a:latin typeface="Calibri"/>
+                <a:latin typeface="Calibri" panose="020F0502020204030204"/>
               </a:rPr>
               <a:t>•  debts — amount owed, due date, description, status, linked to a customer</a:t>
             </a:r>
+            <a:endParaRPr sz="1500">
+              <a:solidFill>
+                <a:srgbClr val="121D21"/>
+              </a:solidFill>
+              <a:latin typeface="Calibri" panose="020F0502020204030204"/>
+            </a:endParaRPr>
           </a:p>
           <a:p>
             <a:pPr>
@@ -9119,10 +9521,16 @@
                 <a:solidFill>
                   <a:srgbClr val="121D21"/>
                 </a:solidFill>
-                <a:latin typeface="Calibri"/>
+                <a:latin typeface="Calibri" panose="020F0502020204030204"/>
               </a:rPr>
               <a:t>•  payments — amounts paid against a debt, with method and date</a:t>
             </a:r>
+            <a:endParaRPr sz="1500">
+              <a:solidFill>
+                <a:srgbClr val="121D21"/>
+              </a:solidFill>
+              <a:latin typeface="Calibri" panose="020F0502020204030204"/>
+            </a:endParaRPr>
           </a:p>
           <a:p>
             <a:pPr>
@@ -9138,10 +9546,16 @@
                 <a:solidFill>
                   <a:srgbClr val="121D21"/>
                 </a:solidFill>
-                <a:latin typeface="Calibri"/>
+                <a:latin typeface="Calibri" panose="020F0502020204030204"/>
               </a:rPr>
               <a:t>•  notification_templates / notification_queue — SMS &amp; email templates and the scheduled send queue</a:t>
             </a:r>
+            <a:endParaRPr sz="1500">
+              <a:solidFill>
+                <a:srgbClr val="121D21"/>
+              </a:solidFill>
+              <a:latin typeface="Calibri" panose="020F0502020204030204"/>
+            </a:endParaRPr>
           </a:p>
           <a:p>
             <a:pPr>
@@ -9157,10 +9571,16 @@
                 <a:solidFill>
                   <a:srgbClr val="121D21"/>
                 </a:solidFill>
-                <a:latin typeface="Calibri"/>
+                <a:latin typeface="Calibri" panose="020F0502020204030204"/>
               </a:rPr>
               <a:t>•  business_settings / platform_settings — per-business and platform-wide configuration</a:t>
             </a:r>
+            <a:endParaRPr sz="1500">
+              <a:solidFill>
+                <a:srgbClr val="121D21"/>
+              </a:solidFill>
+              <a:latin typeface="Calibri" panose="020F0502020204030204"/>
+            </a:endParaRPr>
           </a:p>
         </p:txBody>
       </p:sp>
@@ -9192,10 +9612,16 @@
                 <a:solidFill>
                   <a:srgbClr val="0A4F4A"/>
                 </a:solidFill>
-                <a:latin typeface="Calibri"/>
+                <a:latin typeface="Calibri" panose="020F0502020204030204"/>
               </a:rPr>
               <a:t>Every business-owned table carries a business_id, enforced by Supabase Row Level Security policies — the database itself refuses a query that reaches outside your own business.</a:t>
             </a:r>
+            <a:endParaRPr sz="1300" b="1" i="1">
+              <a:solidFill>
+                <a:srgbClr val="0A4F4A"/>
+              </a:solidFill>
+              <a:latin typeface="Calibri" panose="020F0502020204030204"/>
+            </a:endParaRPr>
           </a:p>
         </p:txBody>
       </p:sp>
@@ -9208,7 +9634,7 @@
 </file>
 
 <file path=ppt/slides/slide15.xml><?xml version="1.0" encoding="utf-8"?>
-<p:sld xmlns:a="http://schemas.openxmlformats.org/drawingml/2006/main" xmlns:p="http://schemas.openxmlformats.org/presentationml/2006/main" xmlns:r="http://schemas.openxmlformats.org/officeDocument/2006/relationships">
+<p:sld xmlns:a="http://schemas.openxmlformats.org/drawingml/2006/main" xmlns:r="http://schemas.openxmlformats.org/officeDocument/2006/relationships" xmlns:p="http://schemas.openxmlformats.org/presentationml/2006/main">
   <p:cSld>
     <p:bg>
       <p:bgPr>
@@ -9297,10 +9723,16 @@
                 <a:solidFill>
                   <a:srgbClr val="E69A1F"/>
                 </a:solidFill>
-                <a:latin typeface="Calibri"/>
+                <a:latin typeface="Calibri" panose="020F0502020204030204"/>
               </a:rPr>
               <a:t>CHAPTER THREE</a:t>
             </a:r>
+            <a:endParaRPr sz="1300" b="1" i="0">
+              <a:solidFill>
+                <a:srgbClr val="E69A1F"/>
+              </a:solidFill>
+              <a:latin typeface="Calibri" panose="020F0502020204030204"/>
+            </a:endParaRPr>
           </a:p>
         </p:txBody>
       </p:sp>
@@ -9332,10 +9764,16 @@
                 <a:solidFill>
                   <a:srgbClr val="121D21"/>
                 </a:solidFill>
-                <a:latin typeface="Calibri"/>
+                <a:latin typeface="Calibri" panose="020F0502020204030204"/>
               </a:rPr>
               <a:t>Methodology</a:t>
             </a:r>
+            <a:endParaRPr sz="3000" b="1" i="0">
+              <a:solidFill>
+                <a:srgbClr val="121D21"/>
+              </a:solidFill>
+              <a:latin typeface="Calibri" panose="020F0502020204030204"/>
+            </a:endParaRPr>
           </a:p>
         </p:txBody>
       </p:sp>
@@ -9411,10 +9849,16 @@
                 <a:solidFill>
                   <a:srgbClr val="4B5A5E"/>
                 </a:solidFill>
-                <a:latin typeface="Calibri"/>
+                <a:latin typeface="Calibri" panose="020F0502020204030204"/>
               </a:rPr>
               <a:t>KopaAlert — Stanley Murangiri</a:t>
             </a:r>
+            <a:endParaRPr sz="1000" b="0" i="0">
+              <a:solidFill>
+                <a:srgbClr val="4B5A5E"/>
+              </a:solidFill>
+              <a:latin typeface="Calibri" panose="020F0502020204030204"/>
+            </a:endParaRPr>
           </a:p>
         </p:txBody>
       </p:sp>
@@ -9446,10 +9890,16 @@
                 <a:solidFill>
                   <a:srgbClr val="4B5A5E"/>
                 </a:solidFill>
-                <a:latin typeface="Calibri"/>
+                <a:latin typeface="Calibri" panose="020F0502020204030204"/>
               </a:rPr>
               <a:t>15</a:t>
             </a:r>
+            <a:endParaRPr sz="1000" b="0" i="0">
+              <a:solidFill>
+                <a:srgbClr val="4B5A5E"/>
+              </a:solidFill>
+              <a:latin typeface="Calibri" panose="020F0502020204030204"/>
+            </a:endParaRPr>
           </a:p>
         </p:txBody>
       </p:sp>
@@ -9488,10 +9938,16 @@
                 <a:solidFill>
                   <a:srgbClr val="121D21"/>
                 </a:solidFill>
-                <a:latin typeface="Calibri"/>
+                <a:latin typeface="Calibri" panose="020F0502020204030204"/>
               </a:rPr>
               <a:t>•  I followed an iterative, incremental development approach — building and shipping one working feature at a time rather than attempting the whole system before testing anything.</a:t>
             </a:r>
+            <a:endParaRPr sz="1700">
+              <a:solidFill>
+                <a:srgbClr val="121D21"/>
+              </a:solidFill>
+              <a:latin typeface="Calibri" panose="020F0502020204030204"/>
+            </a:endParaRPr>
           </a:p>
           <a:p>
             <a:pPr>
@@ -9507,10 +9963,16 @@
                 <a:solidFill>
                   <a:srgbClr val="121D21"/>
                 </a:solidFill>
-                <a:latin typeface="Calibri"/>
+                <a:latin typeface="Calibri" panose="020F0502020204030204"/>
               </a:rPr>
               <a:t>•  Each feature began with identifying the real-world behaviour it needed to replace (e.g. "the book showed who owed what" became the debts table and the dashboard).</a:t>
             </a:r>
+            <a:endParaRPr sz="1700">
+              <a:solidFill>
+                <a:srgbClr val="121D21"/>
+              </a:solidFill>
+              <a:latin typeface="Calibri" panose="020F0502020204030204"/>
+            </a:endParaRPr>
           </a:p>
           <a:p>
             <a:pPr>
@@ -9526,10 +9988,16 @@
                 <a:solidFill>
                   <a:srgbClr val="121D21"/>
                 </a:solidFill>
-                <a:latin typeface="Calibri"/>
+                <a:latin typeface="Calibri" panose="020F0502020204030204"/>
               </a:rPr>
               <a:t>•  I used Git for version control, with focused commits so that each change could be reviewed and, if needed, reversed independently.</a:t>
             </a:r>
+            <a:endParaRPr sz="1700">
+              <a:solidFill>
+                <a:srgbClr val="121D21"/>
+              </a:solidFill>
+              <a:latin typeface="Calibri" panose="020F0502020204030204"/>
+            </a:endParaRPr>
           </a:p>
           <a:p>
             <a:pPr>
@@ -9545,10 +10013,16 @@
                 <a:solidFill>
                   <a:srgbClr val="121D21"/>
                 </a:solidFill>
-                <a:latin typeface="Calibri"/>
+                <a:latin typeface="Calibri" panose="020F0502020204030204"/>
               </a:rPr>
               <a:t>•  Automated tests (Jest for logic, Playwright for full user flows) were written alongside features to catch regressions as the system grew.</a:t>
             </a:r>
+            <a:endParaRPr sz="1700">
+              <a:solidFill>
+                <a:srgbClr val="121D21"/>
+              </a:solidFill>
+              <a:latin typeface="Calibri" panose="020F0502020204030204"/>
+            </a:endParaRPr>
           </a:p>
           <a:p>
             <a:pPr>
@@ -9564,10 +10038,16 @@
                 <a:solidFill>
                   <a:srgbClr val="121D21"/>
                 </a:solidFill>
-                <a:latin typeface="Calibri"/>
+                <a:latin typeface="Calibri" panose="020F0502020204030204"/>
               </a:rPr>
               <a:t>•  Bugs found in real use (for example, redirect issues and duplicate-record edge cases) were logged, root-caused, and fixed as part of the same iterative cycle.</a:t>
             </a:r>
+            <a:endParaRPr sz="1700">
+              <a:solidFill>
+                <a:srgbClr val="121D21"/>
+              </a:solidFill>
+              <a:latin typeface="Calibri" panose="020F0502020204030204"/>
+            </a:endParaRPr>
           </a:p>
         </p:txBody>
       </p:sp>
@@ -9580,7 +10060,7 @@
 </file>
 
 <file path=ppt/slides/slide16.xml><?xml version="1.0" encoding="utf-8"?>
-<p:sld xmlns:a="http://schemas.openxmlformats.org/drawingml/2006/main" xmlns:p="http://schemas.openxmlformats.org/presentationml/2006/main" xmlns:r="http://schemas.openxmlformats.org/officeDocument/2006/relationships">
+<p:sld xmlns:a="http://schemas.openxmlformats.org/drawingml/2006/main" xmlns:r="http://schemas.openxmlformats.org/officeDocument/2006/relationships" xmlns:p="http://schemas.openxmlformats.org/presentationml/2006/main">
   <p:cSld>
     <p:bg>
       <p:bgPr>
@@ -9669,10 +10149,16 @@
                 <a:solidFill>
                   <a:srgbClr val="E69A1F"/>
                 </a:solidFill>
-                <a:latin typeface="Calibri"/>
+                <a:latin typeface="Calibri" panose="020F0502020204030204"/>
               </a:rPr>
               <a:t>CHAPTER THREE</a:t>
             </a:r>
+            <a:endParaRPr sz="1300" b="1" i="0">
+              <a:solidFill>
+                <a:srgbClr val="E69A1F"/>
+              </a:solidFill>
+              <a:latin typeface="Calibri" panose="020F0502020204030204"/>
+            </a:endParaRPr>
           </a:p>
         </p:txBody>
       </p:sp>
@@ -9704,10 +10190,16 @@
                 <a:solidFill>
                   <a:srgbClr val="121D21"/>
                 </a:solidFill>
-                <a:latin typeface="Calibri"/>
+                <a:latin typeface="Calibri" panose="020F0502020204030204"/>
               </a:rPr>
               <a:t>Challenges Encountered</a:t>
             </a:r>
+            <a:endParaRPr sz="3000" b="1" i="0">
+              <a:solidFill>
+                <a:srgbClr val="121D21"/>
+              </a:solidFill>
+              <a:latin typeface="Calibri" panose="020F0502020204030204"/>
+            </a:endParaRPr>
           </a:p>
         </p:txBody>
       </p:sp>
@@ -9783,10 +10275,16 @@
                 <a:solidFill>
                   <a:srgbClr val="4B5A5E"/>
                 </a:solidFill>
-                <a:latin typeface="Calibri"/>
+                <a:latin typeface="Calibri" panose="020F0502020204030204"/>
               </a:rPr>
               <a:t>KopaAlert — Stanley Murangiri</a:t>
             </a:r>
+            <a:endParaRPr sz="1000" b="0" i="0">
+              <a:solidFill>
+                <a:srgbClr val="4B5A5E"/>
+              </a:solidFill>
+              <a:latin typeface="Calibri" panose="020F0502020204030204"/>
+            </a:endParaRPr>
           </a:p>
         </p:txBody>
       </p:sp>
@@ -9818,10 +10316,16 @@
                 <a:solidFill>
                   <a:srgbClr val="4B5A5E"/>
                 </a:solidFill>
-                <a:latin typeface="Calibri"/>
+                <a:latin typeface="Calibri" panose="020F0502020204030204"/>
               </a:rPr>
               <a:t>16</a:t>
             </a:r>
+            <a:endParaRPr sz="1000" b="0" i="0">
+              <a:solidFill>
+                <a:srgbClr val="4B5A5E"/>
+              </a:solidFill>
+              <a:latin typeface="Calibri" panose="020F0502020204030204"/>
+            </a:endParaRPr>
           </a:p>
         </p:txBody>
       </p:sp>
@@ -9941,10 +10445,16 @@
                 <a:solidFill>
                   <a:srgbClr val="0F766E"/>
                 </a:solidFill>
-                <a:latin typeface="Calibri"/>
+                <a:latin typeface="Calibri" panose="020F0502020204030204"/>
               </a:rPr>
               <a:t>Hardware reliability</a:t>
             </a:r>
+            <a:endParaRPr sz="1450" b="1" i="0">
+              <a:solidFill>
+                <a:srgbClr val="0F766E"/>
+              </a:solidFill>
+              <a:latin typeface="Calibri" panose="020F0502020204030204"/>
+            </a:endParaRPr>
           </a:p>
         </p:txBody>
       </p:sp>
@@ -9980,10 +10490,16 @@
                 <a:solidFill>
                   <a:srgbClr val="121D21"/>
                 </a:solidFill>
-                <a:latin typeface="Calibri"/>
+                <a:latin typeface="Calibri" panose="020F0502020204030204"/>
               </a:rPr>
               <a:t>My laptop would frequently hang or freeze during long coding sessions, costing time and occasionally unsaved work.</a:t>
             </a:r>
+            <a:endParaRPr sz="1150" b="0" i="0">
+              <a:solidFill>
+                <a:srgbClr val="121D21"/>
+              </a:solidFill>
+              <a:latin typeface="Calibri" panose="020F0502020204030204"/>
+            </a:endParaRPr>
           </a:p>
         </p:txBody>
       </p:sp>
@@ -10103,10 +10619,16 @@
                 <a:solidFill>
                   <a:srgbClr val="0F766E"/>
                 </a:solidFill>
-                <a:latin typeface="Calibri"/>
+                <a:latin typeface="Calibri" panose="020F0502020204030204"/>
               </a:rPr>
               <a:t>Electricity</a:t>
             </a:r>
+            <a:endParaRPr sz="1450" b="1" i="0">
+              <a:solidFill>
+                <a:srgbClr val="0F766E"/>
+              </a:solidFill>
+              <a:latin typeface="Calibri" panose="020F0502020204030204"/>
+            </a:endParaRPr>
           </a:p>
         </p:txBody>
       </p:sp>
@@ -10142,10 +10664,16 @@
                 <a:solidFill>
                   <a:srgbClr val="121D21"/>
                 </a:solidFill>
-                <a:latin typeface="Calibri"/>
+                <a:latin typeface="Calibri" panose="020F0502020204030204"/>
               </a:rPr>
               <a:t>Unpredictable power outages interrupted development sessions, especially during testing and deployment work.</a:t>
             </a:r>
+            <a:endParaRPr sz="1150" b="0" i="0">
+              <a:solidFill>
+                <a:srgbClr val="121D21"/>
+              </a:solidFill>
+              <a:latin typeface="Calibri" panose="020F0502020204030204"/>
+            </a:endParaRPr>
           </a:p>
         </p:txBody>
       </p:sp>
@@ -10265,10 +10793,16 @@
                 <a:solidFill>
                   <a:srgbClr val="0F766E"/>
                 </a:solidFill>
-                <a:latin typeface="Calibri"/>
+                <a:latin typeface="Calibri" panose="020F0502020204030204"/>
               </a:rPr>
               <a:t>Network connectivity</a:t>
             </a:r>
+            <a:endParaRPr sz="1450" b="1" i="0">
+              <a:solidFill>
+                <a:srgbClr val="0F766E"/>
+              </a:solidFill>
+              <a:latin typeface="Calibri" panose="020F0502020204030204"/>
+            </a:endParaRPr>
           </a:p>
         </p:txBody>
       </p:sp>
@@ -10304,10 +10838,16 @@
                 <a:solidFill>
                   <a:srgbClr val="121D21"/>
                 </a:solidFill>
-                <a:latin typeface="Calibri"/>
+                <a:latin typeface="Calibri" panose="020F0502020204030204"/>
               </a:rPr>
               <a:t>Slow or unstable internet made cloud-dependent work (Supabase, deployments, SMS/email testing) unreliable at times.</a:t>
             </a:r>
+            <a:endParaRPr sz="1150" b="0" i="0">
+              <a:solidFill>
+                <a:srgbClr val="121D21"/>
+              </a:solidFill>
+              <a:latin typeface="Calibri" panose="020F0502020204030204"/>
+            </a:endParaRPr>
           </a:p>
         </p:txBody>
       </p:sp>
@@ -10427,10 +10967,16 @@
                 <a:solidFill>
                   <a:srgbClr val="0F766E"/>
                 </a:solidFill>
-                <a:latin typeface="Calibri"/>
+                <a:latin typeface="Calibri" panose="020F0502020204030204"/>
               </a:rPr>
               <a:t>Balancing routine</a:t>
             </a:r>
+            <a:endParaRPr sz="1450" b="1" i="0">
+              <a:solidFill>
+                <a:srgbClr val="0F766E"/>
+              </a:solidFill>
+              <a:latin typeface="Calibri" panose="020F0502020204030204"/>
+            </a:endParaRPr>
           </a:p>
         </p:txBody>
       </p:sp>
@@ -10466,10 +11012,16 @@
                 <a:solidFill>
                   <a:srgbClr val="121D21"/>
                 </a:solidFill>
-                <a:latin typeface="Calibri"/>
+                <a:latin typeface="Calibri" panose="020F0502020204030204"/>
               </a:rPr>
               <a:t>Fitting sustained project work around my daily routine, coursework, and other responsibilities required careful time management.</a:t>
             </a:r>
+            <a:endParaRPr sz="1150" b="0" i="0">
+              <a:solidFill>
+                <a:srgbClr val="121D21"/>
+              </a:solidFill>
+              <a:latin typeface="Calibri" panose="020F0502020204030204"/>
+            </a:endParaRPr>
           </a:p>
         </p:txBody>
       </p:sp>
@@ -10589,10 +11141,16 @@
                 <a:solidFill>
                   <a:srgbClr val="0F766E"/>
                 </a:solidFill>
-                <a:latin typeface="Calibri"/>
+                <a:latin typeface="Calibri" panose="020F0502020204030204"/>
               </a:rPr>
               <a:t>Funding</a:t>
             </a:r>
+            <a:endParaRPr sz="1450" b="1" i="0">
+              <a:solidFill>
+                <a:srgbClr val="0F766E"/>
+              </a:solidFill>
+              <a:latin typeface="Calibri" panose="020F0502020204030204"/>
+            </a:endParaRPr>
           </a:p>
         </p:txBody>
       </p:sp>
@@ -10628,10 +11186,16 @@
                 <a:solidFill>
                   <a:srgbClr val="121D21"/>
                 </a:solidFill>
-                <a:latin typeface="Calibri"/>
+                <a:latin typeface="Calibri" panose="020F0502020204030204"/>
               </a:rPr>
               <a:t>Covering costs such as hosting, domain, and SMS test credits on a student budget was a recurring constraint.</a:t>
             </a:r>
+            <a:endParaRPr sz="1150" b="0" i="0">
+              <a:solidFill>
+                <a:srgbClr val="121D21"/>
+              </a:solidFill>
+              <a:latin typeface="Calibri" panose="020F0502020204030204"/>
+            </a:endParaRPr>
           </a:p>
         </p:txBody>
       </p:sp>
@@ -10751,10 +11315,16 @@
                 <a:solidFill>
                   <a:srgbClr val="0F766E"/>
                 </a:solidFill>
-                <a:latin typeface="Calibri"/>
+                <a:latin typeface="Calibri" panose="020F0502020204030204"/>
               </a:rPr>
               <a:t>Learning curve</a:t>
             </a:r>
+            <a:endParaRPr sz="1450" b="1" i="0">
+              <a:solidFill>
+                <a:srgbClr val="0F766E"/>
+              </a:solidFill>
+              <a:latin typeface="Calibri" panose="020F0502020204030204"/>
+            </a:endParaRPr>
           </a:p>
         </p:txBody>
       </p:sp>
@@ -10790,10 +11360,16 @@
                 <a:solidFill>
                   <a:srgbClr val="121D21"/>
                 </a:solidFill>
-                <a:latin typeface="Calibri"/>
+                <a:latin typeface="Calibri" panose="020F0502020204030204"/>
               </a:rPr>
               <a:t>Several parts of the stack (Supabase RLS, Next.js App Router, scheduled cron jobs) were new to me and had to be learned while building.</a:t>
             </a:r>
+            <a:endParaRPr sz="1150" b="0" i="0">
+              <a:solidFill>
+                <a:srgbClr val="121D21"/>
+              </a:solidFill>
+              <a:latin typeface="Calibri" panose="020F0502020204030204"/>
+            </a:endParaRPr>
           </a:p>
         </p:txBody>
       </p:sp>
@@ -10806,7 +11382,7 @@
 </file>
 
 <file path=ppt/slides/slide17.xml><?xml version="1.0" encoding="utf-8"?>
-<p:sld xmlns:a="http://schemas.openxmlformats.org/drawingml/2006/main" xmlns:p="http://schemas.openxmlformats.org/presentationml/2006/main" xmlns:r="http://schemas.openxmlformats.org/officeDocument/2006/relationships">
+<p:sld xmlns:a="http://schemas.openxmlformats.org/drawingml/2006/main" xmlns:r="http://schemas.openxmlformats.org/officeDocument/2006/relationships" xmlns:p="http://schemas.openxmlformats.org/presentationml/2006/main">
   <p:cSld>
     <p:bg>
       <p:bgPr>
@@ -10895,10 +11471,16 @@
                 <a:solidFill>
                   <a:srgbClr val="E69A1F"/>
                 </a:solidFill>
-                <a:latin typeface="Calibri"/>
+                <a:latin typeface="Calibri" panose="020F0502020204030204"/>
               </a:rPr>
               <a:t>CHAPTER FOUR</a:t>
             </a:r>
+            <a:endParaRPr sz="1300" b="1" i="0">
+              <a:solidFill>
+                <a:srgbClr val="E69A1F"/>
+              </a:solidFill>
+              <a:latin typeface="Calibri" panose="020F0502020204030204"/>
+            </a:endParaRPr>
           </a:p>
         </p:txBody>
       </p:sp>
@@ -10930,10 +11512,16 @@
                 <a:solidFill>
                   <a:srgbClr val="121D21"/>
                 </a:solidFill>
-                <a:latin typeface="Calibri"/>
+                <a:latin typeface="Calibri" panose="020F0502020204030204"/>
               </a:rPr>
               <a:t>Testing and Quality Assurance</a:t>
             </a:r>
+            <a:endParaRPr sz="3000" b="1" i="0">
+              <a:solidFill>
+                <a:srgbClr val="121D21"/>
+              </a:solidFill>
+              <a:latin typeface="Calibri" panose="020F0502020204030204"/>
+            </a:endParaRPr>
           </a:p>
         </p:txBody>
       </p:sp>
@@ -11009,10 +11597,16 @@
                 <a:solidFill>
                   <a:srgbClr val="4B5A5E"/>
                 </a:solidFill>
-                <a:latin typeface="Calibri"/>
+                <a:latin typeface="Calibri" panose="020F0502020204030204"/>
               </a:rPr>
               <a:t>KopaAlert — Stanley Murangiri</a:t>
             </a:r>
+            <a:endParaRPr sz="1000" b="0" i="0">
+              <a:solidFill>
+                <a:srgbClr val="4B5A5E"/>
+              </a:solidFill>
+              <a:latin typeface="Calibri" panose="020F0502020204030204"/>
+            </a:endParaRPr>
           </a:p>
         </p:txBody>
       </p:sp>
@@ -11044,10 +11638,16 @@
                 <a:solidFill>
                   <a:srgbClr val="4B5A5E"/>
                 </a:solidFill>
-                <a:latin typeface="Calibri"/>
+                <a:latin typeface="Calibri" panose="020F0502020204030204"/>
               </a:rPr>
               <a:t>17</a:t>
             </a:r>
+            <a:endParaRPr sz="1000" b="0" i="0">
+              <a:solidFill>
+                <a:srgbClr val="4B5A5E"/>
+              </a:solidFill>
+              <a:latin typeface="Calibri" panose="020F0502020204030204"/>
+            </a:endParaRPr>
           </a:p>
         </p:txBody>
       </p:sp>
@@ -11086,10 +11686,16 @@
                 <a:solidFill>
                   <a:srgbClr val="121D21"/>
                 </a:solidFill>
-                <a:latin typeface="Calibri"/>
+                <a:latin typeface="Calibri" panose="020F0502020204030204"/>
               </a:rPr>
               <a:t>•  Unit tests (Jest) — cover pure logic such as phone-number validation and normalisation, and reporting calculations.</a:t>
             </a:r>
+            <a:endParaRPr sz="1700">
+              <a:solidFill>
+                <a:srgbClr val="121D21"/>
+              </a:solidFill>
+              <a:latin typeface="Calibri" panose="020F0502020204030204"/>
+            </a:endParaRPr>
           </a:p>
           <a:p>
             <a:pPr>
@@ -11105,10 +11711,16 @@
                 <a:solidFill>
                   <a:srgbClr val="121D21"/>
                 </a:solidFill>
-                <a:latin typeface="Calibri"/>
+                <a:latin typeface="Calibri" panose="020F0502020204030204"/>
               </a:rPr>
               <a:t>•  End-to-end tests (Playwright) — simulate a real business owner using the browser: registering, logging in, adding customers, recording debts, and recording payments.</a:t>
             </a:r>
+            <a:endParaRPr sz="1700">
+              <a:solidFill>
+                <a:srgbClr val="121D21"/>
+              </a:solidFill>
+              <a:latin typeface="Calibri" panose="020F0502020204030204"/>
+            </a:endParaRPr>
           </a:p>
           <a:p>
             <a:pPr>
@@ -11124,10 +11736,16 @@
                 <a:solidFill>
                   <a:srgbClr val="121D21"/>
                 </a:solidFill>
-                <a:latin typeface="Calibri"/>
+                <a:latin typeface="Calibri" panose="020F0502020204030204"/>
               </a:rPr>
               <a:t>•  Manual exploratory testing — used throughout development to catch edge cases automated tests did not anticipate (e.g. a business appearing to owe itself money, duplicate customer records).</a:t>
             </a:r>
+            <a:endParaRPr sz="1700">
+              <a:solidFill>
+                <a:srgbClr val="121D21"/>
+              </a:solidFill>
+              <a:latin typeface="Calibri" panose="020F0502020204030204"/>
+            </a:endParaRPr>
           </a:p>
           <a:p>
             <a:pPr>
@@ -11143,10 +11761,16 @@
                 <a:solidFill>
                   <a:srgbClr val="121D21"/>
                 </a:solidFill>
-                <a:latin typeface="Calibri"/>
+                <a:latin typeface="Calibri" panose="020F0502020204030204"/>
               </a:rPr>
               <a:t>•  Regression discipline — every fixed bug was paired with a test or a documented check, so the same defect could not silently return.</a:t>
             </a:r>
+            <a:endParaRPr sz="1700">
+              <a:solidFill>
+                <a:srgbClr val="121D21"/>
+              </a:solidFill>
+              <a:latin typeface="Calibri" panose="020F0502020204030204"/>
+            </a:endParaRPr>
           </a:p>
           <a:p>
             <a:pPr>
@@ -11162,10 +11786,16 @@
                 <a:solidFill>
                   <a:srgbClr val="121D21"/>
                 </a:solidFill>
-                <a:latin typeface="Calibri"/>
+                <a:latin typeface="Calibri" panose="020F0502020204030204"/>
               </a:rPr>
               <a:t>•  A TypeScript-first codebase — the compiler itself catches an entire class of mistakes before the code is ever run.</a:t>
             </a:r>
+            <a:endParaRPr sz="1700">
+              <a:solidFill>
+                <a:srgbClr val="121D21"/>
+              </a:solidFill>
+              <a:latin typeface="Calibri" panose="020F0502020204030204"/>
+            </a:endParaRPr>
           </a:p>
         </p:txBody>
       </p:sp>
@@ -11178,7 +11808,7 @@
 </file>
 
 <file path=ppt/slides/slide18.xml><?xml version="1.0" encoding="utf-8"?>
-<p:sld xmlns:a="http://schemas.openxmlformats.org/drawingml/2006/main" xmlns:p="http://schemas.openxmlformats.org/presentationml/2006/main" xmlns:r="http://schemas.openxmlformats.org/officeDocument/2006/relationships">
+<p:sld xmlns:a="http://schemas.openxmlformats.org/drawingml/2006/main" xmlns:r="http://schemas.openxmlformats.org/officeDocument/2006/relationships" xmlns:p="http://schemas.openxmlformats.org/presentationml/2006/main">
   <p:cSld>
     <p:bg>
       <p:bgPr>
@@ -11267,10 +11897,16 @@
                 <a:solidFill>
                   <a:srgbClr val="E69A1F"/>
                 </a:solidFill>
-                <a:latin typeface="Calibri"/>
+                <a:latin typeface="Calibri" panose="020F0502020204030204"/>
               </a:rPr>
               <a:t>CHAPTER FOUR</a:t>
             </a:r>
+            <a:endParaRPr sz="1300" b="1" i="0">
+              <a:solidFill>
+                <a:srgbClr val="E69A1F"/>
+              </a:solidFill>
+              <a:latin typeface="Calibri" panose="020F0502020204030204"/>
+            </a:endParaRPr>
           </a:p>
         </p:txBody>
       </p:sp>
@@ -11302,10 +11938,16 @@
                 <a:solidFill>
                   <a:srgbClr val="121D21"/>
                 </a:solidFill>
-                <a:latin typeface="Calibri"/>
+                <a:latin typeface="Calibri" panose="020F0502020204030204"/>
               </a:rPr>
               <a:t>Results and Outcomes</a:t>
             </a:r>
+            <a:endParaRPr sz="3000" b="1" i="0">
+              <a:solidFill>
+                <a:srgbClr val="121D21"/>
+              </a:solidFill>
+              <a:latin typeface="Calibri" panose="020F0502020204030204"/>
+            </a:endParaRPr>
           </a:p>
         </p:txBody>
       </p:sp>
@@ -11381,10 +12023,16 @@
                 <a:solidFill>
                   <a:srgbClr val="4B5A5E"/>
                 </a:solidFill>
-                <a:latin typeface="Calibri"/>
+                <a:latin typeface="Calibri" panose="020F0502020204030204"/>
               </a:rPr>
               <a:t>KopaAlert — Stanley Murangiri</a:t>
             </a:r>
+            <a:endParaRPr sz="1000" b="0" i="0">
+              <a:solidFill>
+                <a:srgbClr val="4B5A5E"/>
+              </a:solidFill>
+              <a:latin typeface="Calibri" panose="020F0502020204030204"/>
+            </a:endParaRPr>
           </a:p>
         </p:txBody>
       </p:sp>
@@ -11416,10 +12064,16 @@
                 <a:solidFill>
                   <a:srgbClr val="4B5A5E"/>
                 </a:solidFill>
-                <a:latin typeface="Calibri"/>
+                <a:latin typeface="Calibri" panose="020F0502020204030204"/>
               </a:rPr>
               <a:t>18</a:t>
             </a:r>
+            <a:endParaRPr sz="1000" b="0" i="0">
+              <a:solidFill>
+                <a:srgbClr val="4B5A5E"/>
+              </a:solidFill>
+              <a:latin typeface="Calibri" panose="020F0502020204030204"/>
+            </a:endParaRPr>
           </a:p>
         </p:txBody>
       </p:sp>
@@ -11451,10 +12105,16 @@
                 <a:solidFill>
                   <a:srgbClr val="4B5A5E"/>
                 </a:solidFill>
-                <a:latin typeface="Calibri"/>
+                <a:latin typeface="Calibri" panose="020F0502020204030204"/>
               </a:rPr>
               <a:t>[Insert screenshots of the running system here — e.g. Dashboard, Add Debt, Reminder SMS]</a:t>
             </a:r>
+            <a:endParaRPr sz="1350" b="0" i="1">
+              <a:solidFill>
+                <a:srgbClr val="4B5A5E"/>
+              </a:solidFill>
+              <a:latin typeface="Calibri" panose="020F0502020204030204"/>
+            </a:endParaRPr>
           </a:p>
         </p:txBody>
       </p:sp>
@@ -11532,10 +12192,16 @@
                 <a:solidFill>
                   <a:srgbClr val="4B5A5E"/>
                 </a:solidFill>
-                <a:latin typeface="Calibri"/>
+                <a:latin typeface="Calibri" panose="020F0502020204030204"/>
               </a:rPr>
               <a:t>[ Screenshot ]</a:t>
             </a:r>
+            <a:endParaRPr sz="1300" b="0" i="0">
+              <a:solidFill>
+                <a:srgbClr val="4B5A5E"/>
+              </a:solidFill>
+              <a:latin typeface="Calibri" panose="020F0502020204030204"/>
+            </a:endParaRPr>
           </a:p>
         </p:txBody>
       </p:sp>
@@ -11613,10 +12279,16 @@
                 <a:solidFill>
                   <a:srgbClr val="4B5A5E"/>
                 </a:solidFill>
-                <a:latin typeface="Calibri"/>
+                <a:latin typeface="Calibri" panose="020F0502020204030204"/>
               </a:rPr>
               <a:t>[ Screenshot ]</a:t>
             </a:r>
+            <a:endParaRPr sz="1300" b="0" i="0">
+              <a:solidFill>
+                <a:srgbClr val="4B5A5E"/>
+              </a:solidFill>
+              <a:latin typeface="Calibri" panose="020F0502020204030204"/>
+            </a:endParaRPr>
           </a:p>
         </p:txBody>
       </p:sp>
@@ -11694,10 +12366,16 @@
                 <a:solidFill>
                   <a:srgbClr val="4B5A5E"/>
                 </a:solidFill>
-                <a:latin typeface="Calibri"/>
+                <a:latin typeface="Calibri" panose="020F0502020204030204"/>
               </a:rPr>
               <a:t>[ Screenshot ]</a:t>
             </a:r>
+            <a:endParaRPr sz="1300" b="0" i="0">
+              <a:solidFill>
+                <a:srgbClr val="4B5A5E"/>
+              </a:solidFill>
+              <a:latin typeface="Calibri" panose="020F0502020204030204"/>
+            </a:endParaRPr>
           </a:p>
         </p:txBody>
       </p:sp>
@@ -11736,10 +12414,16 @@
                 <a:solidFill>
                   <a:srgbClr val="121D21"/>
                 </a:solidFill>
-                <a:latin typeface="Calibri"/>
+                <a:latin typeface="Calibri" panose="020F0502020204030204"/>
               </a:rPr>
               <a:t>•  A working system where debts and reminders no longer depend on anyone remembering.</a:t>
             </a:r>
+            <a:endParaRPr sz="1400">
+              <a:solidFill>
+                <a:srgbClr val="121D21"/>
+              </a:solidFill>
+              <a:latin typeface="Calibri" panose="020F0502020204030204"/>
+            </a:endParaRPr>
           </a:p>
           <a:p>
             <a:pPr>
@@ -11755,10 +12439,16 @@
                 <a:solidFill>
                   <a:srgbClr val="121D21"/>
                 </a:solidFill>
-                <a:latin typeface="Calibri"/>
+                <a:latin typeface="Calibri" panose="020F0502020204030204"/>
               </a:rPr>
               <a:t>•  Automated SMS/email reminders replacing manual, ad-hoc follow-up calls.</a:t>
             </a:r>
+            <a:endParaRPr sz="1400">
+              <a:solidFill>
+                <a:srgbClr val="121D21"/>
+              </a:solidFill>
+              <a:latin typeface="Calibri" panose="020F0502020204030204"/>
+            </a:endParaRPr>
           </a:p>
           <a:p>
             <a:pPr>
@@ -11774,10 +12464,16 @@
                 <a:solidFill>
                   <a:srgbClr val="121D21"/>
                 </a:solidFill>
-                <a:latin typeface="Calibri"/>
+                <a:latin typeface="Calibri" panose="020F0502020204030204"/>
               </a:rPr>
               <a:t>•  A single dashboard giving an at-a-glance view of everything a paper book could never show.</a:t>
             </a:r>
+            <a:endParaRPr sz="1400">
+              <a:solidFill>
+                <a:srgbClr val="121D21"/>
+              </a:solidFill>
+              <a:latin typeface="Calibri" panose="020F0502020204030204"/>
+            </a:endParaRPr>
           </a:p>
         </p:txBody>
       </p:sp>
@@ -11790,7 +12486,7 @@
 </file>
 
 <file path=ppt/slides/slide19.xml><?xml version="1.0" encoding="utf-8"?>
-<p:sld xmlns:a="http://schemas.openxmlformats.org/drawingml/2006/main" xmlns:p="http://schemas.openxmlformats.org/presentationml/2006/main" xmlns:r="http://schemas.openxmlformats.org/officeDocument/2006/relationships">
+<p:sld xmlns:a="http://schemas.openxmlformats.org/drawingml/2006/main" xmlns:r="http://schemas.openxmlformats.org/officeDocument/2006/relationships" xmlns:p="http://schemas.openxmlformats.org/presentationml/2006/main">
   <p:cSld>
     <p:bg>
       <p:bgPr>
@@ -11879,10 +12575,16 @@
                 <a:solidFill>
                   <a:srgbClr val="E69A1F"/>
                 </a:solidFill>
-                <a:latin typeface="Calibri"/>
+                <a:latin typeface="Calibri" panose="020F0502020204030204"/>
               </a:rPr>
               <a:t>CHAPTER FIVE</a:t>
             </a:r>
+            <a:endParaRPr sz="1300" b="1" i="0">
+              <a:solidFill>
+                <a:srgbClr val="E69A1F"/>
+              </a:solidFill>
+              <a:latin typeface="Calibri" panose="020F0502020204030204"/>
+            </a:endParaRPr>
           </a:p>
         </p:txBody>
       </p:sp>
@@ -11914,10 +12616,16 @@
                 <a:solidFill>
                   <a:srgbClr val="121D21"/>
                 </a:solidFill>
-                <a:latin typeface="Calibri"/>
+                <a:latin typeface="Calibri" panose="020F0502020204030204"/>
               </a:rPr>
               <a:t>Future Enhancements — Room to Grow</a:t>
             </a:r>
+            <a:endParaRPr sz="3000" b="1" i="0">
+              <a:solidFill>
+                <a:srgbClr val="121D21"/>
+              </a:solidFill>
+              <a:latin typeface="Calibri" panose="020F0502020204030204"/>
+            </a:endParaRPr>
           </a:p>
         </p:txBody>
       </p:sp>
@@ -11993,10 +12701,16 @@
                 <a:solidFill>
                   <a:srgbClr val="4B5A5E"/>
                 </a:solidFill>
-                <a:latin typeface="Calibri"/>
+                <a:latin typeface="Calibri" panose="020F0502020204030204"/>
               </a:rPr>
               <a:t>KopaAlert — Stanley Murangiri</a:t>
             </a:r>
+            <a:endParaRPr sz="1000" b="0" i="0">
+              <a:solidFill>
+                <a:srgbClr val="4B5A5E"/>
+              </a:solidFill>
+              <a:latin typeface="Calibri" panose="020F0502020204030204"/>
+            </a:endParaRPr>
           </a:p>
         </p:txBody>
       </p:sp>
@@ -12028,10 +12742,16 @@
                 <a:solidFill>
                   <a:srgbClr val="4B5A5E"/>
                 </a:solidFill>
-                <a:latin typeface="Calibri"/>
+                <a:latin typeface="Calibri" panose="020F0502020204030204"/>
               </a:rPr>
               <a:t>19</a:t>
             </a:r>
+            <a:endParaRPr sz="1000" b="0" i="0">
+              <a:solidFill>
+                <a:srgbClr val="4B5A5E"/>
+              </a:solidFill>
+              <a:latin typeface="Calibri" panose="020F0502020204030204"/>
+            </a:endParaRPr>
           </a:p>
         </p:txBody>
       </p:sp>
@@ -12063,10 +12783,16 @@
                 <a:solidFill>
                   <a:srgbClr val="4B5A5E"/>
                 </a:solidFill>
-                <a:latin typeface="Calibri"/>
+                <a:latin typeface="Calibri" panose="020F0502020204030204"/>
               </a:rPr>
               <a:t>KopaAlert solves the core problem, but I have deliberately left room for the following future work:</a:t>
             </a:r>
+            <a:endParaRPr sz="1450" b="0" i="0">
+              <a:solidFill>
+                <a:srgbClr val="4B5A5E"/>
+              </a:solidFill>
+              <a:latin typeface="Calibri" panose="020F0502020204030204"/>
+            </a:endParaRPr>
           </a:p>
         </p:txBody>
       </p:sp>
@@ -12105,10 +12831,16 @@
                 <a:solidFill>
                   <a:srgbClr val="121D21"/>
                 </a:solidFill>
-                <a:latin typeface="Calibri"/>
+                <a:latin typeface="Calibri" panose="020F0502020204030204"/>
               </a:rPr>
               <a:t>•  M-Pesa STK Push integration, so a payment is detected and recorded automatically instead of being entered manually.</a:t>
             </a:r>
+            <a:endParaRPr sz="1550">
+              <a:solidFill>
+                <a:srgbClr val="121D21"/>
+              </a:solidFill>
+              <a:latin typeface="Calibri" panose="020F0502020204030204"/>
+            </a:endParaRPr>
           </a:p>
           <a:p>
             <a:pPr>
@@ -12124,10 +12856,16 @@
                 <a:solidFill>
                   <a:srgbClr val="121D21"/>
                 </a:solidFill>
-                <a:latin typeface="Calibri"/>
+                <a:latin typeface="Calibri" panose="020F0502020204030204"/>
               </a:rPr>
               <a:t>•  WhatsApp reminders alongside SMS and email, for customers who prefer it.</a:t>
             </a:r>
+            <a:endParaRPr sz="1550">
+              <a:solidFill>
+                <a:srgbClr val="121D21"/>
+              </a:solidFill>
+              <a:latin typeface="Calibri" panose="020F0502020204030204"/>
+            </a:endParaRPr>
           </a:p>
           <a:p>
             <a:pPr>
@@ -12143,10 +12881,16 @@
                 <a:solidFill>
                   <a:srgbClr val="121D21"/>
                 </a:solidFill>
-                <a:latin typeface="Calibri"/>
+                <a:latin typeface="Calibri" panose="020F0502020204030204"/>
               </a:rPr>
               <a:t>•  An offline-capable mobile app that syncs once network connectivity returns — directly addressing the network challenges I faced myself while building this system.</a:t>
             </a:r>
+            <a:endParaRPr sz="1550">
+              <a:solidFill>
+                <a:srgbClr val="121D21"/>
+              </a:solidFill>
+              <a:latin typeface="Calibri" panose="020F0502020204030204"/>
+            </a:endParaRPr>
           </a:p>
           <a:p>
             <a:pPr>
@@ -12162,10 +12906,16 @@
                 <a:solidFill>
                   <a:srgbClr val="121D21"/>
                 </a:solidFill>
-                <a:latin typeface="Calibri"/>
+                <a:latin typeface="Calibri" panose="020F0502020204030204"/>
               </a:rPr>
               <a:t>•  AI-assisted credit-risk scoring, predicting which customers are likely to default before they do.</a:t>
             </a:r>
+            <a:endParaRPr sz="1550">
+              <a:solidFill>
+                <a:srgbClr val="121D21"/>
+              </a:solidFill>
+              <a:latin typeface="Calibri" panose="020F0502020204030204"/>
+            </a:endParaRPr>
           </a:p>
           <a:p>
             <a:pPr>
@@ -12181,10 +12931,16 @@
                 <a:solidFill>
                   <a:srgbClr val="121D21"/>
                 </a:solidFill>
-                <a:latin typeface="Calibri"/>
+                <a:latin typeface="Calibri" panose="020F0502020204030204"/>
               </a:rPr>
               <a:t>•  Voice-call reminders for customers without reliable access to SMS or a smartphone.</a:t>
             </a:r>
+            <a:endParaRPr sz="1550">
+              <a:solidFill>
+                <a:srgbClr val="121D21"/>
+              </a:solidFill>
+              <a:latin typeface="Calibri" panose="020F0502020204030204"/>
+            </a:endParaRPr>
           </a:p>
           <a:p>
             <a:pPr>
@@ -12200,10 +12956,16 @@
                 <a:solidFill>
                   <a:srgbClr val="121D21"/>
                 </a:solidFill>
-                <a:latin typeface="Calibri"/>
+                <a:latin typeface="Calibri" panose="020F0502020204030204"/>
               </a:rPr>
               <a:t>•  Multi-currency and multi-country support, to extend KopaAlert beyond Kenya.</a:t>
             </a:r>
+            <a:endParaRPr sz="1550">
+              <a:solidFill>
+                <a:srgbClr val="121D21"/>
+              </a:solidFill>
+              <a:latin typeface="Calibri" panose="020F0502020204030204"/>
+            </a:endParaRPr>
           </a:p>
           <a:p>
             <a:pPr>
@@ -12219,10 +12981,16 @@
                 <a:solidFill>
                   <a:srgbClr val="121D21"/>
                 </a:solidFill>
-                <a:latin typeface="Calibri"/>
+                <a:latin typeface="Calibri" panose="020F0502020204030204"/>
               </a:rPr>
               <a:t>•  Inventory and point-of-sale integration, connecting what was sold to what is owed.</a:t>
             </a:r>
+            <a:endParaRPr sz="1550">
+              <a:solidFill>
+                <a:srgbClr val="121D21"/>
+              </a:solidFill>
+              <a:latin typeface="Calibri" panose="020F0502020204030204"/>
+            </a:endParaRPr>
           </a:p>
         </p:txBody>
       </p:sp>
@@ -12235,7 +13003,7 @@
 </file>
 
 <file path=ppt/slides/slide2.xml><?xml version="1.0" encoding="utf-8"?>
-<p:sld xmlns:a="http://schemas.openxmlformats.org/drawingml/2006/main" xmlns:p="http://schemas.openxmlformats.org/presentationml/2006/main" xmlns:r="http://schemas.openxmlformats.org/officeDocument/2006/relationships">
+<p:sld xmlns:a="http://schemas.openxmlformats.org/drawingml/2006/main" xmlns:r="http://schemas.openxmlformats.org/officeDocument/2006/relationships" xmlns:p="http://schemas.openxmlformats.org/presentationml/2006/main">
   <p:cSld>
     <p:bg>
       <p:bgPr>
@@ -12324,10 +13092,16 @@
                 <a:solidFill>
                   <a:srgbClr val="E69A1F"/>
                 </a:solidFill>
-                <a:latin typeface="Calibri"/>
+                <a:latin typeface="Calibri" panose="020F0502020204030204"/>
               </a:rPr>
               <a:t>ROADMAP</a:t>
             </a:r>
+            <a:endParaRPr sz="1300" b="1" i="0">
+              <a:solidFill>
+                <a:srgbClr val="E69A1F"/>
+              </a:solidFill>
+              <a:latin typeface="Calibri" panose="020F0502020204030204"/>
+            </a:endParaRPr>
           </a:p>
         </p:txBody>
       </p:sp>
@@ -12359,10 +13133,16 @@
                 <a:solidFill>
                   <a:srgbClr val="121D21"/>
                 </a:solidFill>
-                <a:latin typeface="Calibri"/>
+                <a:latin typeface="Calibri" panose="020F0502020204030204"/>
               </a:rPr>
               <a:t>Table of Contents</a:t>
             </a:r>
+            <a:endParaRPr sz="3000" b="1" i="0">
+              <a:solidFill>
+                <a:srgbClr val="121D21"/>
+              </a:solidFill>
+              <a:latin typeface="Calibri" panose="020F0502020204030204"/>
+            </a:endParaRPr>
           </a:p>
         </p:txBody>
       </p:sp>
@@ -12438,10 +13218,16 @@
                 <a:solidFill>
                   <a:srgbClr val="4B5A5E"/>
                 </a:solidFill>
-                <a:latin typeface="Calibri"/>
+                <a:latin typeface="Calibri" panose="020F0502020204030204"/>
               </a:rPr>
               <a:t>KopaAlert — Stanley Murangiri</a:t>
             </a:r>
+            <a:endParaRPr sz="1000" b="0" i="0">
+              <a:solidFill>
+                <a:srgbClr val="4B5A5E"/>
+              </a:solidFill>
+              <a:latin typeface="Calibri" panose="020F0502020204030204"/>
+            </a:endParaRPr>
           </a:p>
         </p:txBody>
       </p:sp>
@@ -12473,10 +13259,16 @@
                 <a:solidFill>
                   <a:srgbClr val="4B5A5E"/>
                 </a:solidFill>
-                <a:latin typeface="Calibri"/>
+                <a:latin typeface="Calibri" panose="020F0502020204030204"/>
               </a:rPr>
               <a:t>2</a:t>
             </a:r>
+            <a:endParaRPr sz="1000" b="0" i="0">
+              <a:solidFill>
+                <a:srgbClr val="4B5A5E"/>
+              </a:solidFill>
+              <a:latin typeface="Calibri" panose="020F0502020204030204"/>
+            </a:endParaRPr>
           </a:p>
         </p:txBody>
       </p:sp>
@@ -12515,10 +13307,16 @@
                 <a:solidFill>
                   <a:srgbClr val="121D21"/>
                 </a:solidFill>
-                <a:latin typeface="Calibri"/>
+                <a:latin typeface="Calibri" panose="020F0502020204030204"/>
               </a:rPr>
               <a:t>•  1. Abstract</a:t>
             </a:r>
+            <a:endParaRPr sz="1700">
+              <a:solidFill>
+                <a:srgbClr val="121D21"/>
+              </a:solidFill>
+              <a:latin typeface="Calibri" panose="020F0502020204030204"/>
+            </a:endParaRPr>
           </a:p>
           <a:p>
             <a:pPr>
@@ -12534,10 +13332,16 @@
                 <a:solidFill>
                   <a:srgbClr val="121D21"/>
                 </a:solidFill>
-                <a:latin typeface="Calibri"/>
+                <a:latin typeface="Calibri" panose="020F0502020204030204"/>
               </a:rPr>
               <a:t>•  2. Introduction / Background</a:t>
             </a:r>
+            <a:endParaRPr sz="1700">
+              <a:solidFill>
+                <a:srgbClr val="121D21"/>
+              </a:solidFill>
+              <a:latin typeface="Calibri" panose="020F0502020204030204"/>
+            </a:endParaRPr>
           </a:p>
           <a:p>
             <a:pPr>
@@ -12553,10 +13357,16 @@
                 <a:solidFill>
                   <a:srgbClr val="121D21"/>
                 </a:solidFill>
-                <a:latin typeface="Calibri"/>
+                <a:latin typeface="Calibri" panose="020F0502020204030204"/>
               </a:rPr>
               <a:t>•  3. Problem Statement — The Gap I Identified</a:t>
             </a:r>
+            <a:endParaRPr sz="1700">
+              <a:solidFill>
+                <a:srgbClr val="121D21"/>
+              </a:solidFill>
+              <a:latin typeface="Calibri" panose="020F0502020204030204"/>
+            </a:endParaRPr>
           </a:p>
           <a:p>
             <a:pPr>
@@ -12572,10 +13382,16 @@
                 <a:solidFill>
                   <a:srgbClr val="121D21"/>
                 </a:solidFill>
-                <a:latin typeface="Calibri"/>
+                <a:latin typeface="Calibri" panose="020F0502020204030204"/>
               </a:rPr>
               <a:t>•  4. Objectives</a:t>
             </a:r>
+            <a:endParaRPr sz="1700">
+              <a:solidFill>
+                <a:srgbClr val="121D21"/>
+              </a:solidFill>
+              <a:latin typeface="Calibri" panose="020F0502020204030204"/>
+            </a:endParaRPr>
           </a:p>
           <a:p>
             <a:pPr>
@@ -12591,10 +13407,16 @@
                 <a:solidFill>
                   <a:srgbClr val="121D21"/>
                 </a:solidFill>
-                <a:latin typeface="Calibri"/>
+                <a:latin typeface="Calibri" panose="020F0502020204030204"/>
               </a:rPr>
               <a:t>•  5. Vision</a:t>
             </a:r>
+            <a:endParaRPr sz="1700">
+              <a:solidFill>
+                <a:srgbClr val="121D21"/>
+              </a:solidFill>
+              <a:latin typeface="Calibri" panose="020F0502020204030204"/>
+            </a:endParaRPr>
           </a:p>
           <a:p>
             <a:pPr>
@@ -12610,10 +13432,16 @@
                 <a:solidFill>
                   <a:srgbClr val="121D21"/>
                 </a:solidFill>
-                <a:latin typeface="Calibri"/>
+                <a:latin typeface="Calibri" panose="020F0502020204030204"/>
               </a:rPr>
               <a:t>•  6. Scope of the Project</a:t>
             </a:r>
+            <a:endParaRPr sz="1700">
+              <a:solidFill>
+                <a:srgbClr val="121D21"/>
+              </a:solidFill>
+              <a:latin typeface="Calibri" panose="020F0502020204030204"/>
+            </a:endParaRPr>
           </a:p>
           <a:p>
             <a:pPr>
@@ -12629,10 +13457,16 @@
                 <a:solidFill>
                   <a:srgbClr val="121D21"/>
                 </a:solidFill>
-                <a:latin typeface="Calibri"/>
+                <a:latin typeface="Calibri" panose="020F0502020204030204"/>
               </a:rPr>
               <a:t>•  7. Significance of the Study</a:t>
             </a:r>
+            <a:endParaRPr sz="1700">
+              <a:solidFill>
+                <a:srgbClr val="121D21"/>
+              </a:solidFill>
+              <a:latin typeface="Calibri" panose="020F0502020204030204"/>
+            </a:endParaRPr>
           </a:p>
           <a:p>
             <a:pPr>
@@ -12648,10 +13482,16 @@
                 <a:solidFill>
                   <a:srgbClr val="121D21"/>
                 </a:solidFill>
-                <a:latin typeface="Calibri"/>
+                <a:latin typeface="Calibri" panose="020F0502020204030204"/>
               </a:rPr>
               <a:t>•  8. Technology Stack</a:t>
             </a:r>
+            <a:endParaRPr sz="1700">
+              <a:solidFill>
+                <a:srgbClr val="121D21"/>
+              </a:solidFill>
+              <a:latin typeface="Calibri" panose="020F0502020204030204"/>
+            </a:endParaRPr>
           </a:p>
           <a:p>
             <a:pPr>
@@ -12667,10 +13507,16 @@
                 <a:solidFill>
                   <a:srgbClr val="121D21"/>
                 </a:solidFill>
-                <a:latin typeface="Calibri"/>
+                <a:latin typeface="Calibri" panose="020F0502020204030204"/>
               </a:rPr>
               <a:t>•  9. System Architecture — Developer View</a:t>
             </a:r>
+            <a:endParaRPr sz="1700">
+              <a:solidFill>
+                <a:srgbClr val="121D21"/>
+              </a:solidFill>
+              <a:latin typeface="Calibri" panose="020F0502020204030204"/>
+            </a:endParaRPr>
           </a:p>
           <a:p>
             <a:pPr>
@@ -12686,10 +13532,16 @@
                 <a:solidFill>
                   <a:srgbClr val="121D21"/>
                 </a:solidFill>
-                <a:latin typeface="Calibri"/>
+                <a:latin typeface="Calibri" panose="020F0502020204030204"/>
               </a:rPr>
               <a:t>•  10. System Architecture — User View</a:t>
             </a:r>
+            <a:endParaRPr sz="1700">
+              <a:solidFill>
+                <a:srgbClr val="121D21"/>
+              </a:solidFill>
+              <a:latin typeface="Calibri" panose="020F0502020204030204"/>
+            </a:endParaRPr>
           </a:p>
         </p:txBody>
       </p:sp>
@@ -12728,10 +13580,16 @@
                 <a:solidFill>
                   <a:srgbClr val="121D21"/>
                 </a:solidFill>
-                <a:latin typeface="Calibri"/>
+                <a:latin typeface="Calibri" panose="020F0502020204030204"/>
               </a:rPr>
               <a:t>•  11. Core Modules and Features</a:t>
             </a:r>
+            <a:endParaRPr sz="1700">
+              <a:solidFill>
+                <a:srgbClr val="121D21"/>
+              </a:solidFill>
+              <a:latin typeface="Calibri" panose="020F0502020204030204"/>
+            </a:endParaRPr>
           </a:p>
           <a:p>
             <a:pPr>
@@ -12747,10 +13605,16 @@
                 <a:solidFill>
                   <a:srgbClr val="121D21"/>
                 </a:solidFill>
-                <a:latin typeface="Calibri"/>
+                <a:latin typeface="Calibri" panose="020F0502020204030204"/>
               </a:rPr>
               <a:t>•  12. Database Design Overview</a:t>
             </a:r>
+            <a:endParaRPr sz="1700">
+              <a:solidFill>
+                <a:srgbClr val="121D21"/>
+              </a:solidFill>
+              <a:latin typeface="Calibri" panose="020F0502020204030204"/>
+            </a:endParaRPr>
           </a:p>
           <a:p>
             <a:pPr>
@@ -12766,10 +13630,16 @@
                 <a:solidFill>
                   <a:srgbClr val="121D21"/>
                 </a:solidFill>
-                <a:latin typeface="Calibri"/>
+                <a:latin typeface="Calibri" panose="020F0502020204030204"/>
               </a:rPr>
               <a:t>•  13. Methodology</a:t>
             </a:r>
+            <a:endParaRPr sz="1700">
+              <a:solidFill>
+                <a:srgbClr val="121D21"/>
+              </a:solidFill>
+              <a:latin typeface="Calibri" panose="020F0502020204030204"/>
+            </a:endParaRPr>
           </a:p>
           <a:p>
             <a:pPr>
@@ -12785,10 +13655,16 @@
                 <a:solidFill>
                   <a:srgbClr val="121D21"/>
                 </a:solidFill>
-                <a:latin typeface="Calibri"/>
+                <a:latin typeface="Calibri" panose="020F0502020204030204"/>
               </a:rPr>
               <a:t>•  14. Challenges Encountered</a:t>
             </a:r>
+            <a:endParaRPr sz="1700">
+              <a:solidFill>
+                <a:srgbClr val="121D21"/>
+              </a:solidFill>
+              <a:latin typeface="Calibri" panose="020F0502020204030204"/>
+            </a:endParaRPr>
           </a:p>
           <a:p>
             <a:pPr>
@@ -12804,10 +13680,16 @@
                 <a:solidFill>
                   <a:srgbClr val="121D21"/>
                 </a:solidFill>
-                <a:latin typeface="Calibri"/>
+                <a:latin typeface="Calibri" panose="020F0502020204030204"/>
               </a:rPr>
               <a:t>•  15. Testing and Quality Assurance</a:t>
             </a:r>
+            <a:endParaRPr sz="1700">
+              <a:solidFill>
+                <a:srgbClr val="121D21"/>
+              </a:solidFill>
+              <a:latin typeface="Calibri" panose="020F0502020204030204"/>
+            </a:endParaRPr>
           </a:p>
           <a:p>
             <a:pPr>
@@ -12823,10 +13705,16 @@
                 <a:solidFill>
                   <a:srgbClr val="121D21"/>
                 </a:solidFill>
-                <a:latin typeface="Calibri"/>
+                <a:latin typeface="Calibri" panose="020F0502020204030204"/>
               </a:rPr>
               <a:t>•  16. Results and Outcomes</a:t>
             </a:r>
+            <a:endParaRPr sz="1700">
+              <a:solidFill>
+                <a:srgbClr val="121D21"/>
+              </a:solidFill>
+              <a:latin typeface="Calibri" panose="020F0502020204030204"/>
+            </a:endParaRPr>
           </a:p>
           <a:p>
             <a:pPr>
@@ -12842,10 +13730,16 @@
                 <a:solidFill>
                   <a:srgbClr val="121D21"/>
                 </a:solidFill>
-                <a:latin typeface="Calibri"/>
+                <a:latin typeface="Calibri" panose="020F0502020204030204"/>
               </a:rPr>
               <a:t>•  17. Future Enhancements</a:t>
             </a:r>
+            <a:endParaRPr sz="1700">
+              <a:solidFill>
+                <a:srgbClr val="121D21"/>
+              </a:solidFill>
+              <a:latin typeface="Calibri" panose="020F0502020204030204"/>
+            </a:endParaRPr>
           </a:p>
           <a:p>
             <a:pPr>
@@ -12861,10 +13755,16 @@
                 <a:solidFill>
                   <a:srgbClr val="121D21"/>
                 </a:solidFill>
-                <a:latin typeface="Calibri"/>
+                <a:latin typeface="Calibri" panose="020F0502020204030204"/>
               </a:rPr>
               <a:t>•  18. Conclusion</a:t>
             </a:r>
+            <a:endParaRPr sz="1700">
+              <a:solidFill>
+                <a:srgbClr val="121D21"/>
+              </a:solidFill>
+              <a:latin typeface="Calibri" panose="020F0502020204030204"/>
+            </a:endParaRPr>
           </a:p>
           <a:p>
             <a:pPr>
@@ -12880,10 +13780,16 @@
                 <a:solidFill>
                   <a:srgbClr val="121D21"/>
                 </a:solidFill>
-                <a:latin typeface="Calibri"/>
+                <a:latin typeface="Calibri" panose="020F0502020204030204"/>
               </a:rPr>
               <a:t>•  19. References</a:t>
             </a:r>
+            <a:endParaRPr sz="1700">
+              <a:solidFill>
+                <a:srgbClr val="121D21"/>
+              </a:solidFill>
+              <a:latin typeface="Calibri" panose="020F0502020204030204"/>
+            </a:endParaRPr>
           </a:p>
         </p:txBody>
       </p:sp>
@@ -12896,7 +13802,7 @@
 </file>
 
 <file path=ppt/slides/slide20.xml><?xml version="1.0" encoding="utf-8"?>
-<p:sld xmlns:a="http://schemas.openxmlformats.org/drawingml/2006/main" xmlns:p="http://schemas.openxmlformats.org/presentationml/2006/main" xmlns:r="http://schemas.openxmlformats.org/officeDocument/2006/relationships">
+<p:sld xmlns:a="http://schemas.openxmlformats.org/drawingml/2006/main" xmlns:r="http://schemas.openxmlformats.org/officeDocument/2006/relationships" xmlns:p="http://schemas.openxmlformats.org/presentationml/2006/main">
   <p:cSld>
     <p:bg>
       <p:bgPr>
@@ -12985,10 +13891,16 @@
                 <a:solidFill>
                   <a:srgbClr val="E69A1F"/>
                 </a:solidFill>
-                <a:latin typeface="Calibri"/>
+                <a:latin typeface="Calibri" panose="020F0502020204030204"/>
               </a:rPr>
               <a:t>CHAPTER FIVE</a:t>
             </a:r>
+            <a:endParaRPr sz="1300" b="1" i="0">
+              <a:solidFill>
+                <a:srgbClr val="E69A1F"/>
+              </a:solidFill>
+              <a:latin typeface="Calibri" panose="020F0502020204030204"/>
+            </a:endParaRPr>
           </a:p>
         </p:txBody>
       </p:sp>
@@ -13020,10 +13932,16 @@
                 <a:solidFill>
                   <a:srgbClr val="121D21"/>
                 </a:solidFill>
-                <a:latin typeface="Calibri"/>
+                <a:latin typeface="Calibri" panose="020F0502020204030204"/>
               </a:rPr>
               <a:t>Conclusion</a:t>
             </a:r>
+            <a:endParaRPr sz="3000" b="1" i="0">
+              <a:solidFill>
+                <a:srgbClr val="121D21"/>
+              </a:solidFill>
+              <a:latin typeface="Calibri" panose="020F0502020204030204"/>
+            </a:endParaRPr>
           </a:p>
         </p:txBody>
       </p:sp>
@@ -13099,10 +14017,16 @@
                 <a:solidFill>
                   <a:srgbClr val="4B5A5E"/>
                 </a:solidFill>
-                <a:latin typeface="Calibri"/>
+                <a:latin typeface="Calibri" panose="020F0502020204030204"/>
               </a:rPr>
               <a:t>KopaAlert — Stanley Murangiri</a:t>
             </a:r>
+            <a:endParaRPr sz="1000" b="0" i="0">
+              <a:solidFill>
+                <a:srgbClr val="4B5A5E"/>
+              </a:solidFill>
+              <a:latin typeface="Calibri" panose="020F0502020204030204"/>
+            </a:endParaRPr>
           </a:p>
         </p:txBody>
       </p:sp>
@@ -13134,10 +14058,16 @@
                 <a:solidFill>
                   <a:srgbClr val="4B5A5E"/>
                 </a:solidFill>
-                <a:latin typeface="Calibri"/>
+                <a:latin typeface="Calibri" panose="020F0502020204030204"/>
               </a:rPr>
               <a:t>20</a:t>
             </a:r>
+            <a:endParaRPr sz="1000" b="0" i="0">
+              <a:solidFill>
+                <a:srgbClr val="4B5A5E"/>
+              </a:solidFill>
+              <a:latin typeface="Calibri" panose="020F0502020204030204"/>
+            </a:endParaRPr>
           </a:p>
         </p:txBody>
       </p:sp>
@@ -13264,10 +14194,16 @@
                 <a:solidFill>
                   <a:srgbClr val="121D21"/>
                 </a:solidFill>
-                <a:latin typeface="Calibri"/>
+                <a:latin typeface="Calibri" panose="020F0502020204030204"/>
               </a:rPr>
               <a:t>KopaAlert started from a problem I did not have to imagine — I watched it happen in a real business, week after week, as debts went unrecorded and customers went unreminded. Building a system to close that gap took me through every stage of real software development: identifying a genuine problem, designing a data model and architecture around it, writing and testing code under real constraints, and confronting the practical obstacles — hardware, power, network, time, and money — that every developer eventually meets outside the classroom.</a:t>
             </a:r>
+            <a:endParaRPr sz="1550">
+              <a:solidFill>
+                <a:srgbClr val="121D21"/>
+              </a:solidFill>
+              <a:latin typeface="Calibri" panose="020F0502020204030204"/>
+            </a:endParaRPr>
           </a:p>
           <a:p>
             <a:pPr>
@@ -13283,10 +14219,16 @@
                 <a:solidFill>
                   <a:srgbClr val="121D21"/>
                 </a:solidFill>
-                <a:latin typeface="Calibri"/>
+                <a:latin typeface="Calibri" panose="020F0502020204030204"/>
               </a:rPr>
               <a:t>The result is a system that does what the exercise book never could: it remembers, every time, for every customer, without being asked. I consider that the central achievement of this project, and the foundation I intend to keep building on.</a:t>
             </a:r>
+            <a:endParaRPr sz="1550">
+              <a:solidFill>
+                <a:srgbClr val="121D21"/>
+              </a:solidFill>
+              <a:latin typeface="Calibri" panose="020F0502020204030204"/>
+            </a:endParaRPr>
           </a:p>
         </p:txBody>
       </p:sp>
@@ -13299,7 +14241,244 @@
 </file>
 
 <file path=ppt/slides/slide21.xml><?xml version="1.0" encoding="utf-8"?>
-<p:sld xmlns:a="http://schemas.openxmlformats.org/drawingml/2006/main" xmlns:p="http://schemas.openxmlformats.org/presentationml/2006/main" xmlns:r="http://schemas.openxmlformats.org/officeDocument/2006/relationships">
+<p:sld xmlns:a="http://schemas.openxmlformats.org/drawingml/2006/main" xmlns:r="http://schemas.openxmlformats.org/officeDocument/2006/relationships" xmlns:p="http://schemas.openxmlformats.org/presentationml/2006/main">
+  <p:cSld>
+    <p:bg>
+      <p:bgPr>
+        <a:solidFill>
+          <a:srgbClr val="121D21"/>
+        </a:solidFill>
+        <a:effectLst/>
+      </p:bgPr>
+    </p:bg>
+    <p:spTree>
+      <p:nvGrpSpPr>
+        <p:cNvPr id="1" name=""/>
+        <p:cNvGrpSpPr/>
+        <p:nvPr/>
+      </p:nvGrpSpPr>
+      <p:grpSpPr/>
+      <p:sp>
+        <p:nvSpPr>
+          <p:cNvPr id="2" name="Rectangle 1"/>
+          <p:cNvSpPr/>
+          <p:nvPr/>
+        </p:nvSpPr>
+        <p:spPr>
+          <a:xfrm>
+            <a:off x="0" y="0"/>
+            <a:ext cx="12191695" cy="164592"/>
+          </a:xfrm>
+          <a:prstGeom prst="rect">
+            <a:avLst/>
+          </a:prstGeom>
+          <a:solidFill>
+            <a:srgbClr val="0F766E"/>
+          </a:solidFill>
+          <a:ln>
+            <a:noFill/>
+          </a:ln>
+          <a:effectLst/>
+        </p:spPr>
+        <p:style>
+          <a:lnRef idx="1">
+            <a:schemeClr val="accent1"/>
+          </a:lnRef>
+          <a:fillRef idx="3">
+            <a:schemeClr val="accent1"/>
+          </a:fillRef>
+          <a:effectRef idx="2">
+            <a:schemeClr val="accent1"/>
+          </a:effectRef>
+          <a:fontRef idx="minor">
+            <a:schemeClr val="lt1"/>
+          </a:fontRef>
+        </p:style>
+        <p:txBody>
+          <a:bodyPr rtlCol="0" anchor="ctr"/>
+          <a:lstStyle/>
+          <a:p>
+            <a:pPr algn="ctr"/>
+          </a:p>
+        </p:txBody>
+      </p:sp>
+      <p:sp>
+        <p:nvSpPr>
+          <p:cNvPr id="3" name="Rectangle 2"/>
+          <p:cNvSpPr/>
+          <p:nvPr/>
+        </p:nvSpPr>
+        <p:spPr>
+          <a:xfrm>
+            <a:off x="0" y="6693408"/>
+            <a:ext cx="12191695" cy="164592"/>
+          </a:xfrm>
+          <a:prstGeom prst="rect">
+            <a:avLst/>
+          </a:prstGeom>
+          <a:solidFill>
+            <a:srgbClr val="E69A1F"/>
+          </a:solidFill>
+          <a:ln>
+            <a:noFill/>
+          </a:ln>
+          <a:effectLst/>
+        </p:spPr>
+        <p:style>
+          <a:lnRef idx="1">
+            <a:schemeClr val="accent1"/>
+          </a:lnRef>
+          <a:fillRef idx="3">
+            <a:schemeClr val="accent1"/>
+          </a:fillRef>
+          <a:effectRef idx="2">
+            <a:schemeClr val="accent1"/>
+          </a:effectRef>
+          <a:fontRef idx="minor">
+            <a:schemeClr val="lt1"/>
+          </a:fontRef>
+        </p:style>
+        <p:txBody>
+          <a:bodyPr rtlCol="0" anchor="ctr"/>
+          <a:lstStyle/>
+          <a:p>
+            <a:pPr algn="ctr"/>
+          </a:p>
+        </p:txBody>
+      </p:sp>
+      <p:sp>
+        <p:nvSpPr>
+          <p:cNvPr id="4" name="TextBox 3"/>
+          <p:cNvSpPr txBox="1"/>
+          <p:nvPr/>
+        </p:nvSpPr>
+        <p:spPr>
+          <a:xfrm>
+            <a:off x="822960" y="2651760"/>
+            <a:ext cx="10515600" cy="1097280"/>
+          </a:xfrm>
+          <a:prstGeom prst="rect">
+            <a:avLst/>
+          </a:prstGeom>
+          <a:noFill/>
+        </p:spPr>
+        <p:txBody>
+          <a:bodyPr wrap="square">
+            <a:spAutoFit/>
+          </a:bodyPr>
+          <a:lstStyle/>
+          <a:p>
+            <a:pPr algn="l"/>
+            <a:r>
+              <a:rPr sz="5400" b="1" i="0">
+                <a:solidFill>
+                  <a:srgbClr val="FFFFFF"/>
+                </a:solidFill>
+                <a:latin typeface="Calibri" panose="020F0502020204030204"/>
+              </a:rPr>
+              <a:t>Thank You</a:t>
+            </a:r>
+            <a:endParaRPr sz="5400" b="1" i="0">
+              <a:solidFill>
+                <a:srgbClr val="FFFFFF"/>
+              </a:solidFill>
+              <a:latin typeface="Calibri" panose="020F0502020204030204"/>
+            </a:endParaRPr>
+          </a:p>
+        </p:txBody>
+      </p:sp>
+      <p:sp>
+        <p:nvSpPr>
+          <p:cNvPr id="5" name="TextBox 4"/>
+          <p:cNvSpPr txBox="1"/>
+          <p:nvPr/>
+        </p:nvSpPr>
+        <p:spPr>
+          <a:xfrm>
+            <a:off x="822960" y="3703320"/>
+            <a:ext cx="10515600" cy="548640"/>
+          </a:xfrm>
+          <a:prstGeom prst="rect">
+            <a:avLst/>
+          </a:prstGeom>
+          <a:noFill/>
+        </p:spPr>
+        <p:txBody>
+          <a:bodyPr wrap="square">
+            <a:spAutoFit/>
+          </a:bodyPr>
+          <a:lstStyle/>
+          <a:p>
+            <a:pPr algn="l"/>
+            <a:r>
+              <a:rPr sz="2000" b="0" i="0">
+                <a:solidFill>
+                  <a:srgbClr val="CFE3E0"/>
+                </a:solidFill>
+                <a:latin typeface="Calibri" panose="020F0502020204030204"/>
+              </a:rPr>
+              <a:t>Questions and Discussion</a:t>
+            </a:r>
+            <a:endParaRPr sz="2000" b="0" i="0">
+              <a:solidFill>
+                <a:srgbClr val="CFE3E0"/>
+              </a:solidFill>
+              <a:latin typeface="Calibri" panose="020F0502020204030204"/>
+            </a:endParaRPr>
+          </a:p>
+        </p:txBody>
+      </p:sp>
+      <p:sp>
+        <p:nvSpPr>
+          <p:cNvPr id="6" name="TextBox 5"/>
+          <p:cNvSpPr txBox="1"/>
+          <p:nvPr/>
+        </p:nvSpPr>
+        <p:spPr>
+          <a:xfrm>
+            <a:off x="822960" y="4663440"/>
+            <a:ext cx="10515600" cy="365760"/>
+          </a:xfrm>
+          <a:prstGeom prst="rect">
+            <a:avLst/>
+          </a:prstGeom>
+          <a:noFill/>
+        </p:spPr>
+        <p:txBody>
+          <a:bodyPr wrap="square">
+            <a:spAutoFit/>
+          </a:bodyPr>
+          <a:lstStyle/>
+          <a:p>
+            <a:pPr algn="l"/>
+            <a:r>
+              <a:rPr sz="1500" b="1" i="0">
+                <a:solidFill>
+                  <a:srgbClr val="E69A1F"/>
+                </a:solidFill>
+                <a:latin typeface="Calibri" panose="020F0502020204030204"/>
+              </a:rPr>
+              <a:t>Stanley Murangiri  —  Mama Ngina University College</a:t>
+            </a:r>
+            <a:endParaRPr sz="1500" b="1" i="0">
+              <a:solidFill>
+                <a:srgbClr val="E69A1F"/>
+              </a:solidFill>
+              <a:latin typeface="Calibri" panose="020F0502020204030204"/>
+            </a:endParaRPr>
+          </a:p>
+        </p:txBody>
+      </p:sp>
+    </p:spTree>
+  </p:cSld>
+  <p:clrMapOvr>
+    <a:masterClrMapping/>
+  </p:clrMapOvr>
+</p:sld>
+</file>
+
+<file path=ppt/slides/slide3.xml><?xml version="1.0" encoding="utf-8"?>
+<p:sld xmlns:a="http://schemas.openxmlformats.org/drawingml/2006/main" xmlns:r="http://schemas.openxmlformats.org/officeDocument/2006/relationships" xmlns:p="http://schemas.openxmlformats.org/presentationml/2006/main">
   <p:cSld>
     <p:bg>
       <p:bgPr>
@@ -13388,10 +14567,16 @@
                 <a:solidFill>
                   <a:srgbClr val="E69A1F"/>
                 </a:solidFill>
-                <a:latin typeface="Calibri"/>
-              </a:rPr>
-              <a:t>BACK MATTER</a:t>
-            </a:r>
+                <a:latin typeface="Calibri" panose="020F0502020204030204"/>
+              </a:rPr>
+              <a:t>OVERVIEW</a:t>
+            </a:r>
+            <a:endParaRPr sz="1300" b="1" i="0">
+              <a:solidFill>
+                <a:srgbClr val="E69A1F"/>
+              </a:solidFill>
+              <a:latin typeface="Calibri" panose="020F0502020204030204"/>
+            </a:endParaRPr>
           </a:p>
         </p:txBody>
       </p:sp>
@@ -13423,10 +14608,16 @@
                 <a:solidFill>
                   <a:srgbClr val="121D21"/>
                 </a:solidFill>
-                <a:latin typeface="Calibri"/>
-              </a:rPr>
-              <a:t>References</a:t>
-            </a:r>
+                <a:latin typeface="Calibri" panose="020F0502020204030204"/>
+              </a:rPr>
+              <a:t>Abstract</a:t>
+            </a:r>
+            <a:endParaRPr sz="3000" b="1" i="0">
+              <a:solidFill>
+                <a:srgbClr val="121D21"/>
+              </a:solidFill>
+              <a:latin typeface="Calibri" panose="020F0502020204030204"/>
+            </a:endParaRPr>
           </a:p>
         </p:txBody>
       </p:sp>
@@ -13502,10 +14693,16 @@
                 <a:solidFill>
                   <a:srgbClr val="4B5A5E"/>
                 </a:solidFill>
-                <a:latin typeface="Calibri"/>
+                <a:latin typeface="Calibri" panose="020F0502020204030204"/>
               </a:rPr>
               <a:t>KopaAlert — Stanley Murangiri</a:t>
             </a:r>
+            <a:endParaRPr sz="1000" b="0" i="0">
+              <a:solidFill>
+                <a:srgbClr val="4B5A5E"/>
+              </a:solidFill>
+              <a:latin typeface="Calibri" panose="020F0502020204030204"/>
+            </a:endParaRPr>
           </a:p>
         </p:txBody>
       </p:sp>
@@ -13537,10 +14734,16 @@
                 <a:solidFill>
                   <a:srgbClr val="4B5A5E"/>
                 </a:solidFill>
-                <a:latin typeface="Calibri"/>
-              </a:rPr>
-              <a:t>21</a:t>
-            </a:r>
+                <a:latin typeface="Calibri" panose="020F0502020204030204"/>
+              </a:rPr>
+              <a:t>3</a:t>
+            </a:r>
+            <a:endParaRPr sz="1000" b="0" i="0">
+              <a:solidFill>
+                <a:srgbClr val="4B5A5E"/>
+              </a:solidFill>
+              <a:latin typeface="Calibri" panose="020F0502020204030204"/>
+            </a:endParaRPr>
           </a:p>
         </p:txBody>
       </p:sp>
@@ -13553,7 +14756,7 @@
         <p:spPr>
           <a:xfrm>
             <a:off x="685800" y="1600200"/>
-            <a:ext cx="10789920" cy="4114800"/>
+            <a:ext cx="10789920" cy="4480560"/>
           </a:xfrm>
           <a:prstGeom prst="rect">
             <a:avLst/>
@@ -13590,14 +14793,58 @@
       </p:sp>
       <p:sp>
         <p:nvSpPr>
-          <p:cNvPr id="9" name="TextBox 8"/>
+          <p:cNvPr id="9" name="Rectangle 8"/>
+          <p:cNvSpPr/>
+          <p:nvPr/>
+        </p:nvSpPr>
+        <p:spPr>
+          <a:xfrm>
+            <a:off x="685800" y="1600200"/>
+            <a:ext cx="73152" cy="4480560"/>
+          </a:xfrm>
+          <a:prstGeom prst="rect">
+            <a:avLst/>
+          </a:prstGeom>
+          <a:solidFill>
+            <a:srgbClr val="0F766E"/>
+          </a:solidFill>
+          <a:ln>
+            <a:noFill/>
+          </a:ln>
+          <a:effectLst/>
+        </p:spPr>
+        <p:style>
+          <a:lnRef idx="1">
+            <a:schemeClr val="accent1"/>
+          </a:lnRef>
+          <a:fillRef idx="3">
+            <a:schemeClr val="accent1"/>
+          </a:fillRef>
+          <a:effectRef idx="2">
+            <a:schemeClr val="accent1"/>
+          </a:effectRef>
+          <a:fontRef idx="minor">
+            <a:schemeClr val="lt1"/>
+          </a:fontRef>
+        </p:style>
+        <p:txBody>
+          <a:bodyPr rtlCol="0" anchor="ctr"/>
+          <a:lstStyle/>
+          <a:p>
+            <a:pPr algn="ctr"/>
+          </a:p>
+        </p:txBody>
+      </p:sp>
+      <p:sp>
+        <p:nvSpPr>
+          <p:cNvPr id="10" name="TextBox 9"/>
           <p:cNvSpPr txBox="1"/>
           <p:nvPr/>
         </p:nvSpPr>
         <p:spPr>
           <a:xfrm>
-            <a:off x="1005840" y="1920240"/>
-            <a:ext cx="10058400" cy="3474720"/>
+            <a:off x="1005840" y="1828800"/>
+            <a:ext cx="10149840" cy="4023360"/>
           </a:xfrm>
           <a:prstGeom prst="rect">
             <a:avLst/>
@@ -13610,26 +14857,79 @@
           </a:bodyPr>
           <a:lstStyle/>
           <a:p>
-            <a:pPr algn="l">
+            <a:pPr>
               <a:lnSpc>
-                <a:spcPct val="130000"/>
+                <a:spcPct val="115000"/>
               </a:lnSpc>
+              <a:spcAft>
+                <a:spcPts val="1200"/>
+              </a:spcAft>
             </a:pPr>
             <a:r>
-              <a:rPr sz="1400" b="0" i="1">
-                <a:solidFill>
-                  <a:srgbClr val="4B5A5E"/>
-                </a:solidFill>
-                <a:latin typeface="Calibri"/>
-              </a:rPr>
-              <a:t>[Add the textbooks, journal articles, official documentation, and websites you cited in your full project report here, formatted in the citation style your institution requires (e.g. APA). Suggested items to include:
-  •  Next.js official documentation
-  •  Supabase official documentation (Postgres, Auth, Row Level Security)
-  •  Africa's Talking API documentation
-  •  Resend API documentation
-  •  Any software engineering / systems analysis and design textbook used in your course
-  •  Any journal articles on SME credit management or fintech in Kenya you reference]</a:t>
-            </a:r>
+              <a:rPr sz="1500">
+                <a:solidFill>
+                  <a:srgbClr val="121D21"/>
+                </a:solidFill>
+                <a:latin typeface="Calibri" panose="020F0502020204030204"/>
+              </a:rPr>
+              <a:t>Many small businesses in Kenya extend goods and services to customers on credit, and track these debts by hand in an exercise book. I saw this problem first-hand in the business I was working in: entries were forgotten, pages got lost or damaged, and there was no reliable way to remind a customer that a payment was due. Debts that were owed simply went untracked and, often, unpaid.</a:t>
+            </a:r>
+            <a:endParaRPr sz="1500">
+              <a:solidFill>
+                <a:srgbClr val="121D21"/>
+              </a:solidFill>
+              <a:latin typeface="Calibri" panose="020F0502020204030204"/>
+            </a:endParaRPr>
+          </a:p>
+          <a:p>
+            <a:pPr>
+              <a:lnSpc>
+                <a:spcPct val="115000"/>
+              </a:lnSpc>
+              <a:spcAft>
+                <a:spcPts val="1200"/>
+              </a:spcAft>
+            </a:pPr>
+            <a:r>
+              <a:rPr sz="1500">
+                <a:solidFill>
+                  <a:srgbClr val="121D21"/>
+                </a:solidFill>
+                <a:latin typeface="Calibri" panose="020F0502020204030204"/>
+              </a:rPr>
+              <a:t>KopaAlert is the web-based system I designed and built to close that gap. It lets a business owner register customers, record debts as they are issued, log payments as they come in, and it automatically sends SMS and email reminders as due dates approach or are missed. It also scores each customer's payment behaviour, flags customers who fall persistently overdue, and gives the owner a single dashboard that shows exactly who owes what.</a:t>
+            </a:r>
+            <a:endParaRPr sz="1500">
+              <a:solidFill>
+                <a:srgbClr val="121D21"/>
+              </a:solidFill>
+              <a:latin typeface="Calibri" panose="020F0502020204030204"/>
+            </a:endParaRPr>
+          </a:p>
+          <a:p>
+            <a:pPr>
+              <a:lnSpc>
+                <a:spcPct val="115000"/>
+              </a:lnSpc>
+              <a:spcAft>
+                <a:spcPts val="1200"/>
+              </a:spcAft>
+            </a:pPr>
+            <a:r>
+              <a:rPr sz="1500">
+                <a:solidFill>
+                  <a:srgbClr val="121D21"/>
+                </a:solidFill>
+                <a:latin typeface="Calibri" panose="020F0502020204030204"/>
+              </a:rPr>
+              <a:t>I built it with Next.js, Supabase (PostgreSQL with Row Level Security), Africa's Talking for SMS, and Resend for email — a stack chosen to be reliable, affordable, and realistic for a small Kenyan business to actually run on.</a:t>
+            </a:r>
+            <a:endParaRPr sz="1500">
+              <a:solidFill>
+                <a:srgbClr val="121D21"/>
+              </a:solidFill>
+              <a:latin typeface="Calibri" panose="020F0502020204030204"/>
+            </a:endParaRPr>
           </a:p>
         </p:txBody>
       </p:sp>
@@ -13641,227 +14941,8 @@
 </p:sld>
 </file>
 
-<file path=ppt/slides/slide22.xml><?xml version="1.0" encoding="utf-8"?>
-<p:sld xmlns:a="http://schemas.openxmlformats.org/drawingml/2006/main" xmlns:p="http://schemas.openxmlformats.org/presentationml/2006/main" xmlns:r="http://schemas.openxmlformats.org/officeDocument/2006/relationships">
-  <p:cSld>
-    <p:bg>
-      <p:bgPr>
-        <a:solidFill>
-          <a:srgbClr val="121D21"/>
-        </a:solidFill>
-        <a:effectLst/>
-      </p:bgPr>
-    </p:bg>
-    <p:spTree>
-      <p:nvGrpSpPr>
-        <p:cNvPr id="1" name=""/>
-        <p:cNvGrpSpPr/>
-        <p:nvPr/>
-      </p:nvGrpSpPr>
-      <p:grpSpPr/>
-      <p:sp>
-        <p:nvSpPr>
-          <p:cNvPr id="2" name="Rectangle 1"/>
-          <p:cNvSpPr/>
-          <p:nvPr/>
-        </p:nvSpPr>
-        <p:spPr>
-          <a:xfrm>
-            <a:off x="0" y="0"/>
-            <a:ext cx="12191695" cy="164592"/>
-          </a:xfrm>
-          <a:prstGeom prst="rect">
-            <a:avLst/>
-          </a:prstGeom>
-          <a:solidFill>
-            <a:srgbClr val="0F766E"/>
-          </a:solidFill>
-          <a:ln>
-            <a:noFill/>
-          </a:ln>
-          <a:effectLst/>
-        </p:spPr>
-        <p:style>
-          <a:lnRef idx="1">
-            <a:schemeClr val="accent1"/>
-          </a:lnRef>
-          <a:fillRef idx="3">
-            <a:schemeClr val="accent1"/>
-          </a:fillRef>
-          <a:effectRef idx="2">
-            <a:schemeClr val="accent1"/>
-          </a:effectRef>
-          <a:fontRef idx="minor">
-            <a:schemeClr val="lt1"/>
-          </a:fontRef>
-        </p:style>
-        <p:txBody>
-          <a:bodyPr rtlCol="0" anchor="ctr"/>
-          <a:lstStyle/>
-          <a:p>
-            <a:pPr algn="ctr"/>
-          </a:p>
-        </p:txBody>
-      </p:sp>
-      <p:sp>
-        <p:nvSpPr>
-          <p:cNvPr id="3" name="Rectangle 2"/>
-          <p:cNvSpPr/>
-          <p:nvPr/>
-        </p:nvSpPr>
-        <p:spPr>
-          <a:xfrm>
-            <a:off x="0" y="6693408"/>
-            <a:ext cx="12191695" cy="164592"/>
-          </a:xfrm>
-          <a:prstGeom prst="rect">
-            <a:avLst/>
-          </a:prstGeom>
-          <a:solidFill>
-            <a:srgbClr val="E69A1F"/>
-          </a:solidFill>
-          <a:ln>
-            <a:noFill/>
-          </a:ln>
-          <a:effectLst/>
-        </p:spPr>
-        <p:style>
-          <a:lnRef idx="1">
-            <a:schemeClr val="accent1"/>
-          </a:lnRef>
-          <a:fillRef idx="3">
-            <a:schemeClr val="accent1"/>
-          </a:fillRef>
-          <a:effectRef idx="2">
-            <a:schemeClr val="accent1"/>
-          </a:effectRef>
-          <a:fontRef idx="minor">
-            <a:schemeClr val="lt1"/>
-          </a:fontRef>
-        </p:style>
-        <p:txBody>
-          <a:bodyPr rtlCol="0" anchor="ctr"/>
-          <a:lstStyle/>
-          <a:p>
-            <a:pPr algn="ctr"/>
-          </a:p>
-        </p:txBody>
-      </p:sp>
-      <p:sp>
-        <p:nvSpPr>
-          <p:cNvPr id="4" name="TextBox 3"/>
-          <p:cNvSpPr txBox="1"/>
-          <p:nvPr/>
-        </p:nvSpPr>
-        <p:spPr>
-          <a:xfrm>
-            <a:off x="822960" y="2651760"/>
-            <a:ext cx="10515600" cy="1097280"/>
-          </a:xfrm>
-          <a:prstGeom prst="rect">
-            <a:avLst/>
-          </a:prstGeom>
-          <a:noFill/>
-        </p:spPr>
-        <p:txBody>
-          <a:bodyPr wrap="square">
-            <a:spAutoFit/>
-          </a:bodyPr>
-          <a:lstStyle/>
-          <a:p>
-            <a:pPr algn="l"/>
-            <a:r>
-              <a:rPr sz="5400" b="1" i="0">
-                <a:solidFill>
-                  <a:srgbClr val="FFFFFF"/>
-                </a:solidFill>
-                <a:latin typeface="Calibri"/>
-              </a:rPr>
-              <a:t>Thank You</a:t>
-            </a:r>
-          </a:p>
-        </p:txBody>
-      </p:sp>
-      <p:sp>
-        <p:nvSpPr>
-          <p:cNvPr id="5" name="TextBox 4"/>
-          <p:cNvSpPr txBox="1"/>
-          <p:nvPr/>
-        </p:nvSpPr>
-        <p:spPr>
-          <a:xfrm>
-            <a:off x="822960" y="3703320"/>
-            <a:ext cx="10515600" cy="548640"/>
-          </a:xfrm>
-          <a:prstGeom prst="rect">
-            <a:avLst/>
-          </a:prstGeom>
-          <a:noFill/>
-        </p:spPr>
-        <p:txBody>
-          <a:bodyPr wrap="square">
-            <a:spAutoFit/>
-          </a:bodyPr>
-          <a:lstStyle/>
-          <a:p>
-            <a:pPr algn="l"/>
-            <a:r>
-              <a:rPr sz="2000" b="0" i="0">
-                <a:solidFill>
-                  <a:srgbClr val="CFE3E0"/>
-                </a:solidFill>
-                <a:latin typeface="Calibri"/>
-              </a:rPr>
-              <a:t>Questions and Discussion</a:t>
-            </a:r>
-          </a:p>
-        </p:txBody>
-      </p:sp>
-      <p:sp>
-        <p:nvSpPr>
-          <p:cNvPr id="6" name="TextBox 5"/>
-          <p:cNvSpPr txBox="1"/>
-          <p:nvPr/>
-        </p:nvSpPr>
-        <p:spPr>
-          <a:xfrm>
-            <a:off x="822960" y="4663440"/>
-            <a:ext cx="10515600" cy="365760"/>
-          </a:xfrm>
-          <a:prstGeom prst="rect">
-            <a:avLst/>
-          </a:prstGeom>
-          <a:noFill/>
-        </p:spPr>
-        <p:txBody>
-          <a:bodyPr wrap="square">
-            <a:spAutoFit/>
-          </a:bodyPr>
-          <a:lstStyle/>
-          <a:p>
-            <a:pPr algn="l"/>
-            <a:r>
-              <a:rPr sz="1500" b="1" i="0">
-                <a:solidFill>
-                  <a:srgbClr val="E69A1F"/>
-                </a:solidFill>
-                <a:latin typeface="Calibri"/>
-              </a:rPr>
-              <a:t>Stanley Murangiri  —  Mama Ngina University College</a:t>
-            </a:r>
-          </a:p>
-        </p:txBody>
-      </p:sp>
-    </p:spTree>
-  </p:cSld>
-  <p:clrMapOvr>
-    <a:masterClrMapping/>
-  </p:clrMapOvr>
-</p:sld>
-</file>
-
-<file path=ppt/slides/slide3.xml><?xml version="1.0" encoding="utf-8"?>
-<p:sld xmlns:a="http://schemas.openxmlformats.org/drawingml/2006/main" xmlns:p="http://schemas.openxmlformats.org/presentationml/2006/main" xmlns:r="http://schemas.openxmlformats.org/officeDocument/2006/relationships">
+<file path=ppt/slides/slide4.xml><?xml version="1.0" encoding="utf-8"?>
+<p:sld xmlns:a="http://schemas.openxmlformats.org/drawingml/2006/main" xmlns:r="http://schemas.openxmlformats.org/officeDocument/2006/relationships" xmlns:p="http://schemas.openxmlformats.org/presentationml/2006/main">
   <p:cSld>
     <p:bg>
       <p:bgPr>
@@ -13950,10 +15031,16 @@
                 <a:solidFill>
                   <a:srgbClr val="E69A1F"/>
                 </a:solidFill>
-                <a:latin typeface="Calibri"/>
-              </a:rPr>
-              <a:t>OVERVIEW</a:t>
-            </a:r>
+                <a:latin typeface="Calibri" panose="020F0502020204030204"/>
+              </a:rPr>
+              <a:t>CHAPTER ONE</a:t>
+            </a:r>
+            <a:endParaRPr sz="1300" b="1" i="0">
+              <a:solidFill>
+                <a:srgbClr val="E69A1F"/>
+              </a:solidFill>
+              <a:latin typeface="Calibri" panose="020F0502020204030204"/>
+            </a:endParaRPr>
           </a:p>
         </p:txBody>
       </p:sp>
@@ -13985,10 +15072,16 @@
                 <a:solidFill>
                   <a:srgbClr val="121D21"/>
                 </a:solidFill>
-                <a:latin typeface="Calibri"/>
-              </a:rPr>
-              <a:t>Abstract</a:t>
-            </a:r>
+                <a:latin typeface="Calibri" panose="020F0502020204030204"/>
+              </a:rPr>
+              <a:t>Introduction / Background</a:t>
+            </a:r>
+            <a:endParaRPr sz="3000" b="1" i="0">
+              <a:solidFill>
+                <a:srgbClr val="121D21"/>
+              </a:solidFill>
+              <a:latin typeface="Calibri" panose="020F0502020204030204"/>
+            </a:endParaRPr>
           </a:p>
         </p:txBody>
       </p:sp>
@@ -14064,10 +15157,16 @@
                 <a:solidFill>
                   <a:srgbClr val="4B5A5E"/>
                 </a:solidFill>
-                <a:latin typeface="Calibri"/>
+                <a:latin typeface="Calibri" panose="020F0502020204030204"/>
               </a:rPr>
               <a:t>KopaAlert — Stanley Murangiri</a:t>
             </a:r>
+            <a:endParaRPr sz="1000" b="0" i="0">
+              <a:solidFill>
+                <a:srgbClr val="4B5A5E"/>
+              </a:solidFill>
+              <a:latin typeface="Calibri" panose="020F0502020204030204"/>
+            </a:endParaRPr>
           </a:p>
         </p:txBody>
       </p:sp>
@@ -14099,111 +15198,29 @@
                 <a:solidFill>
                   <a:srgbClr val="4B5A5E"/>
                 </a:solidFill>
-                <a:latin typeface="Calibri"/>
-              </a:rPr>
-              <a:t>3</a:t>
-            </a:r>
-          </a:p>
-        </p:txBody>
-      </p:sp>
-      <p:sp>
-        <p:nvSpPr>
-          <p:cNvPr id="8" name="Rectangle 7"/>
-          <p:cNvSpPr/>
+                <a:latin typeface="Calibri" panose="020F0502020204030204"/>
+              </a:rPr>
+              <a:t>4</a:t>
+            </a:r>
+            <a:endParaRPr sz="1000" b="0" i="0">
+              <a:solidFill>
+                <a:srgbClr val="4B5A5E"/>
+              </a:solidFill>
+              <a:latin typeface="Calibri" panose="020F0502020204030204"/>
+            </a:endParaRPr>
+          </a:p>
+        </p:txBody>
+      </p:sp>
+      <p:sp>
+        <p:nvSpPr>
+          <p:cNvPr id="8" name="TextBox 7"/>
+          <p:cNvSpPr txBox="1"/>
           <p:nvPr/>
         </p:nvSpPr>
         <p:spPr>
           <a:xfrm>
             <a:off x="685800" y="1600200"/>
-            <a:ext cx="10789920" cy="4480560"/>
-          </a:xfrm>
-          <a:prstGeom prst="rect">
-            <a:avLst/>
-          </a:prstGeom>
-          <a:solidFill>
-            <a:srgbClr val="FFFFFF"/>
-          </a:solidFill>
-          <a:ln>
-            <a:noFill/>
-          </a:ln>
-          <a:effectLst/>
-        </p:spPr>
-        <p:style>
-          <a:lnRef idx="1">
-            <a:schemeClr val="accent1"/>
-          </a:lnRef>
-          <a:fillRef idx="3">
-            <a:schemeClr val="accent1"/>
-          </a:fillRef>
-          <a:effectRef idx="2">
-            <a:schemeClr val="accent1"/>
-          </a:effectRef>
-          <a:fontRef idx="minor">
-            <a:schemeClr val="lt1"/>
-          </a:fontRef>
-        </p:style>
-        <p:txBody>
-          <a:bodyPr rtlCol="0" anchor="ctr"/>
-          <a:lstStyle/>
-          <a:p>
-            <a:pPr algn="ctr"/>
-          </a:p>
-        </p:txBody>
-      </p:sp>
-      <p:sp>
-        <p:nvSpPr>
-          <p:cNvPr id="9" name="Rectangle 8"/>
-          <p:cNvSpPr/>
-          <p:nvPr/>
-        </p:nvSpPr>
-        <p:spPr>
-          <a:xfrm>
-            <a:off x="685800" y="1600200"/>
-            <a:ext cx="73152" cy="4480560"/>
-          </a:xfrm>
-          <a:prstGeom prst="rect">
-            <a:avLst/>
-          </a:prstGeom>
-          <a:solidFill>
-            <a:srgbClr val="0F766E"/>
-          </a:solidFill>
-          <a:ln>
-            <a:noFill/>
-          </a:ln>
-          <a:effectLst/>
-        </p:spPr>
-        <p:style>
-          <a:lnRef idx="1">
-            <a:schemeClr val="accent1"/>
-          </a:lnRef>
-          <a:fillRef idx="3">
-            <a:schemeClr val="accent1"/>
-          </a:fillRef>
-          <a:effectRef idx="2">
-            <a:schemeClr val="accent1"/>
-          </a:effectRef>
-          <a:fontRef idx="minor">
-            <a:schemeClr val="lt1"/>
-          </a:fontRef>
-        </p:style>
-        <p:txBody>
-          <a:bodyPr rtlCol="0" anchor="ctr"/>
-          <a:lstStyle/>
-          <a:p>
-            <a:pPr algn="ctr"/>
-          </a:p>
-        </p:txBody>
-      </p:sp>
-      <p:sp>
-        <p:nvSpPr>
-          <p:cNvPr id="10" name="TextBox 9"/>
-          <p:cNvSpPr txBox="1"/>
-          <p:nvPr/>
-        </p:nvSpPr>
-        <p:spPr>
-          <a:xfrm>
-            <a:off x="1005840" y="1828800"/>
-            <a:ext cx="10149840" cy="4023360"/>
+            <a:ext cx="10789920" cy="4572000"/>
           </a:xfrm>
           <a:prstGeom prst="rect">
             <a:avLst/>
@@ -14218,59 +15235,102 @@
           <a:p>
             <a:pPr>
               <a:lnSpc>
-                <a:spcPct val="115000"/>
+                <a:spcPct val="108000"/>
               </a:lnSpc>
               <a:spcAft>
-                <a:spcPts val="1200"/>
+                <a:spcPts val="1000"/>
               </a:spcAft>
             </a:pPr>
             <a:r>
-              <a:rPr sz="1500">
+              <a:rPr sz="1700">
                 <a:solidFill>
                   <a:srgbClr val="121D21"/>
                 </a:solidFill>
-                <a:latin typeface="Calibri"/>
-              </a:rPr>
-              <a:t>Many small businesses in Kenya extend goods and services to customers on credit, and track these debts by hand in an exercise book. I saw this problem first-hand in the business I was working in: entries were forgotten, pages got lost or damaged, and there was no reliable way to remind a customer that a payment was due. Debts that were owed simply went untracked and, often, unpaid.</a:t>
-            </a:r>
+                <a:latin typeface="Calibri" panose="020F0502020204030204"/>
+              </a:rPr>
+              <a:t>•  Credit is part of everyday small business in Kenya — a duka, salon, hardware store or wholesaler routinely lets trusted, regular customers take goods or services now and pay later.</a:t>
+            </a:r>
+            <a:endParaRPr sz="1700">
+              <a:solidFill>
+                <a:srgbClr val="121D21"/>
+              </a:solidFill>
+              <a:latin typeface="Calibri" panose="020F0502020204030204"/>
+            </a:endParaRPr>
           </a:p>
           <a:p>
             <a:pPr>
               <a:lnSpc>
-                <a:spcPct val="115000"/>
+                <a:spcPct val="108000"/>
               </a:lnSpc>
               <a:spcAft>
-                <a:spcPts val="1200"/>
+                <a:spcPts val="1000"/>
               </a:spcAft>
             </a:pPr>
             <a:r>
-              <a:rPr sz="1500">
+              <a:rPr sz="1700">
                 <a:solidFill>
                   <a:srgbClr val="121D21"/>
                 </a:solidFill>
-                <a:latin typeface="Calibri"/>
-              </a:rPr>
-              <a:t>KopaAlert is the web-based system I designed and built to close that gap. It lets a business owner register customers, record debts as they are issued, log payments as they come in, and it automatically sends SMS and email reminders as due dates approach or are missed. It also scores each customer's payment behaviour, flags customers who fall persistently overdue, and gives the owner a single dashboard that shows exactly who owes what.</a:t>
-            </a:r>
+                <a:latin typeface="Calibri" panose="020F0502020204030204"/>
+              </a:rPr>
+              <a:t>•  This trust-based credit is almost always tracked the same way across thousands of small businesses: a physical exercise book, or at best a spreadsheet a staff member is expected to remember to update.</a:t>
+            </a:r>
+            <a:endParaRPr sz="1700">
+              <a:solidFill>
+                <a:srgbClr val="121D21"/>
+              </a:solidFill>
+              <a:latin typeface="Calibri" panose="020F0502020204030204"/>
+            </a:endParaRPr>
           </a:p>
           <a:p>
             <a:pPr>
               <a:lnSpc>
-                <a:spcPct val="115000"/>
+                <a:spcPct val="108000"/>
               </a:lnSpc>
               <a:spcAft>
-                <a:spcPts val="1200"/>
+                <a:spcPts val="1000"/>
               </a:spcAft>
             </a:pPr>
             <a:r>
-              <a:rPr sz="1500">
+              <a:rPr sz="1700">
                 <a:solidFill>
                   <a:srgbClr val="121D21"/>
                 </a:solidFill>
-                <a:latin typeface="Calibri"/>
-              </a:rPr>
-              <a:t>I built it with Next.js, Supabase (PostgreSQL with Row Level Security), Africa's Talking for SMS, and Resend for email — a stack chosen to be reliable, affordable, and realistic for a small Kenyan business to actually run on.</a:t>
-            </a:r>
+                <a:latin typeface="Calibri" panose="020F0502020204030204"/>
+              </a:rPr>
+              <a:t>•  I have worked inside a business that ran this way, and I experienced directly how fragile that system is — it depends entirely on someone remembering to write, remembering to check, and remembering to follow up.</a:t>
+            </a:r>
+            <a:endParaRPr sz="1700">
+              <a:solidFill>
+                <a:srgbClr val="121D21"/>
+              </a:solidFill>
+              <a:latin typeface="Calibri" panose="020F0502020204030204"/>
+            </a:endParaRPr>
+          </a:p>
+          <a:p>
+            <a:pPr>
+              <a:lnSpc>
+                <a:spcPct val="108000"/>
+              </a:lnSpc>
+              <a:spcAft>
+                <a:spcPts val="1000"/>
+              </a:spcAft>
+            </a:pPr>
+            <a:r>
+              <a:rPr sz="1700">
+                <a:solidFill>
+                  <a:srgbClr val="121D21"/>
+                </a:solidFill>
+                <a:latin typeface="Calibri" panose="020F0502020204030204"/>
+              </a:rPr>
+              <a:t>•  KopaAlert began as my answer to a very specific, very ordinary problem: what if the business never had to remember, because the system remembered for it?</a:t>
+            </a:r>
+            <a:endParaRPr sz="1700">
+              <a:solidFill>
+                <a:srgbClr val="121D21"/>
+              </a:solidFill>
+              <a:latin typeface="Calibri" panose="020F0502020204030204"/>
+            </a:endParaRPr>
           </a:p>
         </p:txBody>
       </p:sp>
@@ -14282,8 +15342,8 @@
 </p:sld>
 </file>
 
-<file path=ppt/slides/slide4.xml><?xml version="1.0" encoding="utf-8"?>
-<p:sld xmlns:a="http://schemas.openxmlformats.org/drawingml/2006/main" xmlns:p="http://schemas.openxmlformats.org/presentationml/2006/main" xmlns:r="http://schemas.openxmlformats.org/officeDocument/2006/relationships">
+<file path=ppt/slides/slide5.xml><?xml version="1.0" encoding="utf-8"?>
+<p:sld xmlns:a="http://schemas.openxmlformats.org/drawingml/2006/main" xmlns:r="http://schemas.openxmlformats.org/officeDocument/2006/relationships" xmlns:p="http://schemas.openxmlformats.org/presentationml/2006/main">
   <p:cSld>
     <p:bg>
       <p:bgPr>
@@ -14372,10 +15432,16 @@
                 <a:solidFill>
                   <a:srgbClr val="E69A1F"/>
                 </a:solidFill>
-                <a:latin typeface="Calibri"/>
+                <a:latin typeface="Calibri" panose="020F0502020204030204"/>
               </a:rPr>
               <a:t>CHAPTER ONE</a:t>
             </a:r>
+            <a:endParaRPr sz="1300" b="1" i="0">
+              <a:solidFill>
+                <a:srgbClr val="E69A1F"/>
+              </a:solidFill>
+              <a:latin typeface="Calibri" panose="020F0502020204030204"/>
+            </a:endParaRPr>
           </a:p>
         </p:txBody>
       </p:sp>
@@ -14407,10 +15473,16 @@
                 <a:solidFill>
                   <a:srgbClr val="121D21"/>
                 </a:solidFill>
-                <a:latin typeface="Calibri"/>
-              </a:rPr>
-              <a:t>Introduction / Background</a:t>
-            </a:r>
+                <a:latin typeface="Calibri" panose="020F0502020204030204"/>
+              </a:rPr>
+              <a:t>Problem Statement — The Gap I Identified</a:t>
+            </a:r>
+            <a:endParaRPr sz="3000" b="1" i="0">
+              <a:solidFill>
+                <a:srgbClr val="121D21"/>
+              </a:solidFill>
+              <a:latin typeface="Calibri" panose="020F0502020204030204"/>
+            </a:endParaRPr>
           </a:p>
         </p:txBody>
       </p:sp>
@@ -14486,10 +15558,16 @@
                 <a:solidFill>
                   <a:srgbClr val="4B5A5E"/>
                 </a:solidFill>
-                <a:latin typeface="Calibri"/>
+                <a:latin typeface="Calibri" panose="020F0502020204030204"/>
               </a:rPr>
               <a:t>KopaAlert — Stanley Murangiri</a:t>
             </a:r>
+            <a:endParaRPr sz="1000" b="0" i="0">
+              <a:solidFill>
+                <a:srgbClr val="4B5A5E"/>
+              </a:solidFill>
+              <a:latin typeface="Calibri" panose="020F0502020204030204"/>
+            </a:endParaRPr>
           </a:p>
         </p:txBody>
       </p:sp>
@@ -14521,10 +15599,16 @@
                 <a:solidFill>
                   <a:srgbClr val="4B5A5E"/>
                 </a:solidFill>
-                <a:latin typeface="Calibri"/>
-              </a:rPr>
-              <a:t>4</a:t>
-            </a:r>
+                <a:latin typeface="Calibri" panose="020F0502020204030204"/>
+              </a:rPr>
+              <a:t>5</a:t>
+            </a:r>
+            <a:endParaRPr sz="1000" b="0" i="0">
+              <a:solidFill>
+                <a:srgbClr val="4B5A5E"/>
+              </a:solidFill>
+              <a:latin typeface="Calibri" panose="020F0502020204030204"/>
+            </a:endParaRPr>
           </a:p>
         </p:txBody>
       </p:sp>
@@ -14536,8 +15620,49 @@
         </p:nvSpPr>
         <p:spPr>
           <a:xfrm>
-            <a:off x="685800" y="1600200"/>
-            <a:ext cx="10789920" cy="4572000"/>
+            <a:off x="685800" y="1554480"/>
+            <a:ext cx="10789920" cy="502920"/>
+          </a:xfrm>
+          <a:prstGeom prst="rect">
+            <a:avLst/>
+          </a:prstGeom>
+          <a:noFill/>
+        </p:spPr>
+        <p:txBody>
+          <a:bodyPr wrap="square">
+            <a:spAutoFit/>
+          </a:bodyPr>
+          <a:lstStyle/>
+          <a:p>
+            <a:pPr algn="l"/>
+            <a:r>
+              <a:rPr sz="1550" b="0" i="0">
+                <a:solidFill>
+                  <a:srgbClr val="4B5A5E"/>
+                </a:solidFill>
+                <a:latin typeface="Calibri" panose="020F0502020204030204"/>
+              </a:rPr>
+              <a:t>While working in a business that recorded customer debt manually, I identified the following recurring, costly problems:</a:t>
+            </a:r>
+            <a:endParaRPr sz="1550" b="0" i="0">
+              <a:solidFill>
+                <a:srgbClr val="4B5A5E"/>
+              </a:solidFill>
+              <a:latin typeface="Calibri" panose="020F0502020204030204"/>
+            </a:endParaRPr>
+          </a:p>
+        </p:txBody>
+      </p:sp>
+      <p:sp>
+        <p:nvSpPr>
+          <p:cNvPr id="9" name="TextBox 8"/>
+          <p:cNvSpPr txBox="1"/>
+          <p:nvPr/>
+        </p:nvSpPr>
+        <p:spPr>
+          <a:xfrm>
+            <a:off x="685800" y="2148840"/>
+            <a:ext cx="10789920" cy="3291840"/>
           </a:xfrm>
           <a:prstGeom prst="rect">
             <a:avLst/>
@@ -14555,18 +15680,24 @@
                 <a:spcPct val="108000"/>
               </a:lnSpc>
               <a:spcAft>
-                <a:spcPts val="1000"/>
+                <a:spcPts val="1300"/>
               </a:spcAft>
             </a:pPr>
             <a:r>
-              <a:rPr sz="1700">
+              <a:rPr sz="1650">
                 <a:solidFill>
                   <a:srgbClr val="121D21"/>
                 </a:solidFill>
-                <a:latin typeface="Calibri"/>
-              </a:rPr>
-              <a:t>•  Credit is part of everyday small business in Kenya — a duka, salon, hardware store or wholesaler routinely lets trusted, regular customers take goods or services now and pay later.</a:t>
-            </a:r>
+                <a:latin typeface="Calibri" panose="020F0502020204030204"/>
+              </a:rPr>
+              <a:t>•  Debts were written into a physical book — an entry that was forgotten to be recorded was money the business silently lost.</a:t>
+            </a:r>
+            <a:endParaRPr sz="1650">
+              <a:solidFill>
+                <a:srgbClr val="121D21"/>
+              </a:solidFill>
+              <a:latin typeface="Calibri" panose="020F0502020204030204"/>
+            </a:endParaRPr>
           </a:p>
           <a:p>
             <a:pPr>
@@ -14574,18 +15705,24 @@
                 <a:spcPct val="108000"/>
               </a:lnSpc>
               <a:spcAft>
-                <a:spcPts val="1000"/>
+                <a:spcPts val="1300"/>
               </a:spcAft>
             </a:pPr>
             <a:r>
-              <a:rPr sz="1700">
+              <a:rPr sz="1650">
                 <a:solidFill>
                   <a:srgbClr val="121D21"/>
                 </a:solidFill>
-                <a:latin typeface="Calibri"/>
-              </a:rPr>
-              <a:t>•  This trust-based credit is almost always tracked the same way across thousands of small businesses: a physical exercise book, or at best a spreadsheet a staff member is expected to remember to update.</a:t>
-            </a:r>
+                <a:latin typeface="Calibri" panose="020F0502020204030204"/>
+              </a:rPr>
+              <a:t>•  There was no reminder mechanism. Customers were only reminded if a staff member personally remembered to call or ask them.</a:t>
+            </a:r>
+            <a:endParaRPr sz="1650">
+              <a:solidFill>
+                <a:srgbClr val="121D21"/>
+              </a:solidFill>
+              <a:latin typeface="Calibri" panose="020F0502020204030204"/>
+            </a:endParaRPr>
           </a:p>
           <a:p>
             <a:pPr>
@@ -14593,18 +15730,24 @@
                 <a:spcPct val="108000"/>
               </a:lnSpc>
               <a:spcAft>
-                <a:spcPts val="1000"/>
+                <a:spcPts val="1300"/>
               </a:spcAft>
             </a:pPr>
             <a:r>
-              <a:rPr sz="1700">
+              <a:rPr sz="1650">
                 <a:solidFill>
                   <a:srgbClr val="121D21"/>
                 </a:solidFill>
-                <a:latin typeface="Calibri"/>
-              </a:rPr>
-              <a:t>•  I have worked inside a business that ran this way, and I experienced directly how fragile that system is — it depends entirely on someone remembering to write, remembering to check, and remembering to follow up.</a:t>
-            </a:r>
+                <a:latin typeface="Calibri" panose="020F0502020204030204"/>
+              </a:rPr>
+              <a:t>•  The book itself was a single point of failure — it could be lost, torn, or spoiled, taking financial history with it.</a:t>
+            </a:r>
+            <a:endParaRPr sz="1650">
+              <a:solidFill>
+                <a:srgbClr val="121D21"/>
+              </a:solidFill>
+              <a:latin typeface="Calibri" panose="020F0502020204030204"/>
+            </a:endParaRPr>
           </a:p>
           <a:p>
             <a:pPr>
@@ -14612,18 +15755,134 @@
                 <a:spcPct val="108000"/>
               </a:lnSpc>
               <a:spcAft>
-                <a:spcPts val="1000"/>
+                <a:spcPts val="1300"/>
               </a:spcAft>
             </a:pPr>
             <a:r>
-              <a:rPr sz="1700">
+              <a:rPr sz="1650">
                 <a:solidFill>
                   <a:srgbClr val="121D21"/>
                 </a:solidFill>
-                <a:latin typeface="Calibri"/>
-              </a:rPr>
-              <a:t>•  KopaAlert began as my answer to a very specific, very ordinary problem: what if the business never had to remember, because the system remembered for it?</a:t>
-            </a:r>
+                <a:latin typeface="Calibri" panose="020F0502020204030204"/>
+              </a:rPr>
+              <a:t>•  Different staff members writing in the same book caused duplicate, conflicting, or illegible entries.</a:t>
+            </a:r>
+            <a:endParaRPr sz="1650">
+              <a:solidFill>
+                <a:srgbClr val="121D21"/>
+              </a:solidFill>
+              <a:latin typeface="Calibri" panose="020F0502020204030204"/>
+            </a:endParaRPr>
+          </a:p>
+          <a:p>
+            <a:pPr>
+              <a:lnSpc>
+                <a:spcPct val="108000"/>
+              </a:lnSpc>
+              <a:spcAft>
+                <a:spcPts val="1300"/>
+              </a:spcAft>
+            </a:pPr>
+            <a:r>
+              <a:rPr sz="1650">
+                <a:solidFill>
+                  <a:srgbClr val="121D21"/>
+                </a:solidFill>
+                <a:latin typeface="Calibri" panose="020F0502020204030204"/>
+              </a:rPr>
+              <a:t>•  The owner had no single view of who owed what, for how long, or who was becoming a payment risk.</a:t>
+            </a:r>
+            <a:endParaRPr sz="1650">
+              <a:solidFill>
+                <a:srgbClr val="121D21"/>
+              </a:solidFill>
+              <a:latin typeface="Calibri" panose="020F0502020204030204"/>
+            </a:endParaRPr>
+          </a:p>
+        </p:txBody>
+      </p:sp>
+      <p:sp>
+        <p:nvSpPr>
+          <p:cNvPr id="10" name="Rectangle 9"/>
+          <p:cNvSpPr/>
+          <p:nvPr/>
+        </p:nvSpPr>
+        <p:spPr>
+          <a:xfrm>
+            <a:off x="685800" y="5623560"/>
+            <a:ext cx="10789920" cy="685800"/>
+          </a:xfrm>
+          <a:prstGeom prst="rect">
+            <a:avLst/>
+          </a:prstGeom>
+          <a:solidFill>
+            <a:srgbClr val="0F766E"/>
+          </a:solidFill>
+          <a:ln>
+            <a:noFill/>
+          </a:ln>
+          <a:effectLst/>
+        </p:spPr>
+        <p:style>
+          <a:lnRef idx="1">
+            <a:schemeClr val="accent1"/>
+          </a:lnRef>
+          <a:fillRef idx="3">
+            <a:schemeClr val="accent1"/>
+          </a:fillRef>
+          <a:effectRef idx="2">
+            <a:schemeClr val="accent1"/>
+          </a:effectRef>
+          <a:fontRef idx="minor">
+            <a:schemeClr val="lt1"/>
+          </a:fontRef>
+        </p:style>
+        <p:txBody>
+          <a:bodyPr rtlCol="0" anchor="ctr"/>
+          <a:lstStyle/>
+          <a:p>
+            <a:pPr algn="ctr"/>
+          </a:p>
+        </p:txBody>
+      </p:sp>
+      <p:sp>
+        <p:nvSpPr>
+          <p:cNvPr id="11" name="TextBox 10"/>
+          <p:cNvSpPr txBox="1"/>
+          <p:nvPr/>
+        </p:nvSpPr>
+        <p:spPr>
+          <a:xfrm>
+            <a:off x="914400" y="5742432"/>
+            <a:ext cx="10332720" cy="457200"/>
+          </a:xfrm>
+          <a:prstGeom prst="rect">
+            <a:avLst/>
+          </a:prstGeom>
+          <a:noFill/>
+        </p:spPr>
+        <p:txBody>
+          <a:bodyPr wrap="square" anchor="ctr">
+            <a:spAutoFit/>
+          </a:bodyPr>
+          <a:lstStyle/>
+          <a:p>
+            <a:pPr algn="l"/>
+            <a:r>
+              <a:rPr sz="1400" b="1" i="0">
+                <a:solidFill>
+                  <a:srgbClr val="FFFFFF"/>
+                </a:solidFill>
+                <a:latin typeface="Calibri" panose="020F0502020204030204"/>
+              </a:rPr>
+              <a:t>This gap — a time-sensitive, money-critical task left entirely to human memory and paper — is exactly what KopaAlert was built to close.</a:t>
+            </a:r>
+            <a:endParaRPr sz="1400" b="1" i="0">
+              <a:solidFill>
+                <a:srgbClr val="FFFFFF"/>
+              </a:solidFill>
+              <a:latin typeface="Calibri" panose="020F0502020204030204"/>
+            </a:endParaRPr>
           </a:p>
         </p:txBody>
       </p:sp>
@@ -14635,8 +15894,8 @@
 </p:sld>
 </file>
 
-<file path=ppt/slides/slide5.xml><?xml version="1.0" encoding="utf-8"?>
-<p:sld xmlns:a="http://schemas.openxmlformats.org/drawingml/2006/main" xmlns:p="http://schemas.openxmlformats.org/presentationml/2006/main" xmlns:r="http://schemas.openxmlformats.org/officeDocument/2006/relationships">
+<file path=ppt/slides/slide6.xml><?xml version="1.0" encoding="utf-8"?>
+<p:sld xmlns:a="http://schemas.openxmlformats.org/drawingml/2006/main" xmlns:r="http://schemas.openxmlformats.org/officeDocument/2006/relationships" xmlns:p="http://schemas.openxmlformats.org/presentationml/2006/main">
   <p:cSld>
     <p:bg>
       <p:bgPr>
@@ -14725,10 +15984,16 @@
                 <a:solidFill>
                   <a:srgbClr val="E69A1F"/>
                 </a:solidFill>
-                <a:latin typeface="Calibri"/>
+                <a:latin typeface="Calibri" panose="020F0502020204030204"/>
               </a:rPr>
               <a:t>CHAPTER ONE</a:t>
             </a:r>
+            <a:endParaRPr sz="1300" b="1" i="0">
+              <a:solidFill>
+                <a:srgbClr val="E69A1F"/>
+              </a:solidFill>
+              <a:latin typeface="Calibri" panose="020F0502020204030204"/>
+            </a:endParaRPr>
           </a:p>
         </p:txBody>
       </p:sp>
@@ -14760,10 +16025,16 @@
                 <a:solidFill>
                   <a:srgbClr val="121D21"/>
                 </a:solidFill>
-                <a:latin typeface="Calibri"/>
-              </a:rPr>
-              <a:t>Problem Statement — The Gap I Identified</a:t>
-            </a:r>
+                <a:latin typeface="Calibri" panose="020F0502020204030204"/>
+              </a:rPr>
+              <a:t>Objectives</a:t>
+            </a:r>
+            <a:endParaRPr sz="3000" b="1" i="0">
+              <a:solidFill>
+                <a:srgbClr val="121D21"/>
+              </a:solidFill>
+              <a:latin typeface="Calibri" panose="020F0502020204030204"/>
+            </a:endParaRPr>
           </a:p>
         </p:txBody>
       </p:sp>
@@ -14839,10 +16110,16 @@
                 <a:solidFill>
                   <a:srgbClr val="4B5A5E"/>
                 </a:solidFill>
-                <a:latin typeface="Calibri"/>
+                <a:latin typeface="Calibri" panose="020F0502020204030204"/>
               </a:rPr>
               <a:t>KopaAlert — Stanley Murangiri</a:t>
             </a:r>
+            <a:endParaRPr sz="1000" b="0" i="0">
+              <a:solidFill>
+                <a:srgbClr val="4B5A5E"/>
+              </a:solidFill>
+              <a:latin typeface="Calibri" panose="020F0502020204030204"/>
+            </a:endParaRPr>
           </a:p>
         </p:txBody>
       </p:sp>
@@ -14874,176 +16151,29 @@
                 <a:solidFill>
                   <a:srgbClr val="4B5A5E"/>
                 </a:solidFill>
-                <a:latin typeface="Calibri"/>
-              </a:rPr>
-              <a:t>5</a:t>
-            </a:r>
-          </a:p>
-        </p:txBody>
-      </p:sp>
-      <p:sp>
-        <p:nvSpPr>
-          <p:cNvPr id="8" name="TextBox 7"/>
-          <p:cNvSpPr txBox="1"/>
+                <a:latin typeface="Calibri" panose="020F0502020204030204"/>
+              </a:rPr>
+              <a:t>6</a:t>
+            </a:r>
+            <a:endParaRPr sz="1000" b="0" i="0">
+              <a:solidFill>
+                <a:srgbClr val="4B5A5E"/>
+              </a:solidFill>
+              <a:latin typeface="Calibri" panose="020F0502020204030204"/>
+            </a:endParaRPr>
+          </a:p>
+        </p:txBody>
+      </p:sp>
+      <p:sp>
+        <p:nvSpPr>
+          <p:cNvPr id="8" name="Rectangle 7"/>
+          <p:cNvSpPr/>
           <p:nvPr/>
         </p:nvSpPr>
         <p:spPr>
           <a:xfrm>
             <a:off x="685800" y="1554480"/>
-            <a:ext cx="10789920" cy="502920"/>
-          </a:xfrm>
-          <a:prstGeom prst="rect">
-            <a:avLst/>
-          </a:prstGeom>
-          <a:noFill/>
-        </p:spPr>
-        <p:txBody>
-          <a:bodyPr wrap="square">
-            <a:spAutoFit/>
-          </a:bodyPr>
-          <a:lstStyle/>
-          <a:p>
-            <a:pPr algn="l"/>
-            <a:r>
-              <a:rPr sz="1550" b="0" i="0">
-                <a:solidFill>
-                  <a:srgbClr val="4B5A5E"/>
-                </a:solidFill>
-                <a:latin typeface="Calibri"/>
-              </a:rPr>
-              <a:t>While working in a business that recorded customer debt manually, I identified the following recurring, costly problems:</a:t>
-            </a:r>
-          </a:p>
-        </p:txBody>
-      </p:sp>
-      <p:sp>
-        <p:nvSpPr>
-          <p:cNvPr id="9" name="TextBox 8"/>
-          <p:cNvSpPr txBox="1"/>
-          <p:nvPr/>
-        </p:nvSpPr>
-        <p:spPr>
-          <a:xfrm>
-            <a:off x="685800" y="2148840"/>
-            <a:ext cx="10789920" cy="3291840"/>
-          </a:xfrm>
-          <a:prstGeom prst="rect">
-            <a:avLst/>
-          </a:prstGeom>
-          <a:noFill/>
-        </p:spPr>
-        <p:txBody>
-          <a:bodyPr wrap="square">
-            <a:spAutoFit/>
-          </a:bodyPr>
-          <a:lstStyle/>
-          <a:p>
-            <a:pPr>
-              <a:lnSpc>
-                <a:spcPct val="108000"/>
-              </a:lnSpc>
-              <a:spcAft>
-                <a:spcPts val="1300"/>
-              </a:spcAft>
-            </a:pPr>
-            <a:r>
-              <a:rPr sz="1650">
-                <a:solidFill>
-                  <a:srgbClr val="121D21"/>
-                </a:solidFill>
-                <a:latin typeface="Calibri"/>
-              </a:rPr>
-              <a:t>•  Debts were written into a physical book — an entry that was forgotten to be recorded was money the business silently lost.</a:t>
-            </a:r>
-          </a:p>
-          <a:p>
-            <a:pPr>
-              <a:lnSpc>
-                <a:spcPct val="108000"/>
-              </a:lnSpc>
-              <a:spcAft>
-                <a:spcPts val="1300"/>
-              </a:spcAft>
-            </a:pPr>
-            <a:r>
-              <a:rPr sz="1650">
-                <a:solidFill>
-                  <a:srgbClr val="121D21"/>
-                </a:solidFill>
-                <a:latin typeface="Calibri"/>
-              </a:rPr>
-              <a:t>•  There was no reminder mechanism. Customers were only reminded if a staff member personally remembered to call or ask them.</a:t>
-            </a:r>
-          </a:p>
-          <a:p>
-            <a:pPr>
-              <a:lnSpc>
-                <a:spcPct val="108000"/>
-              </a:lnSpc>
-              <a:spcAft>
-                <a:spcPts val="1300"/>
-              </a:spcAft>
-            </a:pPr>
-            <a:r>
-              <a:rPr sz="1650">
-                <a:solidFill>
-                  <a:srgbClr val="121D21"/>
-                </a:solidFill>
-                <a:latin typeface="Calibri"/>
-              </a:rPr>
-              <a:t>•  The book itself was a single point of failure — it could be lost, torn, or spoiled, taking financial history with it.</a:t>
-            </a:r>
-          </a:p>
-          <a:p>
-            <a:pPr>
-              <a:lnSpc>
-                <a:spcPct val="108000"/>
-              </a:lnSpc>
-              <a:spcAft>
-                <a:spcPts val="1300"/>
-              </a:spcAft>
-            </a:pPr>
-            <a:r>
-              <a:rPr sz="1650">
-                <a:solidFill>
-                  <a:srgbClr val="121D21"/>
-                </a:solidFill>
-                <a:latin typeface="Calibri"/>
-              </a:rPr>
-              <a:t>•  Different staff members writing in the same book caused duplicate, conflicting, or illegible entries.</a:t>
-            </a:r>
-          </a:p>
-          <a:p>
-            <a:pPr>
-              <a:lnSpc>
-                <a:spcPct val="108000"/>
-              </a:lnSpc>
-              <a:spcAft>
-                <a:spcPts val="1300"/>
-              </a:spcAft>
-            </a:pPr>
-            <a:r>
-              <a:rPr sz="1650">
-                <a:solidFill>
-                  <a:srgbClr val="121D21"/>
-                </a:solidFill>
-                <a:latin typeface="Calibri"/>
-              </a:rPr>
-              <a:t>•  The owner had no single view of who owed what, for how long, or who was becoming a payment risk.</a:t>
-            </a:r>
-          </a:p>
-        </p:txBody>
-      </p:sp>
-      <p:sp>
-        <p:nvSpPr>
-          <p:cNvPr id="10" name="Rectangle 9"/>
-          <p:cNvSpPr/>
-          <p:nvPr/>
-        </p:nvSpPr>
-        <p:spPr>
-          <a:xfrm>
-            <a:off x="685800" y="5623560"/>
-            <a:ext cx="10789920" cy="685800"/>
+            <a:ext cx="10789920" cy="822960"/>
           </a:xfrm>
           <a:prstGeom prst="rect">
             <a:avLst/>
@@ -15080,14 +16210,14 @@
       </p:sp>
       <p:sp>
         <p:nvSpPr>
-          <p:cNvPr id="11" name="TextBox 10"/>
+          <p:cNvPr id="9" name="TextBox 8"/>
           <p:cNvSpPr txBox="1"/>
           <p:nvPr/>
         </p:nvSpPr>
         <p:spPr>
           <a:xfrm>
-            <a:off x="914400" y="5742432"/>
-            <a:ext cx="10332720" cy="457200"/>
+            <a:off x="914400" y="1627632"/>
+            <a:ext cx="10332720" cy="685800"/>
           </a:xfrm>
           <a:prstGeom prst="rect">
             <a:avLst/>
@@ -15102,14 +16232,234 @@
           <a:p>
             <a:pPr algn="l"/>
             <a:r>
-              <a:rPr sz="1400" b="1" i="0">
+              <a:rPr sz="1500" b="1" i="0">
                 <a:solidFill>
                   <a:srgbClr val="FFFFFF"/>
                 </a:solidFill>
-                <a:latin typeface="Calibri"/>
-              </a:rPr>
-              <a:t>This gap — a time-sensitive, money-critical task left entirely to human memory and paper — is exactly what KopaAlert was built to close.</a:t>
-            </a:r>
+                <a:latin typeface="Calibri" panose="020F0502020204030204"/>
+              </a:rPr>
+              <a:t>General Objective: To design and develop a web-based system that automates debt recording and payment reminders for small businesses, replacing manual, paper-based debt tracking.</a:t>
+            </a:r>
+            <a:endParaRPr sz="1500" b="1" i="0">
+              <a:solidFill>
+                <a:srgbClr val="FFFFFF"/>
+              </a:solidFill>
+              <a:latin typeface="Calibri" panose="020F0502020204030204"/>
+            </a:endParaRPr>
+          </a:p>
+        </p:txBody>
+      </p:sp>
+      <p:sp>
+        <p:nvSpPr>
+          <p:cNvPr id="10" name="TextBox 9"/>
+          <p:cNvSpPr txBox="1"/>
+          <p:nvPr/>
+        </p:nvSpPr>
+        <p:spPr>
+          <a:xfrm>
+            <a:off x="685800" y="2606040"/>
+            <a:ext cx="5486400" cy="365760"/>
+          </a:xfrm>
+          <a:prstGeom prst="rect">
+            <a:avLst/>
+          </a:prstGeom>
+          <a:noFill/>
+        </p:spPr>
+        <p:txBody>
+          <a:bodyPr wrap="square">
+            <a:spAutoFit/>
+          </a:bodyPr>
+          <a:lstStyle/>
+          <a:p>
+            <a:pPr algn="l"/>
+            <a:r>
+              <a:rPr sz="1600" b="1" i="0">
+                <a:solidFill>
+                  <a:srgbClr val="0F766E"/>
+                </a:solidFill>
+                <a:latin typeface="Calibri" panose="020F0502020204030204"/>
+              </a:rPr>
+              <a:t>Specific Objectives</a:t>
+            </a:r>
+            <a:endParaRPr sz="1600" b="1" i="0">
+              <a:solidFill>
+                <a:srgbClr val="0F766E"/>
+              </a:solidFill>
+              <a:latin typeface="Calibri" panose="020F0502020204030204"/>
+            </a:endParaRPr>
+          </a:p>
+        </p:txBody>
+      </p:sp>
+      <p:sp>
+        <p:nvSpPr>
+          <p:cNvPr id="11" name="TextBox 10"/>
+          <p:cNvSpPr txBox="1"/>
+          <p:nvPr/>
+        </p:nvSpPr>
+        <p:spPr>
+          <a:xfrm>
+            <a:off x="685800" y="3017520"/>
+            <a:ext cx="10789920" cy="3200400"/>
+          </a:xfrm>
+          <a:prstGeom prst="rect">
+            <a:avLst/>
+          </a:prstGeom>
+          <a:noFill/>
+        </p:spPr>
+        <p:txBody>
+          <a:bodyPr wrap="square">
+            <a:spAutoFit/>
+          </a:bodyPr>
+          <a:lstStyle/>
+          <a:p>
+            <a:pPr>
+              <a:lnSpc>
+                <a:spcPct val="108000"/>
+              </a:lnSpc>
+              <a:spcAft>
+                <a:spcPts val="1000"/>
+              </a:spcAft>
+            </a:pPr>
+            <a:r>
+              <a:rPr sz="1550">
+                <a:solidFill>
+                  <a:srgbClr val="121D21"/>
+                </a:solidFill>
+                <a:latin typeface="Calibri" panose="020F0502020204030204"/>
+              </a:rPr>
+              <a:t>•  Allow business owners to register and manage customer (debtor) records digitally.</a:t>
+            </a:r>
+            <a:endParaRPr sz="1550">
+              <a:solidFill>
+                <a:srgbClr val="121D21"/>
+              </a:solidFill>
+              <a:latin typeface="Calibri" panose="020F0502020204030204"/>
+            </a:endParaRPr>
+          </a:p>
+          <a:p>
+            <a:pPr>
+              <a:lnSpc>
+                <a:spcPct val="108000"/>
+              </a:lnSpc>
+              <a:spcAft>
+                <a:spcPts val="1000"/>
+              </a:spcAft>
+            </a:pPr>
+            <a:r>
+              <a:rPr sz="1550">
+                <a:solidFill>
+                  <a:srgbClr val="121D21"/>
+                </a:solidFill>
+                <a:latin typeface="Calibri" panose="020F0502020204030204"/>
+              </a:rPr>
+              <a:t>•  Allow debts and payments to be recorded accurately, in real time, from any device.</a:t>
+            </a:r>
+            <a:endParaRPr sz="1550">
+              <a:solidFill>
+                <a:srgbClr val="121D21"/>
+              </a:solidFill>
+              <a:latin typeface="Calibri" panose="020F0502020204030204"/>
+            </a:endParaRPr>
+          </a:p>
+          <a:p>
+            <a:pPr>
+              <a:lnSpc>
+                <a:spcPct val="108000"/>
+              </a:lnSpc>
+              <a:spcAft>
+                <a:spcPts val="1000"/>
+              </a:spcAft>
+            </a:pPr>
+            <a:r>
+              <a:rPr sz="1550">
+                <a:solidFill>
+                  <a:srgbClr val="121D21"/>
+                </a:solidFill>
+                <a:latin typeface="Calibri" panose="020F0502020204030204"/>
+              </a:rPr>
+              <a:t>•  Automatically send SMS and email payment reminders as due dates approach or lapse.</a:t>
+            </a:r>
+            <a:endParaRPr sz="1550">
+              <a:solidFill>
+                <a:srgbClr val="121D21"/>
+              </a:solidFill>
+              <a:latin typeface="Calibri" panose="020F0502020204030204"/>
+            </a:endParaRPr>
+          </a:p>
+          <a:p>
+            <a:pPr>
+              <a:lnSpc>
+                <a:spcPct val="108000"/>
+              </a:lnSpc>
+              <a:spcAft>
+                <a:spcPts val="1000"/>
+              </a:spcAft>
+            </a:pPr>
+            <a:r>
+              <a:rPr sz="1550">
+                <a:solidFill>
+                  <a:srgbClr val="121D21"/>
+                </a:solidFill>
+                <a:latin typeface="Calibri" panose="020F0502020204030204"/>
+              </a:rPr>
+              <a:t>•  Provide a dashboard giving owners visibility into outstanding debts, at-risk customers, and payment trends.</a:t>
+            </a:r>
+            <a:endParaRPr sz="1550">
+              <a:solidFill>
+                <a:srgbClr val="121D21"/>
+              </a:solidFill>
+              <a:latin typeface="Calibri" panose="020F0502020204030204"/>
+            </a:endParaRPr>
+          </a:p>
+          <a:p>
+            <a:pPr>
+              <a:lnSpc>
+                <a:spcPct val="108000"/>
+              </a:lnSpc>
+              <a:spcAft>
+                <a:spcPts val="1000"/>
+              </a:spcAft>
+            </a:pPr>
+            <a:r>
+              <a:rPr sz="1550">
+                <a:solidFill>
+                  <a:srgbClr val="121D21"/>
+                </a:solidFill>
+                <a:latin typeface="Calibri" panose="020F0502020204030204"/>
+              </a:rPr>
+              <a:t>•  Secure each business's data with authentication and row-level access control, so one business can never see another's records.</a:t>
+            </a:r>
+            <a:endParaRPr sz="1550">
+              <a:solidFill>
+                <a:srgbClr val="121D21"/>
+              </a:solidFill>
+              <a:latin typeface="Calibri" panose="020F0502020204030204"/>
+            </a:endParaRPr>
+          </a:p>
+          <a:p>
+            <a:pPr>
+              <a:lnSpc>
+                <a:spcPct val="108000"/>
+              </a:lnSpc>
+              <a:spcAft>
+                <a:spcPts val="1000"/>
+              </a:spcAft>
+            </a:pPr>
+            <a:r>
+              <a:rPr sz="1550">
+                <a:solidFill>
+                  <a:srgbClr val="121D21"/>
+                </a:solidFill>
+                <a:latin typeface="Calibri" panose="020F0502020204030204"/>
+              </a:rPr>
+              <a:t>•  Evaluate the system through structured testing to confirm it behaves reliably under real conditions.</a:t>
+            </a:r>
+            <a:endParaRPr sz="1550">
+              <a:solidFill>
+                <a:srgbClr val="121D21"/>
+              </a:solidFill>
+              <a:latin typeface="Calibri" panose="020F0502020204030204"/>
+            </a:endParaRPr>
           </a:p>
         </p:txBody>
       </p:sp>
@@ -15121,8 +16471,8 @@
 </p:sld>
 </file>
 
-<file path=ppt/slides/slide6.xml><?xml version="1.0" encoding="utf-8"?>
-<p:sld xmlns:a="http://schemas.openxmlformats.org/drawingml/2006/main" xmlns:p="http://schemas.openxmlformats.org/presentationml/2006/main" xmlns:r="http://schemas.openxmlformats.org/officeDocument/2006/relationships">
+<file path=ppt/slides/slide7.xml><?xml version="1.0" encoding="utf-8"?>
+<p:sld xmlns:a="http://schemas.openxmlformats.org/drawingml/2006/main" xmlns:r="http://schemas.openxmlformats.org/officeDocument/2006/relationships" xmlns:p="http://schemas.openxmlformats.org/presentationml/2006/main">
   <p:cSld>
     <p:bg>
       <p:bgPr>
@@ -15211,10 +16561,16 @@
                 <a:solidFill>
                   <a:srgbClr val="E69A1F"/>
                 </a:solidFill>
-                <a:latin typeface="Calibri"/>
+                <a:latin typeface="Calibri" panose="020F0502020204030204"/>
               </a:rPr>
               <a:t>CHAPTER ONE</a:t>
             </a:r>
+            <a:endParaRPr sz="1300" b="1" i="0">
+              <a:solidFill>
+                <a:srgbClr val="E69A1F"/>
+              </a:solidFill>
+              <a:latin typeface="Calibri" panose="020F0502020204030204"/>
+            </a:endParaRPr>
           </a:p>
         </p:txBody>
       </p:sp>
@@ -15246,10 +16602,16 @@
                 <a:solidFill>
                   <a:srgbClr val="121D21"/>
                 </a:solidFill>
-                <a:latin typeface="Calibri"/>
-              </a:rPr>
-              <a:t>Objectives</a:t>
-            </a:r>
+                <a:latin typeface="Calibri" panose="020F0502020204030204"/>
+              </a:rPr>
+              <a:t>Vision</a:t>
+            </a:r>
+            <a:endParaRPr sz="3000" b="1" i="0">
+              <a:solidFill>
+                <a:srgbClr val="121D21"/>
+              </a:solidFill>
+              <a:latin typeface="Calibri" panose="020F0502020204030204"/>
+            </a:endParaRPr>
           </a:p>
         </p:txBody>
       </p:sp>
@@ -15325,10 +16687,16 @@
                 <a:solidFill>
                   <a:srgbClr val="4B5A5E"/>
                 </a:solidFill>
-                <a:latin typeface="Calibri"/>
+                <a:latin typeface="Calibri" panose="020F0502020204030204"/>
               </a:rPr>
               <a:t>KopaAlert — Stanley Murangiri</a:t>
             </a:r>
+            <a:endParaRPr sz="1000" b="0" i="0">
+              <a:solidFill>
+                <a:srgbClr val="4B5A5E"/>
+              </a:solidFill>
+              <a:latin typeface="Calibri" panose="020F0502020204030204"/>
+            </a:endParaRPr>
           </a:p>
         </p:txBody>
       </p:sp>
@@ -15360,10 +16728,16 @@
                 <a:solidFill>
                   <a:srgbClr val="4B5A5E"/>
                 </a:solidFill>
-                <a:latin typeface="Calibri"/>
-              </a:rPr>
-              <a:t>6</a:t>
-            </a:r>
+                <a:latin typeface="Calibri" panose="020F0502020204030204"/>
+              </a:rPr>
+              <a:t>7</a:t>
+            </a:r>
+            <a:endParaRPr sz="1000" b="0" i="0">
+              <a:solidFill>
+                <a:srgbClr val="4B5A5E"/>
+              </a:solidFill>
+              <a:latin typeface="Calibri" panose="020F0502020204030204"/>
+            </a:endParaRPr>
           </a:p>
         </p:txBody>
       </p:sp>
@@ -15375,14 +16749,14 @@
         </p:nvSpPr>
         <p:spPr>
           <a:xfrm>
-            <a:off x="685800" y="1554480"/>
-            <a:ext cx="10789920" cy="822960"/>
+            <a:off x="1463040" y="2011680"/>
+            <a:ext cx="9235440" cy="3017520"/>
           </a:xfrm>
           <a:prstGeom prst="rect">
             <a:avLst/>
           </a:prstGeom>
           <a:solidFill>
-            <a:srgbClr val="0F766E"/>
+            <a:srgbClr val="FFFFFF"/>
           </a:solidFill>
           <a:ln>
             <a:noFill/>
@@ -15413,14 +16787,58 @@
       </p:sp>
       <p:sp>
         <p:nvSpPr>
-          <p:cNvPr id="9" name="TextBox 8"/>
+          <p:cNvPr id="9" name="Rectangle 8"/>
+          <p:cNvSpPr/>
+          <p:nvPr/>
+        </p:nvSpPr>
+        <p:spPr>
+          <a:xfrm>
+            <a:off x="1463040" y="2011680"/>
+            <a:ext cx="9235440" cy="73152"/>
+          </a:xfrm>
+          <a:prstGeom prst="rect">
+            <a:avLst/>
+          </a:prstGeom>
+          <a:solidFill>
+            <a:srgbClr val="E69A1F"/>
+          </a:solidFill>
+          <a:ln>
+            <a:noFill/>
+          </a:ln>
+          <a:effectLst/>
+        </p:spPr>
+        <p:style>
+          <a:lnRef idx="1">
+            <a:schemeClr val="accent1"/>
+          </a:lnRef>
+          <a:fillRef idx="3">
+            <a:schemeClr val="accent1"/>
+          </a:fillRef>
+          <a:effectRef idx="2">
+            <a:schemeClr val="accent1"/>
+          </a:effectRef>
+          <a:fontRef idx="minor">
+            <a:schemeClr val="lt1"/>
+          </a:fontRef>
+        </p:style>
+        <p:txBody>
+          <a:bodyPr rtlCol="0" anchor="ctr"/>
+          <a:lstStyle/>
+          <a:p>
+            <a:pPr algn="ctr"/>
+          </a:p>
+        </p:txBody>
+      </p:sp>
+      <p:sp>
+        <p:nvSpPr>
+          <p:cNvPr id="10" name="TextBox 9"/>
           <p:cNvSpPr txBox="1"/>
           <p:nvPr/>
         </p:nvSpPr>
         <p:spPr>
           <a:xfrm>
-            <a:off x="914400" y="1627632"/>
-            <a:ext cx="10332720" cy="685800"/>
+            <a:off x="1920240" y="2468880"/>
+            <a:ext cx="8321040" cy="2103120"/>
           </a:xfrm>
           <a:prstGeom prst="rect">
             <a:avLst/>
@@ -15433,188 +16851,26 @@
           </a:bodyPr>
           <a:lstStyle/>
           <a:p>
-            <a:pPr algn="l"/>
-            <a:r>
-              <a:rPr sz="1500" b="1" i="0">
-                <a:solidFill>
-                  <a:srgbClr val="FFFFFF"/>
-                </a:solidFill>
-                <a:latin typeface="Calibri"/>
-              </a:rPr>
-              <a:t>General Objective: To design and develop a web-based system that automates debt recording and payment reminders for small businesses, replacing manual, paper-based debt tracking.</a:t>
-            </a:r>
-          </a:p>
-        </p:txBody>
-      </p:sp>
-      <p:sp>
-        <p:nvSpPr>
-          <p:cNvPr id="10" name="TextBox 9"/>
-          <p:cNvSpPr txBox="1"/>
-          <p:nvPr/>
-        </p:nvSpPr>
-        <p:spPr>
-          <a:xfrm>
-            <a:off x="685800" y="2606040"/>
-            <a:ext cx="5486400" cy="365760"/>
-          </a:xfrm>
-          <a:prstGeom prst="rect">
-            <a:avLst/>
-          </a:prstGeom>
-          <a:noFill/>
-        </p:spPr>
-        <p:txBody>
-          <a:bodyPr wrap="square">
-            <a:spAutoFit/>
-          </a:bodyPr>
-          <a:lstStyle/>
-          <a:p>
-            <a:pPr algn="l"/>
-            <a:r>
-              <a:rPr sz="1600" b="1" i="0">
-                <a:solidFill>
-                  <a:srgbClr val="0F766E"/>
-                </a:solidFill>
-                <a:latin typeface="Calibri"/>
-              </a:rPr>
-              <a:t>Specific Objectives</a:t>
-            </a:r>
-          </a:p>
-        </p:txBody>
-      </p:sp>
-      <p:sp>
-        <p:nvSpPr>
-          <p:cNvPr id="11" name="TextBox 10"/>
-          <p:cNvSpPr txBox="1"/>
-          <p:nvPr/>
-        </p:nvSpPr>
-        <p:spPr>
-          <a:xfrm>
-            <a:off x="685800" y="3017520"/>
-            <a:ext cx="10789920" cy="3200400"/>
-          </a:xfrm>
-          <a:prstGeom prst="rect">
-            <a:avLst/>
-          </a:prstGeom>
-          <a:noFill/>
-        </p:spPr>
-        <p:txBody>
-          <a:bodyPr wrap="square">
-            <a:spAutoFit/>
-          </a:bodyPr>
-          <a:lstStyle/>
-          <a:p>
-            <a:pPr>
+            <a:pPr algn="ctr">
               <a:lnSpc>
-                <a:spcPct val="108000"/>
+                <a:spcPct val="130000"/>
               </a:lnSpc>
-              <a:spcAft>
-                <a:spcPts val="1000"/>
-              </a:spcAft>
             </a:pPr>
             <a:r>
-              <a:rPr sz="1550">
+              <a:rPr sz="2000" b="0" i="1">
                 <a:solidFill>
                   <a:srgbClr val="121D21"/>
                 </a:solidFill>
-                <a:latin typeface="Calibri"/>
-              </a:rPr>
-              <a:t>•  Allow business owners to register and manage customer (debtor) records digitally.</a:t>
-            </a:r>
-          </a:p>
-          <a:p>
-            <a:pPr>
-              <a:lnSpc>
-                <a:spcPct val="108000"/>
-              </a:lnSpc>
-              <a:spcAft>
-                <a:spcPts val="1000"/>
-              </a:spcAft>
-            </a:pPr>
-            <a:r>
-              <a:rPr sz="1550">
-                <a:solidFill>
-                  <a:srgbClr val="121D21"/>
-                </a:solidFill>
-                <a:latin typeface="Calibri"/>
-              </a:rPr>
-              <a:t>•  Allow debts and payments to be recorded accurately, in real time, from any device.</a:t>
-            </a:r>
-          </a:p>
-          <a:p>
-            <a:pPr>
-              <a:lnSpc>
-                <a:spcPct val="108000"/>
-              </a:lnSpc>
-              <a:spcAft>
-                <a:spcPts val="1000"/>
-              </a:spcAft>
-            </a:pPr>
-            <a:r>
-              <a:rPr sz="1550">
-                <a:solidFill>
-                  <a:srgbClr val="121D21"/>
-                </a:solidFill>
-                <a:latin typeface="Calibri"/>
-              </a:rPr>
-              <a:t>•  Automatically send SMS and email payment reminders as due dates approach or lapse.</a:t>
-            </a:r>
-          </a:p>
-          <a:p>
-            <a:pPr>
-              <a:lnSpc>
-                <a:spcPct val="108000"/>
-              </a:lnSpc>
-              <a:spcAft>
-                <a:spcPts val="1000"/>
-              </a:spcAft>
-            </a:pPr>
-            <a:r>
-              <a:rPr sz="1550">
-                <a:solidFill>
-                  <a:srgbClr val="121D21"/>
-                </a:solidFill>
-                <a:latin typeface="Calibri"/>
-              </a:rPr>
-              <a:t>•  Provide a dashboard giving owners visibility into outstanding debts, at-risk customers, and payment trends.</a:t>
-            </a:r>
-          </a:p>
-          <a:p>
-            <a:pPr>
-              <a:lnSpc>
-                <a:spcPct val="108000"/>
-              </a:lnSpc>
-              <a:spcAft>
-                <a:spcPts val="1000"/>
-              </a:spcAft>
-            </a:pPr>
-            <a:r>
-              <a:rPr sz="1550">
-                <a:solidFill>
-                  <a:srgbClr val="121D21"/>
-                </a:solidFill>
-                <a:latin typeface="Calibri"/>
-              </a:rPr>
-              <a:t>•  Secure each business's data with authentication and row-level access control, so one business can never see another's records.</a:t>
-            </a:r>
-          </a:p>
-          <a:p>
-            <a:pPr>
-              <a:lnSpc>
-                <a:spcPct val="108000"/>
-              </a:lnSpc>
-              <a:spcAft>
-                <a:spcPts val="1000"/>
-              </a:spcAft>
-            </a:pPr>
-            <a:r>
-              <a:rPr sz="1550">
-                <a:solidFill>
-                  <a:srgbClr val="121D21"/>
-                </a:solidFill>
-                <a:latin typeface="Calibri"/>
-              </a:rPr>
-              <a:t>•  Evaluate the system through structured testing to confirm it behaves reliably under real conditions.</a:t>
-            </a:r>
+                <a:latin typeface="Calibri" panose="020F0502020204030204"/>
+              </a:rPr>
+              <a:t>My vision for KopaAlert is a Kenya where no small business loses money simply because a debt was forgotten — where every shopkeeper, salon owner, or trader, no matter how small the business, has access to the same disciplined, automated financial follow-up that only large companies could once afford.</a:t>
+            </a:r>
+            <a:endParaRPr sz="2000" b="0" i="1">
+              <a:solidFill>
+                <a:srgbClr val="121D21"/>
+              </a:solidFill>
+              <a:latin typeface="Calibri" panose="020F0502020204030204"/>
+            </a:endParaRPr>
           </a:p>
         </p:txBody>
       </p:sp>
@@ -15626,8 +16882,8 @@
 </p:sld>
 </file>
 
-<file path=ppt/slides/slide7.xml><?xml version="1.0" encoding="utf-8"?>
-<p:sld xmlns:a="http://schemas.openxmlformats.org/drawingml/2006/main" xmlns:p="http://schemas.openxmlformats.org/presentationml/2006/main" xmlns:r="http://schemas.openxmlformats.org/officeDocument/2006/relationships">
+<file path=ppt/slides/slide8.xml><?xml version="1.0" encoding="utf-8"?>
+<p:sld xmlns:a="http://schemas.openxmlformats.org/drawingml/2006/main" xmlns:r="http://schemas.openxmlformats.org/officeDocument/2006/relationships" xmlns:p="http://schemas.openxmlformats.org/presentationml/2006/main">
   <p:cSld>
     <p:bg>
       <p:bgPr>
@@ -15716,10 +16972,16 @@
                 <a:solidFill>
                   <a:srgbClr val="E69A1F"/>
                 </a:solidFill>
-                <a:latin typeface="Calibri"/>
+                <a:latin typeface="Calibri" panose="020F0502020204030204"/>
               </a:rPr>
               <a:t>CHAPTER ONE</a:t>
             </a:r>
+            <a:endParaRPr sz="1300" b="1" i="0">
+              <a:solidFill>
+                <a:srgbClr val="E69A1F"/>
+              </a:solidFill>
+              <a:latin typeface="Calibri" panose="020F0502020204030204"/>
+            </a:endParaRPr>
           </a:p>
         </p:txBody>
       </p:sp>
@@ -15751,10 +17013,16 @@
                 <a:solidFill>
                   <a:srgbClr val="121D21"/>
                 </a:solidFill>
-                <a:latin typeface="Calibri"/>
-              </a:rPr>
-              <a:t>Vision</a:t>
-            </a:r>
+                <a:latin typeface="Calibri" panose="020F0502020204030204"/>
+              </a:rPr>
+              <a:t>Scope of the Project</a:t>
+            </a:r>
+            <a:endParaRPr sz="3000" b="1" i="0">
+              <a:solidFill>
+                <a:srgbClr val="121D21"/>
+              </a:solidFill>
+              <a:latin typeface="Calibri" panose="020F0502020204030204"/>
+            </a:endParaRPr>
           </a:p>
         </p:txBody>
       </p:sp>
@@ -15830,10 +17098,16 @@
                 <a:solidFill>
                   <a:srgbClr val="4B5A5E"/>
                 </a:solidFill>
-                <a:latin typeface="Calibri"/>
+                <a:latin typeface="Calibri" panose="020F0502020204030204"/>
               </a:rPr>
               <a:t>KopaAlert — Stanley Murangiri</a:t>
             </a:r>
+            <a:endParaRPr sz="1000" b="0" i="0">
+              <a:solidFill>
+                <a:srgbClr val="4B5A5E"/>
+              </a:solidFill>
+              <a:latin typeface="Calibri" panose="020F0502020204030204"/>
+            </a:endParaRPr>
           </a:p>
         </p:txBody>
       </p:sp>
@@ -15865,98 +17139,280 @@
                 <a:solidFill>
                   <a:srgbClr val="4B5A5E"/>
                 </a:solidFill>
-                <a:latin typeface="Calibri"/>
-              </a:rPr>
-              <a:t>7</a:t>
-            </a:r>
-          </a:p>
-        </p:txBody>
-      </p:sp>
-      <p:sp>
-        <p:nvSpPr>
-          <p:cNvPr id="8" name="Rectangle 7"/>
-          <p:cNvSpPr/>
-          <p:nvPr/>
-        </p:nvSpPr>
-        <p:spPr>
-          <a:xfrm>
-            <a:off x="1463040" y="2011680"/>
-            <a:ext cx="9235440" cy="3017520"/>
-          </a:xfrm>
-          <a:prstGeom prst="rect">
-            <a:avLst/>
-          </a:prstGeom>
-          <a:solidFill>
-            <a:srgbClr val="FFFFFF"/>
-          </a:solidFill>
-          <a:ln>
-            <a:noFill/>
-          </a:ln>
-          <a:effectLst/>
-        </p:spPr>
-        <p:style>
-          <a:lnRef idx="1">
-            <a:schemeClr val="accent1"/>
-          </a:lnRef>
-          <a:fillRef idx="3">
-            <a:schemeClr val="accent1"/>
-          </a:fillRef>
-          <a:effectRef idx="2">
-            <a:schemeClr val="accent1"/>
-          </a:effectRef>
-          <a:fontRef idx="minor">
-            <a:schemeClr val="lt1"/>
-          </a:fontRef>
-        </p:style>
-        <p:txBody>
-          <a:bodyPr rtlCol="0" anchor="ctr"/>
-          <a:lstStyle/>
-          <a:p>
-            <a:pPr algn="ctr"/>
-          </a:p>
-        </p:txBody>
-      </p:sp>
-      <p:sp>
-        <p:nvSpPr>
-          <p:cNvPr id="9" name="Rectangle 8"/>
-          <p:cNvSpPr/>
-          <p:nvPr/>
-        </p:nvSpPr>
-        <p:spPr>
-          <a:xfrm>
-            <a:off x="1463040" y="2011680"/>
-            <a:ext cx="9235440" cy="73152"/>
-          </a:xfrm>
-          <a:prstGeom prst="rect">
-            <a:avLst/>
-          </a:prstGeom>
-          <a:solidFill>
-            <a:srgbClr val="E69A1F"/>
-          </a:solidFill>
-          <a:ln>
-            <a:noFill/>
-          </a:ln>
-          <a:effectLst/>
-        </p:spPr>
-        <p:style>
-          <a:lnRef idx="1">
-            <a:schemeClr val="accent1"/>
-          </a:lnRef>
-          <a:fillRef idx="3">
-            <a:schemeClr val="accent1"/>
-          </a:fillRef>
-          <a:effectRef idx="2">
-            <a:schemeClr val="accent1"/>
-          </a:effectRef>
-          <a:fontRef idx="minor">
-            <a:schemeClr val="lt1"/>
-          </a:fontRef>
-        </p:style>
-        <p:txBody>
-          <a:bodyPr rtlCol="0" anchor="ctr"/>
-          <a:lstStyle/>
-          <a:p>
-            <a:pPr algn="ctr"/>
+                <a:latin typeface="Calibri" panose="020F0502020204030204"/>
+              </a:rPr>
+              <a:t>8</a:t>
+            </a:r>
+            <a:endParaRPr sz="1000" b="0" i="0">
+              <a:solidFill>
+                <a:srgbClr val="4B5A5E"/>
+              </a:solidFill>
+              <a:latin typeface="Calibri" panose="020F0502020204030204"/>
+            </a:endParaRPr>
+          </a:p>
+        </p:txBody>
+      </p:sp>
+      <p:sp>
+        <p:nvSpPr>
+          <p:cNvPr id="8" name="TextBox 7"/>
+          <p:cNvSpPr txBox="1"/>
+          <p:nvPr/>
+        </p:nvSpPr>
+        <p:spPr>
+          <a:xfrm>
+            <a:off x="685800" y="1572768"/>
+            <a:ext cx="5120640" cy="365760"/>
+          </a:xfrm>
+          <a:prstGeom prst="rect">
+            <a:avLst/>
+          </a:prstGeom>
+          <a:noFill/>
+        </p:spPr>
+        <p:txBody>
+          <a:bodyPr wrap="square">
+            <a:spAutoFit/>
+          </a:bodyPr>
+          <a:lstStyle/>
+          <a:p>
+            <a:pPr algn="l"/>
+            <a:r>
+              <a:rPr sz="1700" b="1" i="0">
+                <a:solidFill>
+                  <a:srgbClr val="0F766E"/>
+                </a:solidFill>
+                <a:latin typeface="Calibri" panose="020F0502020204030204"/>
+              </a:rPr>
+              <a:t>In Scope</a:t>
+            </a:r>
+            <a:endParaRPr sz="1700" b="1" i="0">
+              <a:solidFill>
+                <a:srgbClr val="0F766E"/>
+              </a:solidFill>
+              <a:latin typeface="Calibri" panose="020F0502020204030204"/>
+            </a:endParaRPr>
+          </a:p>
+        </p:txBody>
+      </p:sp>
+      <p:sp>
+        <p:nvSpPr>
+          <p:cNvPr id="9" name="TextBox 8"/>
+          <p:cNvSpPr txBox="1"/>
+          <p:nvPr/>
+        </p:nvSpPr>
+        <p:spPr>
+          <a:xfrm>
+            <a:off x="685800" y="2011680"/>
+            <a:ext cx="5394960" cy="4206240"/>
+          </a:xfrm>
+          <a:prstGeom prst="rect">
+            <a:avLst/>
+          </a:prstGeom>
+          <a:noFill/>
+        </p:spPr>
+        <p:txBody>
+          <a:bodyPr wrap="square">
+            <a:spAutoFit/>
+          </a:bodyPr>
+          <a:lstStyle/>
+          <a:p>
+            <a:pPr>
+              <a:lnSpc>
+                <a:spcPct val="108000"/>
+              </a:lnSpc>
+              <a:spcAft>
+                <a:spcPts val="900"/>
+              </a:spcAft>
+            </a:pPr>
+            <a:r>
+              <a:rPr sz="1350">
+                <a:solidFill>
+                  <a:srgbClr val="121D21"/>
+                </a:solidFill>
+                <a:latin typeface="Calibri" panose="020F0502020204030204"/>
+              </a:rPr>
+              <a:t>•  Customer (debtor) registration and management</a:t>
+            </a:r>
+            <a:endParaRPr sz="1350">
+              <a:solidFill>
+                <a:srgbClr val="121D21"/>
+              </a:solidFill>
+              <a:latin typeface="Calibri" panose="020F0502020204030204"/>
+            </a:endParaRPr>
+          </a:p>
+          <a:p>
+            <a:pPr>
+              <a:lnSpc>
+                <a:spcPct val="108000"/>
+              </a:lnSpc>
+              <a:spcAft>
+                <a:spcPts val="900"/>
+              </a:spcAft>
+            </a:pPr>
+            <a:r>
+              <a:rPr sz="1350">
+                <a:solidFill>
+                  <a:srgbClr val="121D21"/>
+                </a:solidFill>
+                <a:latin typeface="Calibri" panose="020F0502020204030204"/>
+              </a:rPr>
+              <a:t>•  Debt recording, due dates, and payment logging</a:t>
+            </a:r>
+            <a:endParaRPr sz="1350">
+              <a:solidFill>
+                <a:srgbClr val="121D21"/>
+              </a:solidFill>
+              <a:latin typeface="Calibri" panose="020F0502020204030204"/>
+            </a:endParaRPr>
+          </a:p>
+          <a:p>
+            <a:pPr>
+              <a:lnSpc>
+                <a:spcPct val="108000"/>
+              </a:lnSpc>
+              <a:spcAft>
+                <a:spcPts val="900"/>
+              </a:spcAft>
+            </a:pPr>
+            <a:r>
+              <a:rPr sz="1350">
+                <a:solidFill>
+                  <a:srgbClr val="121D21"/>
+                </a:solidFill>
+                <a:latin typeface="Calibri" panose="020F0502020204030204"/>
+              </a:rPr>
+              <a:t>•  Automated SMS reminders (Africa's Talking) and email reminders (Resend)</a:t>
+            </a:r>
+            <a:endParaRPr sz="1350">
+              <a:solidFill>
+                <a:srgbClr val="121D21"/>
+              </a:solidFill>
+              <a:latin typeface="Calibri" panose="020F0502020204030204"/>
+            </a:endParaRPr>
+          </a:p>
+          <a:p>
+            <a:pPr>
+              <a:lnSpc>
+                <a:spcPct val="108000"/>
+              </a:lnSpc>
+              <a:spcAft>
+                <a:spcPts val="900"/>
+              </a:spcAft>
+            </a:pPr>
+            <a:r>
+              <a:rPr sz="1350">
+                <a:solidFill>
+                  <a:srgbClr val="121D21"/>
+                </a:solidFill>
+                <a:latin typeface="Calibri" panose="020F0502020204030204"/>
+              </a:rPr>
+              <a:t>•  Customer payment-behaviour rating and auto-blacklisting of chronic defaulters</a:t>
+            </a:r>
+            <a:endParaRPr sz="1350">
+              <a:solidFill>
+                <a:srgbClr val="121D21"/>
+              </a:solidFill>
+              <a:latin typeface="Calibri" panose="020F0502020204030204"/>
+            </a:endParaRPr>
+          </a:p>
+          <a:p>
+            <a:pPr>
+              <a:lnSpc>
+                <a:spcPct val="108000"/>
+              </a:lnSpc>
+              <a:spcAft>
+                <a:spcPts val="900"/>
+              </a:spcAft>
+            </a:pPr>
+            <a:r>
+              <a:rPr sz="1350">
+                <a:solidFill>
+                  <a:srgbClr val="121D21"/>
+                </a:solidFill>
+                <a:latin typeface="Calibri" panose="020F0502020204030204"/>
+              </a:rPr>
+              <a:t>•  Business team management with staff roles and permissions</a:t>
+            </a:r>
+            <a:endParaRPr sz="1350">
+              <a:solidFill>
+                <a:srgbClr val="121D21"/>
+              </a:solidFill>
+              <a:latin typeface="Calibri" panose="020F0502020204030204"/>
+            </a:endParaRPr>
+          </a:p>
+          <a:p>
+            <a:pPr>
+              <a:lnSpc>
+                <a:spcPct val="108000"/>
+              </a:lnSpc>
+              <a:spcAft>
+                <a:spcPts val="900"/>
+              </a:spcAft>
+            </a:pPr>
+            <a:r>
+              <a:rPr sz="1350">
+                <a:solidFill>
+                  <a:srgbClr val="121D21"/>
+                </a:solidFill>
+                <a:latin typeface="Calibri" panose="020F0502020204030204"/>
+              </a:rPr>
+              <a:t>•  Subscription billing (monthly and one-time lifetime plans)</a:t>
+            </a:r>
+            <a:endParaRPr sz="1350">
+              <a:solidFill>
+                <a:srgbClr val="121D21"/>
+              </a:solidFill>
+              <a:latin typeface="Calibri" panose="020F0502020204030204"/>
+            </a:endParaRPr>
+          </a:p>
+          <a:p>
+            <a:pPr>
+              <a:lnSpc>
+                <a:spcPct val="108000"/>
+              </a:lnSpc>
+              <a:spcAft>
+                <a:spcPts val="900"/>
+              </a:spcAft>
+            </a:pPr>
+            <a:r>
+              <a:rPr sz="1350">
+                <a:solidFill>
+                  <a:srgbClr val="121D21"/>
+                </a:solidFill>
+                <a:latin typeface="Calibri" panose="020F0502020204030204"/>
+              </a:rPr>
+              <a:t>•  A platform admin console to approve new businesses and audit activity</a:t>
+            </a:r>
+            <a:endParaRPr sz="1350">
+              <a:solidFill>
+                <a:srgbClr val="121D21"/>
+              </a:solidFill>
+              <a:latin typeface="Calibri" panose="020F0502020204030204"/>
+            </a:endParaRPr>
+          </a:p>
+          <a:p>
+            <a:pPr>
+              <a:lnSpc>
+                <a:spcPct val="108000"/>
+              </a:lnSpc>
+              <a:spcAft>
+                <a:spcPts val="900"/>
+              </a:spcAft>
+            </a:pPr>
+            <a:r>
+              <a:rPr sz="1350">
+                <a:solidFill>
+                  <a:srgbClr val="121D21"/>
+                </a:solidFill>
+                <a:latin typeface="Calibri" panose="020F0502020204030204"/>
+              </a:rPr>
+              <a:t>•  Reporting and analytics on debts, payments, customers, and SMS delivery</a:t>
+            </a:r>
+            <a:endParaRPr sz="1350">
+              <a:solidFill>
+                <a:srgbClr val="121D21"/>
+              </a:solidFill>
+              <a:latin typeface="Calibri" panose="020F0502020204030204"/>
+            </a:endParaRPr>
           </a:p>
         </p:txBody>
       </p:sp>
@@ -15968,8 +17424,8 @@
         </p:nvSpPr>
         <p:spPr>
           <a:xfrm>
-            <a:off x="1920240" y="2468880"/>
-            <a:ext cx="8321040" cy="2103120"/>
+            <a:off x="6309360" y="1572768"/>
+            <a:ext cx="5120640" cy="365760"/>
           </a:xfrm>
           <a:prstGeom prst="rect">
             <a:avLst/>
@@ -15977,25 +17433,175 @@
           <a:noFill/>
         </p:spPr>
         <p:txBody>
-          <a:bodyPr wrap="square" anchor="ctr">
+          <a:bodyPr wrap="square">
             <a:spAutoFit/>
           </a:bodyPr>
           <a:lstStyle/>
           <a:p>
-            <a:pPr algn="ctr">
+            <a:pPr algn="l"/>
+            <a:r>
+              <a:rPr sz="1700" b="1" i="0">
+                <a:solidFill>
+                  <a:srgbClr val="E69A1F"/>
+                </a:solidFill>
+                <a:latin typeface="Calibri" panose="020F0502020204030204"/>
+              </a:rPr>
+              <a:t>Out of Scope (for now)</a:t>
+            </a:r>
+            <a:endParaRPr sz="1700" b="1" i="0">
+              <a:solidFill>
+                <a:srgbClr val="E69A1F"/>
+              </a:solidFill>
+              <a:latin typeface="Calibri" panose="020F0502020204030204"/>
+            </a:endParaRPr>
+          </a:p>
+        </p:txBody>
+      </p:sp>
+      <p:sp>
+        <p:nvSpPr>
+          <p:cNvPr id="11" name="TextBox 10"/>
+          <p:cNvSpPr txBox="1"/>
+          <p:nvPr/>
+        </p:nvSpPr>
+        <p:spPr>
+          <a:xfrm>
+            <a:off x="6309360" y="2011680"/>
+            <a:ext cx="5394960" cy="4206240"/>
+          </a:xfrm>
+          <a:prstGeom prst="rect">
+            <a:avLst/>
+          </a:prstGeom>
+          <a:noFill/>
+        </p:spPr>
+        <p:txBody>
+          <a:bodyPr wrap="square">
+            <a:spAutoFit/>
+          </a:bodyPr>
+          <a:lstStyle/>
+          <a:p>
+            <a:pPr>
               <a:lnSpc>
-                <a:spcPct val="130000"/>
+                <a:spcPct val="108000"/>
               </a:lnSpc>
+              <a:spcAft>
+                <a:spcPts val="900"/>
+              </a:spcAft>
             </a:pPr>
             <a:r>
-              <a:rPr sz="2000" b="0" i="1">
+              <a:rPr sz="1350">
                 <a:solidFill>
                   <a:srgbClr val="121D21"/>
                 </a:solidFill>
-                <a:latin typeface="Calibri"/>
-              </a:rPr>
-              <a:t>My vision for KopaAlert is a Kenya where no small business loses money simply because a debt was forgotten — where every shopkeeper, salon owner, or trader, no matter how small the business, has access to the same disciplined, automated financial follow-up that only large companies could once afford.</a:t>
-            </a:r>
+                <a:latin typeface="Calibri" panose="020F0502020204030204"/>
+              </a:rPr>
+              <a:t>•  Direct, automated payment collection (e.g. M-Pesa STK Push) — payments are currently recorded manually once received</a:t>
+            </a:r>
+            <a:endParaRPr sz="1350">
+              <a:solidFill>
+                <a:srgbClr val="121D21"/>
+              </a:solidFill>
+              <a:latin typeface="Calibri" panose="020F0502020204030204"/>
+            </a:endParaRPr>
+          </a:p>
+          <a:p>
+            <a:pPr>
+              <a:lnSpc>
+                <a:spcPct val="108000"/>
+              </a:lnSpc>
+              <a:spcAft>
+                <a:spcPts val="900"/>
+              </a:spcAft>
+            </a:pPr>
+            <a:r>
+              <a:rPr sz="1350">
+                <a:solidFill>
+                  <a:srgbClr val="121D21"/>
+                </a:solidFill>
+                <a:latin typeface="Calibri" panose="020F0502020204030204"/>
+              </a:rPr>
+              <a:t>•  Point-of-sale or inventory management</a:t>
+            </a:r>
+            <a:endParaRPr sz="1350">
+              <a:solidFill>
+                <a:srgbClr val="121D21"/>
+              </a:solidFill>
+              <a:latin typeface="Calibri" panose="020F0502020204030204"/>
+            </a:endParaRPr>
+          </a:p>
+          <a:p>
+            <a:pPr>
+              <a:lnSpc>
+                <a:spcPct val="108000"/>
+              </a:lnSpc>
+              <a:spcAft>
+                <a:spcPts val="900"/>
+              </a:spcAft>
+            </a:pPr>
+            <a:r>
+              <a:rPr sz="1350">
+                <a:solidFill>
+                  <a:srgbClr val="121D21"/>
+                </a:solidFill>
+                <a:latin typeface="Calibri" panose="020F0502020204030204"/>
+              </a:rPr>
+              <a:t>•  A native mobile application</a:t>
+            </a:r>
+            <a:endParaRPr sz="1350">
+              <a:solidFill>
+                <a:srgbClr val="121D21"/>
+              </a:solidFill>
+              <a:latin typeface="Calibri" panose="020F0502020204030204"/>
+            </a:endParaRPr>
+          </a:p>
+          <a:p>
+            <a:pPr>
+              <a:lnSpc>
+                <a:spcPct val="108000"/>
+              </a:lnSpc>
+              <a:spcAft>
+                <a:spcPts val="900"/>
+              </a:spcAft>
+            </a:pPr>
+            <a:r>
+              <a:rPr sz="1350">
+                <a:solidFill>
+                  <a:srgbClr val="121D21"/>
+                </a:solidFill>
+                <a:latin typeface="Calibri" panose="020F0502020204030204"/>
+              </a:rPr>
+              <a:t>•  Offline-first operation without an internet connection</a:t>
+            </a:r>
+            <a:endParaRPr sz="1350">
+              <a:solidFill>
+                <a:srgbClr val="121D21"/>
+              </a:solidFill>
+              <a:latin typeface="Calibri" panose="020F0502020204030204"/>
+            </a:endParaRPr>
+          </a:p>
+          <a:p>
+            <a:pPr>
+              <a:lnSpc>
+                <a:spcPct val="108000"/>
+              </a:lnSpc>
+              <a:spcAft>
+                <a:spcPts val="900"/>
+              </a:spcAft>
+            </a:pPr>
+            <a:r>
+              <a:rPr sz="1350">
+                <a:solidFill>
+                  <a:srgbClr val="121D21"/>
+                </a:solidFill>
+                <a:latin typeface="Calibri" panose="020F0502020204030204"/>
+              </a:rPr>
+              <a:t>•  Multi-currency / non-Kenyan market support</a:t>
+            </a:r>
+            <a:endParaRPr sz="1350">
+              <a:solidFill>
+                <a:srgbClr val="121D21"/>
+              </a:solidFill>
+              <a:latin typeface="Calibri" panose="020F0502020204030204"/>
+            </a:endParaRPr>
           </a:p>
         </p:txBody>
       </p:sp>
@@ -16007,8 +17613,8 @@
 </p:sld>
 </file>
 
-<file path=ppt/slides/slide8.xml><?xml version="1.0" encoding="utf-8"?>
-<p:sld xmlns:a="http://schemas.openxmlformats.org/drawingml/2006/main" xmlns:p="http://schemas.openxmlformats.org/presentationml/2006/main" xmlns:r="http://schemas.openxmlformats.org/officeDocument/2006/relationships">
+<file path=ppt/slides/slide9.xml><?xml version="1.0" encoding="utf-8"?>
+<p:sld xmlns:a="http://schemas.openxmlformats.org/drawingml/2006/main" xmlns:r="http://schemas.openxmlformats.org/officeDocument/2006/relationships" xmlns:p="http://schemas.openxmlformats.org/presentationml/2006/main">
   <p:cSld>
     <p:bg>
       <p:bgPr>
@@ -16097,10 +17703,16 @@
                 <a:solidFill>
                   <a:srgbClr val="E69A1F"/>
                 </a:solidFill>
-                <a:latin typeface="Calibri"/>
+                <a:latin typeface="Calibri" panose="020F0502020204030204"/>
               </a:rPr>
               <a:t>CHAPTER ONE</a:t>
             </a:r>
+            <a:endParaRPr sz="1300" b="1" i="0">
+              <a:solidFill>
+                <a:srgbClr val="E69A1F"/>
+              </a:solidFill>
+              <a:latin typeface="Calibri" panose="020F0502020204030204"/>
+            </a:endParaRPr>
           </a:p>
         </p:txBody>
       </p:sp>
@@ -16132,10 +17744,16 @@
                 <a:solidFill>
                   <a:srgbClr val="121D21"/>
                 </a:solidFill>
-                <a:latin typeface="Calibri"/>
-              </a:rPr>
-              <a:t>Scope of the Project</a:t>
-            </a:r>
+                <a:latin typeface="Calibri" panose="020F0502020204030204"/>
+              </a:rPr>
+              <a:t>Significance of the Study</a:t>
+            </a:r>
+            <a:endParaRPr sz="3000" b="1" i="0">
+              <a:solidFill>
+                <a:srgbClr val="121D21"/>
+              </a:solidFill>
+              <a:latin typeface="Calibri" panose="020F0502020204030204"/>
+            </a:endParaRPr>
           </a:p>
         </p:txBody>
       </p:sp>
@@ -16211,10 +17829,16 @@
                 <a:solidFill>
                   <a:srgbClr val="4B5A5E"/>
                 </a:solidFill>
-                <a:latin typeface="Calibri"/>
+                <a:latin typeface="Calibri" panose="020F0502020204030204"/>
               </a:rPr>
               <a:t>KopaAlert — Stanley Murangiri</a:t>
             </a:r>
+            <a:endParaRPr sz="1000" b="0" i="0">
+              <a:solidFill>
+                <a:srgbClr val="4B5A5E"/>
+              </a:solidFill>
+              <a:latin typeface="Calibri" panose="020F0502020204030204"/>
+            </a:endParaRPr>
           </a:p>
         </p:txBody>
       </p:sp>
@@ -16246,627 +17870,16 @@
                 <a:solidFill>
                   <a:srgbClr val="4B5A5E"/>
                 </a:solidFill>
-                <a:latin typeface="Calibri"/>
-              </a:rPr>
-              <a:t>8</a:t>
-            </a:r>
-          </a:p>
-        </p:txBody>
-      </p:sp>
-      <p:sp>
-        <p:nvSpPr>
-          <p:cNvPr id="8" name="TextBox 7"/>
-          <p:cNvSpPr txBox="1"/>
-          <p:nvPr/>
-        </p:nvSpPr>
-        <p:spPr>
-          <a:xfrm>
-            <a:off x="685800" y="1572768"/>
-            <a:ext cx="5120640" cy="365760"/>
-          </a:xfrm>
-          <a:prstGeom prst="rect">
-            <a:avLst/>
-          </a:prstGeom>
-          <a:noFill/>
-        </p:spPr>
-        <p:txBody>
-          <a:bodyPr wrap="square">
-            <a:spAutoFit/>
-          </a:bodyPr>
-          <a:lstStyle/>
-          <a:p>
-            <a:pPr algn="l"/>
-            <a:r>
-              <a:rPr sz="1700" b="1" i="0">
-                <a:solidFill>
-                  <a:srgbClr val="0F766E"/>
-                </a:solidFill>
-                <a:latin typeface="Calibri"/>
-              </a:rPr>
-              <a:t>In Scope</a:t>
-            </a:r>
-          </a:p>
-        </p:txBody>
-      </p:sp>
-      <p:sp>
-        <p:nvSpPr>
-          <p:cNvPr id="9" name="TextBox 8"/>
-          <p:cNvSpPr txBox="1"/>
-          <p:nvPr/>
-        </p:nvSpPr>
-        <p:spPr>
-          <a:xfrm>
-            <a:off x="685800" y="2011680"/>
-            <a:ext cx="5394960" cy="4206240"/>
-          </a:xfrm>
-          <a:prstGeom prst="rect">
-            <a:avLst/>
-          </a:prstGeom>
-          <a:noFill/>
-        </p:spPr>
-        <p:txBody>
-          <a:bodyPr wrap="square">
-            <a:spAutoFit/>
-          </a:bodyPr>
-          <a:lstStyle/>
-          <a:p>
-            <a:pPr>
-              <a:lnSpc>
-                <a:spcPct val="108000"/>
-              </a:lnSpc>
-              <a:spcAft>
-                <a:spcPts val="900"/>
-              </a:spcAft>
-            </a:pPr>
-            <a:r>
-              <a:rPr sz="1350">
-                <a:solidFill>
-                  <a:srgbClr val="121D21"/>
-                </a:solidFill>
-                <a:latin typeface="Calibri"/>
-              </a:rPr>
-              <a:t>•  Customer (debtor) registration and management</a:t>
-            </a:r>
-          </a:p>
-          <a:p>
-            <a:pPr>
-              <a:lnSpc>
-                <a:spcPct val="108000"/>
-              </a:lnSpc>
-              <a:spcAft>
-                <a:spcPts val="900"/>
-              </a:spcAft>
-            </a:pPr>
-            <a:r>
-              <a:rPr sz="1350">
-                <a:solidFill>
-                  <a:srgbClr val="121D21"/>
-                </a:solidFill>
-                <a:latin typeface="Calibri"/>
-              </a:rPr>
-              <a:t>•  Debt recording, due dates, and payment logging</a:t>
-            </a:r>
-          </a:p>
-          <a:p>
-            <a:pPr>
-              <a:lnSpc>
-                <a:spcPct val="108000"/>
-              </a:lnSpc>
-              <a:spcAft>
-                <a:spcPts val="900"/>
-              </a:spcAft>
-            </a:pPr>
-            <a:r>
-              <a:rPr sz="1350">
-                <a:solidFill>
-                  <a:srgbClr val="121D21"/>
-                </a:solidFill>
-                <a:latin typeface="Calibri"/>
-              </a:rPr>
-              <a:t>•  Automated SMS reminders (Africa's Talking) and email reminders (Resend)</a:t>
-            </a:r>
-          </a:p>
-          <a:p>
-            <a:pPr>
-              <a:lnSpc>
-                <a:spcPct val="108000"/>
-              </a:lnSpc>
-              <a:spcAft>
-                <a:spcPts val="900"/>
-              </a:spcAft>
-            </a:pPr>
-            <a:r>
-              <a:rPr sz="1350">
-                <a:solidFill>
-                  <a:srgbClr val="121D21"/>
-                </a:solidFill>
-                <a:latin typeface="Calibri"/>
-              </a:rPr>
-              <a:t>•  Customer payment-behaviour rating and auto-blacklisting of chronic defaulters</a:t>
-            </a:r>
-          </a:p>
-          <a:p>
-            <a:pPr>
-              <a:lnSpc>
-                <a:spcPct val="108000"/>
-              </a:lnSpc>
-              <a:spcAft>
-                <a:spcPts val="900"/>
-              </a:spcAft>
-            </a:pPr>
-            <a:r>
-              <a:rPr sz="1350">
-                <a:solidFill>
-                  <a:srgbClr val="121D21"/>
-                </a:solidFill>
-                <a:latin typeface="Calibri"/>
-              </a:rPr>
-              <a:t>•  Business team management with staff roles and permissions</a:t>
-            </a:r>
-          </a:p>
-          <a:p>
-            <a:pPr>
-              <a:lnSpc>
-                <a:spcPct val="108000"/>
-              </a:lnSpc>
-              <a:spcAft>
-                <a:spcPts val="900"/>
-              </a:spcAft>
-            </a:pPr>
-            <a:r>
-              <a:rPr sz="1350">
-                <a:solidFill>
-                  <a:srgbClr val="121D21"/>
-                </a:solidFill>
-                <a:latin typeface="Calibri"/>
-              </a:rPr>
-              <a:t>•  Subscription billing (monthly and one-time lifetime plans)</a:t>
-            </a:r>
-          </a:p>
-          <a:p>
-            <a:pPr>
-              <a:lnSpc>
-                <a:spcPct val="108000"/>
-              </a:lnSpc>
-              <a:spcAft>
-                <a:spcPts val="900"/>
-              </a:spcAft>
-            </a:pPr>
-            <a:r>
-              <a:rPr sz="1350">
-                <a:solidFill>
-                  <a:srgbClr val="121D21"/>
-                </a:solidFill>
-                <a:latin typeface="Calibri"/>
-              </a:rPr>
-              <a:t>•  A platform admin console to approve new businesses and audit activity</a:t>
-            </a:r>
-          </a:p>
-          <a:p>
-            <a:pPr>
-              <a:lnSpc>
-                <a:spcPct val="108000"/>
-              </a:lnSpc>
-              <a:spcAft>
-                <a:spcPts val="900"/>
-              </a:spcAft>
-            </a:pPr>
-            <a:r>
-              <a:rPr sz="1350">
-                <a:solidFill>
-                  <a:srgbClr val="121D21"/>
-                </a:solidFill>
-                <a:latin typeface="Calibri"/>
-              </a:rPr>
-              <a:t>•  Reporting and analytics on debts, payments, customers, and SMS delivery</a:t>
-            </a:r>
-          </a:p>
-        </p:txBody>
-      </p:sp>
-      <p:sp>
-        <p:nvSpPr>
-          <p:cNvPr id="10" name="TextBox 9"/>
-          <p:cNvSpPr txBox="1"/>
-          <p:nvPr/>
-        </p:nvSpPr>
-        <p:spPr>
-          <a:xfrm>
-            <a:off x="6309360" y="1572768"/>
-            <a:ext cx="5120640" cy="365760"/>
-          </a:xfrm>
-          <a:prstGeom prst="rect">
-            <a:avLst/>
-          </a:prstGeom>
-          <a:noFill/>
-        </p:spPr>
-        <p:txBody>
-          <a:bodyPr wrap="square">
-            <a:spAutoFit/>
-          </a:bodyPr>
-          <a:lstStyle/>
-          <a:p>
-            <a:pPr algn="l"/>
-            <a:r>
-              <a:rPr sz="1700" b="1" i="0">
-                <a:solidFill>
-                  <a:srgbClr val="E69A1F"/>
-                </a:solidFill>
-                <a:latin typeface="Calibri"/>
-              </a:rPr>
-              <a:t>Out of Scope (for now)</a:t>
-            </a:r>
-          </a:p>
-        </p:txBody>
-      </p:sp>
-      <p:sp>
-        <p:nvSpPr>
-          <p:cNvPr id="11" name="TextBox 10"/>
-          <p:cNvSpPr txBox="1"/>
-          <p:nvPr/>
-        </p:nvSpPr>
-        <p:spPr>
-          <a:xfrm>
-            <a:off x="6309360" y="2011680"/>
-            <a:ext cx="5394960" cy="4206240"/>
-          </a:xfrm>
-          <a:prstGeom prst="rect">
-            <a:avLst/>
-          </a:prstGeom>
-          <a:noFill/>
-        </p:spPr>
-        <p:txBody>
-          <a:bodyPr wrap="square">
-            <a:spAutoFit/>
-          </a:bodyPr>
-          <a:lstStyle/>
-          <a:p>
-            <a:pPr>
-              <a:lnSpc>
-                <a:spcPct val="108000"/>
-              </a:lnSpc>
-              <a:spcAft>
-                <a:spcPts val="900"/>
-              </a:spcAft>
-            </a:pPr>
-            <a:r>
-              <a:rPr sz="1350">
-                <a:solidFill>
-                  <a:srgbClr val="121D21"/>
-                </a:solidFill>
-                <a:latin typeface="Calibri"/>
-              </a:rPr>
-              <a:t>•  Direct, automated payment collection (e.g. M-Pesa STK Push) — payments are currently recorded manually once received</a:t>
-            </a:r>
-          </a:p>
-          <a:p>
-            <a:pPr>
-              <a:lnSpc>
-                <a:spcPct val="108000"/>
-              </a:lnSpc>
-              <a:spcAft>
-                <a:spcPts val="900"/>
-              </a:spcAft>
-            </a:pPr>
-            <a:r>
-              <a:rPr sz="1350">
-                <a:solidFill>
-                  <a:srgbClr val="121D21"/>
-                </a:solidFill>
-                <a:latin typeface="Calibri"/>
-              </a:rPr>
-              <a:t>•  Point-of-sale or inventory management</a:t>
-            </a:r>
-          </a:p>
-          <a:p>
-            <a:pPr>
-              <a:lnSpc>
-                <a:spcPct val="108000"/>
-              </a:lnSpc>
-              <a:spcAft>
-                <a:spcPts val="900"/>
-              </a:spcAft>
-            </a:pPr>
-            <a:r>
-              <a:rPr sz="1350">
-                <a:solidFill>
-                  <a:srgbClr val="121D21"/>
-                </a:solidFill>
-                <a:latin typeface="Calibri"/>
-              </a:rPr>
-              <a:t>•  A native mobile application</a:t>
-            </a:r>
-          </a:p>
-          <a:p>
-            <a:pPr>
-              <a:lnSpc>
-                <a:spcPct val="108000"/>
-              </a:lnSpc>
-              <a:spcAft>
-                <a:spcPts val="900"/>
-              </a:spcAft>
-            </a:pPr>
-            <a:r>
-              <a:rPr sz="1350">
-                <a:solidFill>
-                  <a:srgbClr val="121D21"/>
-                </a:solidFill>
-                <a:latin typeface="Calibri"/>
-              </a:rPr>
-              <a:t>•  Offline-first operation without an internet connection</a:t>
-            </a:r>
-          </a:p>
-          <a:p>
-            <a:pPr>
-              <a:lnSpc>
-                <a:spcPct val="108000"/>
-              </a:lnSpc>
-              <a:spcAft>
-                <a:spcPts val="900"/>
-              </a:spcAft>
-            </a:pPr>
-            <a:r>
-              <a:rPr sz="1350">
-                <a:solidFill>
-                  <a:srgbClr val="121D21"/>
-                </a:solidFill>
-                <a:latin typeface="Calibri"/>
-              </a:rPr>
-              <a:t>•  Multi-currency / non-Kenyan market support</a:t>
-            </a:r>
-          </a:p>
-        </p:txBody>
-      </p:sp>
-    </p:spTree>
-  </p:cSld>
-  <p:clrMapOvr>
-    <a:masterClrMapping/>
-  </p:clrMapOvr>
-</p:sld>
-</file>
-
-<file path=ppt/slides/slide9.xml><?xml version="1.0" encoding="utf-8"?>
-<p:sld xmlns:a="http://schemas.openxmlformats.org/drawingml/2006/main" xmlns:p="http://schemas.openxmlformats.org/presentationml/2006/main" xmlns:r="http://schemas.openxmlformats.org/officeDocument/2006/relationships">
-  <p:cSld>
-    <p:bg>
-      <p:bgPr>
-        <a:solidFill>
-          <a:srgbClr val="F6FAF9"/>
-        </a:solidFill>
-        <a:effectLst/>
-      </p:bgPr>
-    </p:bg>
-    <p:spTree>
-      <p:nvGrpSpPr>
-        <p:cNvPr id="1" name=""/>
-        <p:cNvGrpSpPr/>
-        <p:nvPr/>
-      </p:nvGrpSpPr>
-      <p:grpSpPr/>
-      <p:sp>
-        <p:nvSpPr>
-          <p:cNvPr id="2" name="Rectangle 1"/>
-          <p:cNvSpPr/>
-          <p:nvPr/>
-        </p:nvSpPr>
-        <p:spPr>
-          <a:xfrm>
-            <a:off x="0" y="0"/>
-            <a:ext cx="12191695" cy="109728"/>
-          </a:xfrm>
-          <a:prstGeom prst="rect">
-            <a:avLst/>
-          </a:prstGeom>
-          <a:solidFill>
-            <a:srgbClr val="0F766E"/>
-          </a:solidFill>
-          <a:ln>
-            <a:noFill/>
-          </a:ln>
-          <a:effectLst/>
-        </p:spPr>
-        <p:style>
-          <a:lnRef idx="1">
-            <a:schemeClr val="accent1"/>
-          </a:lnRef>
-          <a:fillRef idx="3">
-            <a:schemeClr val="accent1"/>
-          </a:fillRef>
-          <a:effectRef idx="2">
-            <a:schemeClr val="accent1"/>
-          </a:effectRef>
-          <a:fontRef idx="minor">
-            <a:schemeClr val="lt1"/>
-          </a:fontRef>
-        </p:style>
-        <p:txBody>
-          <a:bodyPr rtlCol="0" anchor="ctr"/>
-          <a:lstStyle/>
-          <a:p>
-            <a:pPr algn="ctr"/>
-          </a:p>
-        </p:txBody>
-      </p:sp>
-      <p:sp>
-        <p:nvSpPr>
-          <p:cNvPr id="3" name="TextBox 2"/>
-          <p:cNvSpPr txBox="1"/>
-          <p:nvPr/>
-        </p:nvSpPr>
-        <p:spPr>
-          <a:xfrm>
-            <a:off x="640080" y="320040"/>
-            <a:ext cx="7315200" cy="320040"/>
-          </a:xfrm>
-          <a:prstGeom prst="rect">
-            <a:avLst/>
-          </a:prstGeom>
-          <a:noFill/>
-        </p:spPr>
-        <p:txBody>
-          <a:bodyPr wrap="square">
-            <a:spAutoFit/>
-          </a:bodyPr>
-          <a:lstStyle/>
-          <a:p>
-            <a:pPr algn="l"/>
-            <a:r>
-              <a:rPr sz="1300" b="1" i="0">
-                <a:solidFill>
-                  <a:srgbClr val="E69A1F"/>
-                </a:solidFill>
-                <a:latin typeface="Calibri"/>
-              </a:rPr>
-              <a:t>CHAPTER ONE</a:t>
-            </a:r>
-          </a:p>
-        </p:txBody>
-      </p:sp>
-      <p:sp>
-        <p:nvSpPr>
-          <p:cNvPr id="4" name="TextBox 3"/>
-          <p:cNvSpPr txBox="1"/>
-          <p:nvPr/>
-        </p:nvSpPr>
-        <p:spPr>
-          <a:xfrm>
-            <a:off x="640080" y="621792"/>
-            <a:ext cx="10515600" cy="731520"/>
-          </a:xfrm>
-          <a:prstGeom prst="rect">
-            <a:avLst/>
-          </a:prstGeom>
-          <a:noFill/>
-        </p:spPr>
-        <p:txBody>
-          <a:bodyPr wrap="square">
-            <a:spAutoFit/>
-          </a:bodyPr>
-          <a:lstStyle/>
-          <a:p>
-            <a:pPr algn="l"/>
-            <a:r>
-              <a:rPr sz="3000" b="1" i="0">
-                <a:solidFill>
-                  <a:srgbClr val="121D21"/>
-                </a:solidFill>
-                <a:latin typeface="Calibri"/>
-              </a:rPr>
-              <a:t>Significance of the Study</a:t>
-            </a:r>
-          </a:p>
-        </p:txBody>
-      </p:sp>
-      <p:sp>
-        <p:nvSpPr>
-          <p:cNvPr id="5" name="Rectangle 4"/>
-          <p:cNvSpPr/>
-          <p:nvPr/>
-        </p:nvSpPr>
-        <p:spPr>
-          <a:xfrm>
-            <a:off x="658368" y="1298448"/>
-            <a:ext cx="1005840" cy="44450"/>
-          </a:xfrm>
-          <a:prstGeom prst="rect">
-            <a:avLst/>
-          </a:prstGeom>
-          <a:solidFill>
-            <a:srgbClr val="0F766E"/>
-          </a:solidFill>
-          <a:ln>
-            <a:noFill/>
-          </a:ln>
-          <a:effectLst/>
-        </p:spPr>
-        <p:style>
-          <a:lnRef idx="1">
-            <a:schemeClr val="accent1"/>
-          </a:lnRef>
-          <a:fillRef idx="3">
-            <a:schemeClr val="accent1"/>
-          </a:fillRef>
-          <a:effectRef idx="2">
-            <a:schemeClr val="accent1"/>
-          </a:effectRef>
-          <a:fontRef idx="minor">
-            <a:schemeClr val="lt1"/>
-          </a:fontRef>
-        </p:style>
-        <p:txBody>
-          <a:bodyPr rtlCol="0" anchor="ctr"/>
-          <a:lstStyle/>
-          <a:p>
-            <a:pPr algn="ctr"/>
-          </a:p>
-        </p:txBody>
-      </p:sp>
-      <p:sp>
-        <p:nvSpPr>
-          <p:cNvPr id="6" name="TextBox 5"/>
-          <p:cNvSpPr txBox="1"/>
-          <p:nvPr/>
-        </p:nvSpPr>
-        <p:spPr>
-          <a:xfrm>
-            <a:off x="640080" y="6473952"/>
-            <a:ext cx="5486400" cy="274320"/>
-          </a:xfrm>
-          <a:prstGeom prst="rect">
-            <a:avLst/>
-          </a:prstGeom>
-          <a:noFill/>
-        </p:spPr>
-        <p:txBody>
-          <a:bodyPr wrap="square">
-            <a:spAutoFit/>
-          </a:bodyPr>
-          <a:lstStyle/>
-          <a:p>
-            <a:pPr algn="l"/>
-            <a:r>
-              <a:rPr sz="1000" b="0" i="0">
-                <a:solidFill>
-                  <a:srgbClr val="4B5A5E"/>
-                </a:solidFill>
-                <a:latin typeface="Calibri"/>
-              </a:rPr>
-              <a:t>KopaAlert — Stanley Murangiri</a:t>
-            </a:r>
-          </a:p>
-        </p:txBody>
-      </p:sp>
-      <p:sp>
-        <p:nvSpPr>
-          <p:cNvPr id="7" name="TextBox 6"/>
-          <p:cNvSpPr txBox="1"/>
-          <p:nvPr/>
-        </p:nvSpPr>
-        <p:spPr>
-          <a:xfrm>
-            <a:off x="10972800" y="6473952"/>
-            <a:ext cx="548640" cy="274320"/>
-          </a:xfrm>
-          <a:prstGeom prst="rect">
-            <a:avLst/>
-          </a:prstGeom>
-          <a:noFill/>
-        </p:spPr>
-        <p:txBody>
-          <a:bodyPr wrap="square">
-            <a:spAutoFit/>
-          </a:bodyPr>
-          <a:lstStyle/>
-          <a:p>
-            <a:pPr algn="r"/>
-            <a:r>
-              <a:rPr sz="1000" b="0" i="0">
-                <a:solidFill>
-                  <a:srgbClr val="4B5A5E"/>
-                </a:solidFill>
-                <a:latin typeface="Calibri"/>
+                <a:latin typeface="Calibri" panose="020F0502020204030204"/>
               </a:rPr>
               <a:t>9</a:t>
             </a:r>
+            <a:endParaRPr sz="1000" b="0" i="0">
+              <a:solidFill>
+                <a:srgbClr val="4B5A5E"/>
+              </a:solidFill>
+              <a:latin typeface="Calibri" panose="020F0502020204030204"/>
+            </a:endParaRPr>
           </a:p>
         </p:txBody>
       </p:sp>
@@ -16905,10 +17918,16 @@
                 <a:solidFill>
                   <a:srgbClr val="121D21"/>
                 </a:solidFill>
-                <a:latin typeface="Calibri"/>
+                <a:latin typeface="Calibri" panose="020F0502020204030204"/>
               </a:rPr>
               <a:t>•  To the business owner: replaces a fragile paper process with a system that cannot forget, reducing the amount of legitimately owed money that is silently lost.</a:t>
             </a:r>
+            <a:endParaRPr sz="1700">
+              <a:solidFill>
+                <a:srgbClr val="121D21"/>
+              </a:solidFill>
+              <a:latin typeface="Calibri" panose="020F0502020204030204"/>
+            </a:endParaRPr>
           </a:p>
           <a:p>
             <a:pPr>
@@ -16924,10 +17943,16 @@
                 <a:solidFill>
                   <a:srgbClr val="121D21"/>
                 </a:solidFill>
-                <a:latin typeface="Calibri"/>
+                <a:latin typeface="Calibri" panose="020F0502020204030204"/>
               </a:rPr>
               <a:t>•  To the customer: receives timely, consistent reminders instead of an occasional, awkward in-person or phone request, making it easier to plan and pay on time.</a:t>
             </a:r>
+            <a:endParaRPr sz="1700">
+              <a:solidFill>
+                <a:srgbClr val="121D21"/>
+              </a:solidFill>
+              <a:latin typeface="Calibri" panose="020F0502020204030204"/>
+            </a:endParaRPr>
           </a:p>
           <a:p>
             <a:pPr>
@@ -16943,10 +17968,16 @@
                 <a:solidFill>
                   <a:srgbClr val="121D21"/>
                 </a:solidFill>
-                <a:latin typeface="Calibri"/>
+                <a:latin typeface="Calibri" panose="020F0502020204030204"/>
               </a:rPr>
               <a:t>•  To the wider small-business community: demonstrates that an affordable, well-designed digital tool can replace informal credit-tracking practices used across thousands of similar businesses in Kenya.</a:t>
             </a:r>
+            <a:endParaRPr sz="1700">
+              <a:solidFill>
+                <a:srgbClr val="121D21"/>
+              </a:solidFill>
+              <a:latin typeface="Calibri" panose="020F0502020204030204"/>
+            </a:endParaRPr>
           </a:p>
           <a:p>
             <a:pPr>
@@ -16962,10 +17993,16 @@
                 <a:solidFill>
                   <a:srgbClr val="121D21"/>
                 </a:solidFill>
-                <a:latin typeface="Calibri"/>
+                <a:latin typeface="Calibri" panose="020F0502020204030204"/>
               </a:rPr>
               <a:t>•  To me, as a student: this project let me take a real problem I personally witnessed and carry it through the full software development lifecycle — from problem identification to a working, deployed, tested system.</a:t>
             </a:r>
+            <a:endParaRPr sz="1700">
+              <a:solidFill>
+                <a:srgbClr val="121D21"/>
+              </a:solidFill>
+              <a:latin typeface="Calibri" panose="020F0502020204030204"/>
+            </a:endParaRPr>
           </a:p>
         </p:txBody>
       </p:sp>
@@ -17293,6 +18330,10 @@
       </a:style>
     </a:lnDef>
   </a:objectDefaults>
-  <a:extraClrSchemeLst/>
+  <a:extLst>
+    <a:ext uri="{05A4C25C-085E-4340-85A3-A5531E510DB2}">
+      <thm15:themeFamily xmlns:thm15="http://schemas.microsoft.com/office/thememl/2012/main" name="Office Theme" id="{62F939B6-93AF-4DB8-9C6B-D6C7DFDC589F}" vid="{4A3C46E8-61CC-4603-A589-7422A47A8E4A}"/>
+    </a:ext>
+  </a:extLst>
 </a:theme>
 </file>
--- a/docs/KopaAlert-Project-Documentation.pptx
+++ b/docs/KopaAlert-Project-Documentation.pptx
@@ -13758,31 +13758,6 @@
                 <a:latin typeface="Calibri" panose="020F0502020204030204"/>
               </a:rPr>
               <a:t>•  18. Conclusion</a:t>
-            </a:r>
-            <a:endParaRPr sz="1700">
-              <a:solidFill>
-                <a:srgbClr val="121D21"/>
-              </a:solidFill>
-              <a:latin typeface="Calibri" panose="020F0502020204030204"/>
-            </a:endParaRPr>
-          </a:p>
-          <a:p>
-            <a:pPr>
-              <a:lnSpc>
-                <a:spcPct val="108000"/>
-              </a:lnSpc>
-              <a:spcAft>
-                <a:spcPts val="1600"/>
-              </a:spcAft>
-            </a:pPr>
-            <a:r>
-              <a:rPr sz="1700">
-                <a:solidFill>
-                  <a:srgbClr val="121D21"/>
-                </a:solidFill>
-                <a:latin typeface="Calibri" panose="020F0502020204030204"/>
-              </a:rPr>
-              <a:t>•  19. References</a:t>
             </a:r>
             <a:endParaRPr sz="1700">
               <a:solidFill>
